--- a/KI_Auftragsannahme_Schellenberg.pptx
+++ b/KI_Auftragsannahme_Schellenberg.pptx
@@ -15,6 +15,12 @@
     <p:sldId id="263" r:id="rId14"/>
     <p:sldId id="264" r:id="rId15"/>
     <p:sldId id="265" r:id="rId16"/>
+    <p:sldId id="266" r:id="rId17"/>
+    <p:sldId id="267" r:id="rId18"/>
+    <p:sldId id="268" r:id="rId19"/>
+    <p:sldId id="269" r:id="rId20"/>
+    <p:sldId id="270" r:id="rId21"/>
+    <p:sldId id="271" r:id="rId22"/>
   </p:sldIdLst>
   <p:sldSz cx="12188952" cy="6858000" type="screen4x3"/>
   <p:notesSz cx="6858000" cy="9144000"/>
@@ -4404,6 +4410,7087 @@
       <p:sp>
         <p:nvSpPr>
           <p:cNvPr id="32" name="TextBox 31"/>
+          <p:cNvSpPr txBox="1"/>
+          <p:nvPr/>
+        </p:nvSpPr>
+        <p:spPr>
+          <a:xfrm>
+            <a:off x="914400" y="6492240"/>
+            <a:ext cx="10149840" cy="320040"/>
+          </a:xfrm>
+          <a:prstGeom prst="rect">
+            <a:avLst/>
+          </a:prstGeom>
+          <a:noFill/>
+        </p:spPr>
+        <p:txBody>
+          <a:bodyPr wrap="square">
+            <a:spAutoFit/>
+          </a:bodyPr>
+          <a:lstStyle/>
+          <a:p>
+            <a:pPr algn="ctr"/>
+            <a:r>
+              <a:rPr sz="1000" b="0" i="0">
+                <a:solidFill>
+                  <a:srgbClr val="55657A"/>
+                </a:solidFill>
+              </a:rPr>
+              <a:t>Schellenberg Druck AG · Schützenhausstrasse 5 · 8330 Pfäffikon · schellenbergdruck.ch</a:t>
+            </a:r>
+          </a:p>
+        </p:txBody>
+      </p:sp>
+    </p:spTree>
+  </p:cSld>
+  <p:clrMapOvr>
+    <a:masterClrMapping/>
+  </p:clrMapOvr>
+</p:sld>
+</file>
+
+<file path=ppt/slides/slide11.xml><?xml version="1.0" encoding="utf-8"?>
+<p:sld xmlns:a="http://schemas.openxmlformats.org/drawingml/2006/main" xmlns:p="http://schemas.openxmlformats.org/presentationml/2006/main" xmlns:r="http://schemas.openxmlformats.org/officeDocument/2006/relationships">
+  <p:cSld>
+    <p:bg>
+      <p:bgPr>
+        <a:solidFill>
+          <a:srgbClr val="1A2E4A"/>
+        </a:solidFill>
+        <a:effectLst/>
+      </p:bgPr>
+    </p:bg>
+    <p:spTree>
+      <p:nvGrpSpPr>
+        <p:cNvPr id="1" name=""/>
+        <p:cNvGrpSpPr/>
+        <p:nvPr/>
+      </p:nvGrpSpPr>
+      <p:grpSpPr/>
+      <p:sp>
+        <p:nvSpPr>
+          <p:cNvPr id="2" name="Rectangle 1"/>
+          <p:cNvSpPr/>
+          <p:nvPr/>
+        </p:nvSpPr>
+        <p:spPr>
+          <a:xfrm>
+            <a:off x="0" y="0"/>
+            <a:ext cx="411480" cy="6858000"/>
+          </a:xfrm>
+          <a:prstGeom prst="rect">
+            <a:avLst/>
+          </a:prstGeom>
+          <a:solidFill>
+            <a:srgbClr val="E85D04"/>
+          </a:solidFill>
+          <a:ln>
+            <a:noFill/>
+          </a:ln>
+        </p:spPr>
+        <p:style>
+          <a:lnRef idx="1">
+            <a:schemeClr val="accent1"/>
+          </a:lnRef>
+          <a:fillRef idx="3">
+            <a:schemeClr val="accent1"/>
+          </a:fillRef>
+          <a:effectRef idx="2">
+            <a:schemeClr val="accent1"/>
+          </a:effectRef>
+          <a:fontRef idx="minor">
+            <a:schemeClr val="lt1"/>
+          </a:fontRef>
+        </p:style>
+        <p:txBody>
+          <a:bodyPr rtlCol="0" anchor="ctr"/>
+          <a:lstStyle/>
+          <a:p>
+            <a:pPr algn="ctr"/>
+          </a:p>
+        </p:txBody>
+      </p:sp>
+      <p:sp>
+        <p:nvSpPr>
+          <p:cNvPr id="3" name="TextBox 2"/>
+          <p:cNvSpPr txBox="1"/>
+          <p:nvPr/>
+        </p:nvSpPr>
+        <p:spPr>
+          <a:xfrm>
+            <a:off x="914400" y="320040"/>
+            <a:ext cx="10058400" cy="640080"/>
+          </a:xfrm>
+          <a:prstGeom prst="rect">
+            <a:avLst/>
+          </a:prstGeom>
+          <a:noFill/>
+        </p:spPr>
+        <p:txBody>
+          <a:bodyPr wrap="square">
+            <a:spAutoFit/>
+          </a:bodyPr>
+          <a:lstStyle/>
+          <a:p>
+            <a:pPr algn="l"/>
+            <a:r>
+              <a:rPr sz="3000" b="1" i="0">
+                <a:solidFill>
+                  <a:srgbClr val="FFFFFF"/>
+                </a:solidFill>
+              </a:rPr>
+              <a:t>Von Zapier zu n8n</a:t>
+            </a:r>
+          </a:p>
+        </p:txBody>
+      </p:sp>
+      <p:sp>
+        <p:nvSpPr>
+          <p:cNvPr id="4" name="TextBox 3"/>
+          <p:cNvSpPr txBox="1"/>
+          <p:nvPr/>
+        </p:nvSpPr>
+        <p:spPr>
+          <a:xfrm>
+            <a:off x="914400" y="960120"/>
+            <a:ext cx="10058400" cy="411480"/>
+          </a:xfrm>
+          <a:prstGeom prst="rect">
+            <a:avLst/>
+          </a:prstGeom>
+          <a:noFill/>
+        </p:spPr>
+        <p:txBody>
+          <a:bodyPr wrap="square">
+            <a:spAutoFit/>
+          </a:bodyPr>
+          <a:lstStyle/>
+          <a:p>
+            <a:pPr algn="l"/>
+            <a:r>
+              <a:rPr sz="1500" b="0" i="0">
+                <a:solidFill>
+                  <a:srgbClr val="F4A261"/>
+                </a:solidFill>
+              </a:rPr>
+              <a:t>Phase 2 – Plattformwechsel &amp; Architekturentscheid</a:t>
+            </a:r>
+          </a:p>
+        </p:txBody>
+      </p:sp>
+      <p:sp>
+        <p:nvSpPr>
+          <p:cNvPr id="5" name="Rectangle 4"/>
+          <p:cNvSpPr/>
+          <p:nvPr/>
+        </p:nvSpPr>
+        <p:spPr>
+          <a:xfrm>
+            <a:off x="914400" y="1508760"/>
+            <a:ext cx="4846320" cy="4572000"/>
+          </a:xfrm>
+          <a:prstGeom prst="rect">
+            <a:avLst/>
+          </a:prstGeom>
+          <a:solidFill>
+            <a:srgbClr val="3A1A10"/>
+          </a:solidFill>
+          <a:ln>
+            <a:noFill/>
+          </a:ln>
+        </p:spPr>
+        <p:style>
+          <a:lnRef idx="1">
+            <a:schemeClr val="accent1"/>
+          </a:lnRef>
+          <a:fillRef idx="3">
+            <a:schemeClr val="accent1"/>
+          </a:fillRef>
+          <a:effectRef idx="2">
+            <a:schemeClr val="accent1"/>
+          </a:effectRef>
+          <a:fontRef idx="minor">
+            <a:schemeClr val="lt1"/>
+          </a:fontRef>
+        </p:style>
+        <p:txBody>
+          <a:bodyPr rtlCol="0" anchor="ctr"/>
+          <a:lstStyle/>
+          <a:p>
+            <a:pPr algn="ctr"/>
+          </a:p>
+        </p:txBody>
+      </p:sp>
+      <p:sp>
+        <p:nvSpPr>
+          <p:cNvPr id="6" name="TextBox 5"/>
+          <p:cNvSpPr txBox="1"/>
+          <p:nvPr/>
+        </p:nvSpPr>
+        <p:spPr>
+          <a:xfrm>
+            <a:off x="1097280" y="1600200"/>
+            <a:ext cx="4480560" cy="411480"/>
+          </a:xfrm>
+          <a:prstGeom prst="rect">
+            <a:avLst/>
+          </a:prstGeom>
+          <a:noFill/>
+        </p:spPr>
+        <p:txBody>
+          <a:bodyPr wrap="square">
+            <a:spAutoFit/>
+          </a:bodyPr>
+          <a:lstStyle/>
+          <a:p>
+            <a:pPr algn="l"/>
+            <a:r>
+              <a:rPr sz="1600" b="1" i="0">
+                <a:solidFill>
+                  <a:srgbClr val="FF7A5A"/>
+                </a:solidFill>
+              </a:rPr>
+              <a:t>Zapier – Limitierungen</a:t>
+            </a:r>
+          </a:p>
+        </p:txBody>
+      </p:sp>
+      <p:sp>
+        <p:nvSpPr>
+          <p:cNvPr id="7" name="TextBox 6"/>
+          <p:cNvSpPr txBox="1"/>
+          <p:nvPr/>
+        </p:nvSpPr>
+        <p:spPr>
+          <a:xfrm>
+            <a:off x="1097280" y="2103120"/>
+            <a:ext cx="4480560" cy="3657600"/>
+          </a:xfrm>
+          <a:prstGeom prst="rect">
+            <a:avLst/>
+          </a:prstGeom>
+          <a:noFill/>
+        </p:spPr>
+        <p:txBody>
+          <a:bodyPr wrap="square">
+            <a:spAutoFit/>
+          </a:bodyPr>
+          <a:lstStyle/>
+          <a:p>
+            <a:r>
+              <a:rPr sz="1300">
+                <a:solidFill>
+                  <a:srgbClr val="FFCCBB"/>
+                </a:solidFill>
+              </a:rPr>
+              <a:t>✗  JSON-Arrays nicht nativ unterstützt</a:t>
+            </a:r>
+          </a:p>
+          <a:p>
+            <a:r>
+              <a:rPr sz="1300">
+                <a:solidFill>
+                  <a:srgbClr val="FFCCBB"/>
+                </a:solidFill>
+              </a:rPr>
+              <a:t>✗  Flat Fields nötig (produkt_1...5)</a:t>
+            </a:r>
+          </a:p>
+          <a:p>
+            <a:r>
+              <a:rPr sz="1300">
+                <a:solidFill>
+                  <a:srgbClr val="FFCCBB"/>
+                </a:solidFill>
+              </a:rPr>
+              <a:t>✗  Formatter für Textformatierung unzureichend</a:t>
+            </a:r>
+          </a:p>
+          <a:p>
+            <a:r>
+              <a:rPr sz="1300">
+                <a:solidFill>
+                  <a:srgbClr val="FFCCBB"/>
+                </a:solidFill>
+              </a:rPr>
+              <a:t>✗  HitL: Decision-Feld 'approved'/'rejected'</a:t>
+            </a:r>
+          </a:p>
+          <a:p>
+            <a:r>
+              <a:rPr sz="1300">
+                <a:solidFill>
+                  <a:srgbClr val="FFCCBB"/>
+                </a:solidFill>
+              </a:rPr>
+              <a:t>   oft falsch konfiguriert</a:t>
+            </a:r>
+          </a:p>
+          <a:p>
+            <a:r>
+              <a:rPr sz="1300">
+                <a:solidFill>
+                  <a:srgbClr val="FFCCBB"/>
+                </a:solidFill>
+              </a:rPr>
+              <a:t>✗  Hohe Kosten pro Task/Run</a:t>
+            </a:r>
+          </a:p>
+          <a:p>
+            <a:r>
+              <a:rPr sz="1300">
+                <a:solidFill>
+                  <a:srgbClr val="FFCCBB"/>
+                </a:solidFill>
+              </a:rPr>
+              <a:t>✗  Keine Code-Nodes (kein Python/JS)</a:t>
+            </a:r>
+          </a:p>
+          <a:p>
+            <a:r>
+              <a:rPr sz="1300">
+                <a:solidFill>
+                  <a:srgbClr val="FFCCBB"/>
+                </a:solidFill>
+              </a:rPr>
+              <a:t>✗  Begrenzte Debugging-Möglichkeiten</a:t>
+            </a:r>
+          </a:p>
+        </p:txBody>
+      </p:sp>
+      <p:sp>
+        <p:nvSpPr>
+          <p:cNvPr id="8" name="TextBox 7"/>
+          <p:cNvSpPr txBox="1"/>
+          <p:nvPr/>
+        </p:nvSpPr>
+        <p:spPr>
+          <a:xfrm>
+            <a:off x="5669280" y="3383280"/>
+            <a:ext cx="731520" cy="731520"/>
+          </a:xfrm>
+          <a:prstGeom prst="rect">
+            <a:avLst/>
+          </a:prstGeom>
+          <a:noFill/>
+        </p:spPr>
+        <p:txBody>
+          <a:bodyPr wrap="square">
+            <a:spAutoFit/>
+          </a:bodyPr>
+          <a:lstStyle/>
+          <a:p>
+            <a:pPr algn="ctr"/>
+            <a:r>
+              <a:rPr sz="3600" b="1" i="0">
+                <a:solidFill>
+                  <a:srgbClr val="E85D04"/>
+                </a:solidFill>
+              </a:rPr>
+              <a:t>→</a:t>
+            </a:r>
+          </a:p>
+        </p:txBody>
+      </p:sp>
+      <p:sp>
+        <p:nvSpPr>
+          <p:cNvPr id="9" name="Rectangle 8"/>
+          <p:cNvSpPr/>
+          <p:nvPr/>
+        </p:nvSpPr>
+        <p:spPr>
+          <a:xfrm>
+            <a:off x="6446520" y="1508760"/>
+            <a:ext cx="4846320" cy="4572000"/>
+          </a:xfrm>
+          <a:prstGeom prst="rect">
+            <a:avLst/>
+          </a:prstGeom>
+          <a:solidFill>
+            <a:srgbClr val="0D3B2A"/>
+          </a:solidFill>
+          <a:ln>
+            <a:noFill/>
+          </a:ln>
+        </p:spPr>
+        <p:style>
+          <a:lnRef idx="1">
+            <a:schemeClr val="accent1"/>
+          </a:lnRef>
+          <a:fillRef idx="3">
+            <a:schemeClr val="accent1"/>
+          </a:fillRef>
+          <a:effectRef idx="2">
+            <a:schemeClr val="accent1"/>
+          </a:effectRef>
+          <a:fontRef idx="minor">
+            <a:schemeClr val="lt1"/>
+          </a:fontRef>
+        </p:style>
+        <p:txBody>
+          <a:bodyPr rtlCol="0" anchor="ctr"/>
+          <a:lstStyle/>
+          <a:p>
+            <a:pPr algn="ctr"/>
+          </a:p>
+        </p:txBody>
+      </p:sp>
+      <p:sp>
+        <p:nvSpPr>
+          <p:cNvPr id="10" name="TextBox 9"/>
+          <p:cNvSpPr txBox="1"/>
+          <p:nvPr/>
+        </p:nvSpPr>
+        <p:spPr>
+          <a:xfrm>
+            <a:off x="6629400" y="1600200"/>
+            <a:ext cx="4480560" cy="411480"/>
+          </a:xfrm>
+          <a:prstGeom prst="rect">
+            <a:avLst/>
+          </a:prstGeom>
+          <a:noFill/>
+        </p:spPr>
+        <p:txBody>
+          <a:bodyPr wrap="square">
+            <a:spAutoFit/>
+          </a:bodyPr>
+          <a:lstStyle/>
+          <a:p>
+            <a:pPr algn="l"/>
+            <a:r>
+              <a:rPr sz="1600" b="1" i="0">
+                <a:solidFill>
+                  <a:srgbClr val="52B788"/>
+                </a:solidFill>
+              </a:rPr>
+              <a:t>n8n – Vorteile</a:t>
+            </a:r>
+          </a:p>
+        </p:txBody>
+      </p:sp>
+      <p:sp>
+        <p:nvSpPr>
+          <p:cNvPr id="11" name="TextBox 10"/>
+          <p:cNvSpPr txBox="1"/>
+          <p:nvPr/>
+        </p:nvSpPr>
+        <p:spPr>
+          <a:xfrm>
+            <a:off x="6629400" y="2103120"/>
+            <a:ext cx="4480560" cy="3657600"/>
+          </a:xfrm>
+          <a:prstGeom prst="rect">
+            <a:avLst/>
+          </a:prstGeom>
+          <a:noFill/>
+        </p:spPr>
+        <p:txBody>
+          <a:bodyPr wrap="square">
+            <a:spAutoFit/>
+          </a:bodyPr>
+          <a:lstStyle/>
+          <a:p>
+            <a:r>
+              <a:rPr sz="1300">
+                <a:solidFill>
+                  <a:srgbClr val="A8D8BE"/>
+                </a:solidFill>
+              </a:rPr>
+              <a:t>✓  JSON-Arrays nativ – kein Flat-Field-Hack</a:t>
+            </a:r>
+          </a:p>
+          <a:p>
+            <a:r>
+              <a:rPr sz="1300">
+                <a:solidFill>
+                  <a:srgbClr val="A8D8BE"/>
+                </a:solidFill>
+              </a:rPr>
+              <a:t>✓  Code-Node (JS/Python) für jede Logik</a:t>
+            </a:r>
+          </a:p>
+          <a:p>
+            <a:r>
+              <a:rPr sz="1300">
+                <a:solidFill>
+                  <a:srgbClr val="A8D8BE"/>
+                </a:solidFill>
+              </a:rPr>
+              <a:t>✓  Wait-Node: echter HitL mit Webhook</a:t>
+            </a:r>
+          </a:p>
+          <a:p>
+            <a:r>
+              <a:rPr sz="1300">
+                <a:solidFill>
+                  <a:srgbClr val="A8D8BE"/>
+                </a:solidFill>
+              </a:rPr>
+              <a:t>✓  Google Docs für formatierte Offerten</a:t>
+            </a:r>
+          </a:p>
+          <a:p>
+            <a:r>
+              <a:rPr sz="1300">
+                <a:solidFill>
+                  <a:srgbClr val="A8D8BE"/>
+                </a:solidFill>
+              </a:rPr>
+              <a:t>✓  Self-hosted oder Cloud – günstig</a:t>
+            </a:r>
+          </a:p>
+          <a:p>
+            <a:r>
+              <a:rPr sz="1300">
+                <a:solidFill>
+                  <a:srgbClr val="A8D8BE"/>
+                </a:solidFill>
+              </a:rPr>
+              <a:t>✓  Vollständiges Error-Handling möglich</a:t>
+            </a:r>
+          </a:p>
+          <a:p>
+            <a:r>
+              <a:rPr sz="1300">
+                <a:solidFill>
+                  <a:srgbClr val="A8D8BE"/>
+                </a:solidFill>
+              </a:rPr>
+              <a:t>✓  Sauberes Debugging &amp; Execution-Log</a:t>
+            </a:r>
+          </a:p>
+          <a:p>
+            <a:r>
+              <a:rPr sz="1300">
+                <a:solidFill>
+                  <a:srgbClr val="A8D8BE"/>
+                </a:solidFill>
+              </a:rPr>
+              <a:t>✓  Kein Task-Limit</a:t>
+            </a:r>
+          </a:p>
+        </p:txBody>
+      </p:sp>
+    </p:spTree>
+  </p:cSld>
+  <p:clrMapOvr>
+    <a:masterClrMapping/>
+  </p:clrMapOvr>
+</p:sld>
+</file>
+
+<file path=ppt/slides/slide12.xml><?xml version="1.0" encoding="utf-8"?>
+<p:sld xmlns:a="http://schemas.openxmlformats.org/drawingml/2006/main" xmlns:p="http://schemas.openxmlformats.org/presentationml/2006/main" xmlns:r="http://schemas.openxmlformats.org/officeDocument/2006/relationships">
+  <p:cSld>
+    <p:bg>
+      <p:bgPr>
+        <a:solidFill>
+          <a:srgbClr val="1A2E4A"/>
+        </a:solidFill>
+        <a:effectLst/>
+      </p:bgPr>
+    </p:bg>
+    <p:spTree>
+      <p:nvGrpSpPr>
+        <p:cNvPr id="1" name=""/>
+        <p:cNvGrpSpPr/>
+        <p:nvPr/>
+      </p:nvGrpSpPr>
+      <p:grpSpPr/>
+      <p:sp>
+        <p:nvSpPr>
+          <p:cNvPr id="2" name="Rectangle 1"/>
+          <p:cNvSpPr/>
+          <p:nvPr/>
+        </p:nvSpPr>
+        <p:spPr>
+          <a:xfrm>
+            <a:off x="0" y="0"/>
+            <a:ext cx="411480" cy="6858000"/>
+          </a:xfrm>
+          <a:prstGeom prst="rect">
+            <a:avLst/>
+          </a:prstGeom>
+          <a:solidFill>
+            <a:srgbClr val="E85D04"/>
+          </a:solidFill>
+          <a:ln>
+            <a:noFill/>
+          </a:ln>
+        </p:spPr>
+        <p:style>
+          <a:lnRef idx="1">
+            <a:schemeClr val="accent1"/>
+          </a:lnRef>
+          <a:fillRef idx="3">
+            <a:schemeClr val="accent1"/>
+          </a:fillRef>
+          <a:effectRef idx="2">
+            <a:schemeClr val="accent1"/>
+          </a:effectRef>
+          <a:fontRef idx="minor">
+            <a:schemeClr val="lt1"/>
+          </a:fontRef>
+        </p:style>
+        <p:txBody>
+          <a:bodyPr rtlCol="0" anchor="ctr"/>
+          <a:lstStyle/>
+          <a:p>
+            <a:pPr algn="ctr"/>
+          </a:p>
+        </p:txBody>
+      </p:sp>
+      <p:sp>
+        <p:nvSpPr>
+          <p:cNvPr id="3" name="TextBox 2"/>
+          <p:cNvSpPr txBox="1"/>
+          <p:nvPr/>
+        </p:nvSpPr>
+        <p:spPr>
+          <a:xfrm>
+            <a:off x="914400" y="320040"/>
+            <a:ext cx="10058400" cy="640080"/>
+          </a:xfrm>
+          <a:prstGeom prst="rect">
+            <a:avLst/>
+          </a:prstGeom>
+          <a:noFill/>
+        </p:spPr>
+        <p:txBody>
+          <a:bodyPr wrap="square">
+            <a:spAutoFit/>
+          </a:bodyPr>
+          <a:lstStyle/>
+          <a:p>
+            <a:pPr algn="l"/>
+            <a:r>
+              <a:rPr sz="3000" b="1" i="0">
+                <a:solidFill>
+                  <a:srgbClr val="FFFFFF"/>
+                </a:solidFill>
+              </a:rPr>
+              <a:t>Multi-Channel Eingangsarchitektur</a:t>
+            </a:r>
+          </a:p>
+        </p:txBody>
+      </p:sp>
+      <p:sp>
+        <p:nvSpPr>
+          <p:cNvPr id="4" name="TextBox 3"/>
+          <p:cNvSpPr txBox="1"/>
+          <p:nvPr/>
+        </p:nvSpPr>
+        <p:spPr>
+          <a:xfrm>
+            <a:off x="914400" y="960120"/>
+            <a:ext cx="10058400" cy="411480"/>
+          </a:xfrm>
+          <a:prstGeom prst="rect">
+            <a:avLst/>
+          </a:prstGeom>
+          <a:noFill/>
+        </p:spPr>
+        <p:txBody>
+          <a:bodyPr wrap="square">
+            <a:spAutoFit/>
+          </a:bodyPr>
+          <a:lstStyle/>
+          <a:p>
+            <a:pPr algn="l"/>
+            <a:r>
+              <a:rPr sz="1500" b="0" i="0">
+                <a:solidFill>
+                  <a:srgbClr val="F4A261"/>
+                </a:solidFill>
+              </a:rPr>
+              <a:t>6 Kanäle – ein normalisierter Datenstrom – eine KI-Analyse</a:t>
+            </a:r>
+          </a:p>
+        </p:txBody>
+      </p:sp>
+      <p:sp>
+        <p:nvSpPr>
+          <p:cNvPr id="5" name="Rectangle 4"/>
+          <p:cNvSpPr/>
+          <p:nvPr/>
+        </p:nvSpPr>
+        <p:spPr>
+          <a:xfrm>
+            <a:off x="640080" y="1508760"/>
+            <a:ext cx="1691640" cy="2286000"/>
+          </a:xfrm>
+          <a:prstGeom prst="rect">
+            <a:avLst/>
+          </a:prstGeom>
+          <a:solidFill>
+            <a:srgbClr val="1A3A6C"/>
+          </a:solidFill>
+          <a:ln>
+            <a:noFill/>
+          </a:ln>
+        </p:spPr>
+        <p:style>
+          <a:lnRef idx="1">
+            <a:schemeClr val="accent1"/>
+          </a:lnRef>
+          <a:fillRef idx="3">
+            <a:schemeClr val="accent1"/>
+          </a:fillRef>
+          <a:effectRef idx="2">
+            <a:schemeClr val="accent1"/>
+          </a:effectRef>
+          <a:fontRef idx="minor">
+            <a:schemeClr val="lt1"/>
+          </a:fontRef>
+        </p:style>
+        <p:txBody>
+          <a:bodyPr rtlCol="0" anchor="ctr"/>
+          <a:lstStyle/>
+          <a:p>
+            <a:pPr algn="ctr"/>
+          </a:p>
+        </p:txBody>
+      </p:sp>
+      <p:sp>
+        <p:nvSpPr>
+          <p:cNvPr id="6" name="TextBox 5"/>
+          <p:cNvSpPr txBox="1"/>
+          <p:nvPr/>
+        </p:nvSpPr>
+        <p:spPr>
+          <a:xfrm>
+            <a:off x="640080" y="1600200"/>
+            <a:ext cx="1691640" cy="594360"/>
+          </a:xfrm>
+          <a:prstGeom prst="rect">
+            <a:avLst/>
+          </a:prstGeom>
+          <a:noFill/>
+        </p:spPr>
+        <p:txBody>
+          <a:bodyPr wrap="square">
+            <a:spAutoFit/>
+          </a:bodyPr>
+          <a:lstStyle/>
+          <a:p>
+            <a:pPr algn="ctr"/>
+            <a:r>
+              <a:rPr sz="2600" b="0" i="0">
+                <a:solidFill>
+                  <a:srgbClr val="FFFFFF"/>
+                </a:solidFill>
+              </a:rPr>
+              <a:t>📧</a:t>
+            </a:r>
+          </a:p>
+        </p:txBody>
+      </p:sp>
+      <p:sp>
+        <p:nvSpPr>
+          <p:cNvPr id="7" name="TextBox 6"/>
+          <p:cNvSpPr txBox="1"/>
+          <p:nvPr/>
+        </p:nvSpPr>
+        <p:spPr>
+          <a:xfrm>
+            <a:off x="731519" y="2240280"/>
+            <a:ext cx="1508760" cy="411480"/>
+          </a:xfrm>
+          <a:prstGeom prst="rect">
+            <a:avLst/>
+          </a:prstGeom>
+          <a:noFill/>
+        </p:spPr>
+        <p:txBody>
+          <a:bodyPr wrap="square">
+            <a:spAutoFit/>
+          </a:bodyPr>
+          <a:lstStyle/>
+          <a:p>
+            <a:pPr algn="ctr"/>
+            <a:r>
+              <a:rPr sz="1300" b="1" i="0">
+                <a:solidFill>
+                  <a:srgbClr val="FFFFFF"/>
+                </a:solidFill>
+              </a:rPr>
+              <a:t>Gmail</a:t>
+            </a:r>
+          </a:p>
+        </p:txBody>
+      </p:sp>
+      <p:sp>
+        <p:nvSpPr>
+          <p:cNvPr id="8" name="TextBox 7"/>
+          <p:cNvSpPr txBox="1"/>
+          <p:nvPr/>
+        </p:nvSpPr>
+        <p:spPr>
+          <a:xfrm>
+            <a:off x="731519" y="2697480"/>
+            <a:ext cx="1508760" cy="1005840"/>
+          </a:xfrm>
+          <a:prstGeom prst="rect">
+            <a:avLst/>
+          </a:prstGeom>
+          <a:noFill/>
+        </p:spPr>
+        <p:txBody>
+          <a:bodyPr wrap="square">
+            <a:spAutoFit/>
+          </a:bodyPr>
+          <a:lstStyle/>
+          <a:p>
+            <a:pPr algn="ctr"/>
+            <a:r>
+              <a:rPr sz="1100" b="0" i="0">
+                <a:solidFill>
+                  <a:srgbClr val="B0C4DE"/>
+                </a:solidFill>
+              </a:rPr>
+              <a:t>E-Mail &amp; Thread
+abrufen</a:t>
+            </a:r>
+          </a:p>
+        </p:txBody>
+      </p:sp>
+      <p:sp>
+        <p:nvSpPr>
+          <p:cNvPr id="9" name="TextBox 8"/>
+          <p:cNvSpPr txBox="1"/>
+          <p:nvPr/>
+        </p:nvSpPr>
+        <p:spPr>
+          <a:xfrm>
+            <a:off x="1348740" y="3886200"/>
+            <a:ext cx="365760" cy="365760"/>
+          </a:xfrm>
+          <a:prstGeom prst="rect">
+            <a:avLst/>
+          </a:prstGeom>
+          <a:noFill/>
+        </p:spPr>
+        <p:txBody>
+          <a:bodyPr wrap="square">
+            <a:spAutoFit/>
+          </a:bodyPr>
+          <a:lstStyle/>
+          <a:p>
+            <a:pPr algn="ctr"/>
+            <a:r>
+              <a:rPr sz="1800" b="0" i="0">
+                <a:solidFill>
+                  <a:srgbClr val="E85D04"/>
+                </a:solidFill>
+              </a:rPr>
+              <a:t>↓</a:t>
+            </a:r>
+          </a:p>
+        </p:txBody>
+      </p:sp>
+      <p:sp>
+        <p:nvSpPr>
+          <p:cNvPr id="10" name="Rectangle 9"/>
+          <p:cNvSpPr/>
+          <p:nvPr/>
+        </p:nvSpPr>
+        <p:spPr>
+          <a:xfrm>
+            <a:off x="2532888" y="1508760"/>
+            <a:ext cx="1691640" cy="2286000"/>
+          </a:xfrm>
+          <a:prstGeom prst="rect">
+            <a:avLst/>
+          </a:prstGeom>
+          <a:solidFill>
+            <a:srgbClr val="1A3A6C"/>
+          </a:solidFill>
+          <a:ln>
+            <a:noFill/>
+          </a:ln>
+        </p:spPr>
+        <p:style>
+          <a:lnRef idx="1">
+            <a:schemeClr val="accent1"/>
+          </a:lnRef>
+          <a:fillRef idx="3">
+            <a:schemeClr val="accent1"/>
+          </a:fillRef>
+          <a:effectRef idx="2">
+            <a:schemeClr val="accent1"/>
+          </a:effectRef>
+          <a:fontRef idx="minor">
+            <a:schemeClr val="lt1"/>
+          </a:fontRef>
+        </p:style>
+        <p:txBody>
+          <a:bodyPr rtlCol="0" anchor="ctr"/>
+          <a:lstStyle/>
+          <a:p>
+            <a:pPr algn="ctr"/>
+          </a:p>
+        </p:txBody>
+      </p:sp>
+      <p:sp>
+        <p:nvSpPr>
+          <p:cNvPr id="11" name="TextBox 10"/>
+          <p:cNvSpPr txBox="1"/>
+          <p:nvPr/>
+        </p:nvSpPr>
+        <p:spPr>
+          <a:xfrm>
+            <a:off x="2532888" y="1600200"/>
+            <a:ext cx="1691640" cy="594360"/>
+          </a:xfrm>
+          <a:prstGeom prst="rect">
+            <a:avLst/>
+          </a:prstGeom>
+          <a:noFill/>
+        </p:spPr>
+        <p:txBody>
+          <a:bodyPr wrap="square">
+            <a:spAutoFit/>
+          </a:bodyPr>
+          <a:lstStyle/>
+          <a:p>
+            <a:pPr algn="ctr"/>
+            <a:r>
+              <a:rPr sz="2600" b="0" i="0">
+                <a:solidFill>
+                  <a:srgbClr val="FFFFFF"/>
+                </a:solidFill>
+              </a:rPr>
+              <a:t>🌐</a:t>
+            </a:r>
+          </a:p>
+        </p:txBody>
+      </p:sp>
+      <p:sp>
+        <p:nvSpPr>
+          <p:cNvPr id="12" name="TextBox 11"/>
+          <p:cNvSpPr txBox="1"/>
+          <p:nvPr/>
+        </p:nvSpPr>
+        <p:spPr>
+          <a:xfrm>
+            <a:off x="2624328" y="2240280"/>
+            <a:ext cx="1508760" cy="411480"/>
+          </a:xfrm>
+          <a:prstGeom prst="rect">
+            <a:avLst/>
+          </a:prstGeom>
+          <a:noFill/>
+        </p:spPr>
+        <p:txBody>
+          <a:bodyPr wrap="square">
+            <a:spAutoFit/>
+          </a:bodyPr>
+          <a:lstStyle/>
+          <a:p>
+            <a:pPr algn="ctr"/>
+            <a:r>
+              <a:rPr sz="1300" b="1" i="0">
+                <a:solidFill>
+                  <a:srgbClr val="FFFFFF"/>
+                </a:solidFill>
+              </a:rPr>
+              <a:t>Webformular</a:t>
+            </a:r>
+          </a:p>
+        </p:txBody>
+      </p:sp>
+      <p:sp>
+        <p:nvSpPr>
+          <p:cNvPr id="13" name="TextBox 12"/>
+          <p:cNvSpPr txBox="1"/>
+          <p:nvPr/>
+        </p:nvSpPr>
+        <p:spPr>
+          <a:xfrm>
+            <a:off x="2624328" y="2697480"/>
+            <a:ext cx="1508760" cy="1005840"/>
+          </a:xfrm>
+          <a:prstGeom prst="rect">
+            <a:avLst/>
+          </a:prstGeom>
+          <a:noFill/>
+        </p:spPr>
+        <p:txBody>
+          <a:bodyPr wrap="square">
+            <a:spAutoFit/>
+          </a:bodyPr>
+          <a:lstStyle/>
+          <a:p>
+            <a:pPr algn="ctr"/>
+            <a:r>
+              <a:rPr sz="1100" b="0" i="0">
+                <a:solidFill>
+                  <a:srgbClr val="B0C4DE"/>
+                </a:solidFill>
+              </a:rPr>
+              <a:t>Online-Bestellung
+Webhook POST</a:t>
+            </a:r>
+          </a:p>
+        </p:txBody>
+      </p:sp>
+      <p:sp>
+        <p:nvSpPr>
+          <p:cNvPr id="14" name="TextBox 13"/>
+          <p:cNvSpPr txBox="1"/>
+          <p:nvPr/>
+        </p:nvSpPr>
+        <p:spPr>
+          <a:xfrm>
+            <a:off x="3241548" y="3886200"/>
+            <a:ext cx="365760" cy="365760"/>
+          </a:xfrm>
+          <a:prstGeom prst="rect">
+            <a:avLst/>
+          </a:prstGeom>
+          <a:noFill/>
+        </p:spPr>
+        <p:txBody>
+          <a:bodyPr wrap="square">
+            <a:spAutoFit/>
+          </a:bodyPr>
+          <a:lstStyle/>
+          <a:p>
+            <a:pPr algn="ctr"/>
+            <a:r>
+              <a:rPr sz="1800" b="0" i="0">
+                <a:solidFill>
+                  <a:srgbClr val="E85D04"/>
+                </a:solidFill>
+              </a:rPr>
+              <a:t>↓</a:t>
+            </a:r>
+          </a:p>
+        </p:txBody>
+      </p:sp>
+      <p:sp>
+        <p:nvSpPr>
+          <p:cNvPr id="15" name="Rectangle 14"/>
+          <p:cNvSpPr/>
+          <p:nvPr/>
+        </p:nvSpPr>
+        <p:spPr>
+          <a:xfrm>
+            <a:off x="4425696" y="1508760"/>
+            <a:ext cx="1691640" cy="2286000"/>
+          </a:xfrm>
+          <a:prstGeom prst="rect">
+            <a:avLst/>
+          </a:prstGeom>
+          <a:solidFill>
+            <a:srgbClr val="4A2A0A"/>
+          </a:solidFill>
+          <a:ln>
+            <a:noFill/>
+          </a:ln>
+        </p:spPr>
+        <p:style>
+          <a:lnRef idx="1">
+            <a:schemeClr val="accent1"/>
+          </a:lnRef>
+          <a:fillRef idx="3">
+            <a:schemeClr val="accent1"/>
+          </a:fillRef>
+          <a:effectRef idx="2">
+            <a:schemeClr val="accent1"/>
+          </a:effectRef>
+          <a:fontRef idx="minor">
+            <a:schemeClr val="lt1"/>
+          </a:fontRef>
+        </p:style>
+        <p:txBody>
+          <a:bodyPr rtlCol="0" anchor="ctr"/>
+          <a:lstStyle/>
+          <a:p>
+            <a:pPr algn="ctr"/>
+          </a:p>
+        </p:txBody>
+      </p:sp>
+      <p:sp>
+        <p:nvSpPr>
+          <p:cNvPr id="16" name="TextBox 15"/>
+          <p:cNvSpPr txBox="1"/>
+          <p:nvPr/>
+        </p:nvSpPr>
+        <p:spPr>
+          <a:xfrm>
+            <a:off x="4425696" y="1600200"/>
+            <a:ext cx="1691640" cy="594360"/>
+          </a:xfrm>
+          <a:prstGeom prst="rect">
+            <a:avLst/>
+          </a:prstGeom>
+          <a:noFill/>
+        </p:spPr>
+        <p:txBody>
+          <a:bodyPr wrap="square">
+            <a:spAutoFit/>
+          </a:bodyPr>
+          <a:lstStyle/>
+          <a:p>
+            <a:pPr algn="ctr"/>
+            <a:r>
+              <a:rPr sz="2600" b="0" i="0">
+                <a:solidFill>
+                  <a:srgbClr val="FFFFFF"/>
+                </a:solidFill>
+              </a:rPr>
+              <a:t>📞</a:t>
+            </a:r>
+          </a:p>
+        </p:txBody>
+      </p:sp>
+      <p:sp>
+        <p:nvSpPr>
+          <p:cNvPr id="17" name="TextBox 16"/>
+          <p:cNvSpPr txBox="1"/>
+          <p:nvPr/>
+        </p:nvSpPr>
+        <p:spPr>
+          <a:xfrm>
+            <a:off x="4517136" y="2240280"/>
+            <a:ext cx="1508760" cy="411480"/>
+          </a:xfrm>
+          <a:prstGeom prst="rect">
+            <a:avLst/>
+          </a:prstGeom>
+          <a:noFill/>
+        </p:spPr>
+        <p:txBody>
+          <a:bodyPr wrap="square">
+            <a:spAutoFit/>
+          </a:bodyPr>
+          <a:lstStyle/>
+          <a:p>
+            <a:pPr algn="ctr"/>
+            <a:r>
+              <a:rPr sz="1300" b="1" i="0">
+                <a:solidFill>
+                  <a:srgbClr val="FFFFFF"/>
+                </a:solidFill>
+              </a:rPr>
+              <a:t>Telefon</a:t>
+            </a:r>
+          </a:p>
+        </p:txBody>
+      </p:sp>
+      <p:sp>
+        <p:nvSpPr>
+          <p:cNvPr id="18" name="TextBox 17"/>
+          <p:cNvSpPr txBox="1"/>
+          <p:nvPr/>
+        </p:nvSpPr>
+        <p:spPr>
+          <a:xfrm>
+            <a:off x="4517136" y="2697480"/>
+            <a:ext cx="1508760" cy="1005840"/>
+          </a:xfrm>
+          <a:prstGeom prst="rect">
+            <a:avLst/>
+          </a:prstGeom>
+          <a:noFill/>
+        </p:spPr>
+        <p:txBody>
+          <a:bodyPr wrap="square">
+            <a:spAutoFit/>
+          </a:bodyPr>
+          <a:lstStyle/>
+          <a:p>
+            <a:pPr algn="ctr"/>
+            <a:r>
+              <a:rPr sz="1100" b="0" i="0">
+                <a:solidFill>
+                  <a:srgbClr val="B0C4DE"/>
+                </a:solidFill>
+              </a:rPr>
+              <a:t>Twilio → Transkript
+(Phase 2)</a:t>
+            </a:r>
+          </a:p>
+        </p:txBody>
+      </p:sp>
+      <p:sp>
+        <p:nvSpPr>
+          <p:cNvPr id="19" name="TextBox 18"/>
+          <p:cNvSpPr txBox="1"/>
+          <p:nvPr/>
+        </p:nvSpPr>
+        <p:spPr>
+          <a:xfrm>
+            <a:off x="5134356" y="3886200"/>
+            <a:ext cx="365760" cy="365760"/>
+          </a:xfrm>
+          <a:prstGeom prst="rect">
+            <a:avLst/>
+          </a:prstGeom>
+          <a:noFill/>
+        </p:spPr>
+        <p:txBody>
+          <a:bodyPr wrap="square">
+            <a:spAutoFit/>
+          </a:bodyPr>
+          <a:lstStyle/>
+          <a:p>
+            <a:pPr algn="ctr"/>
+            <a:r>
+              <a:rPr sz="1800" b="0" i="0">
+                <a:solidFill>
+                  <a:srgbClr val="E85D04"/>
+                </a:solidFill>
+              </a:rPr>
+              <a:t>↓</a:t>
+            </a:r>
+          </a:p>
+        </p:txBody>
+      </p:sp>
+      <p:sp>
+        <p:nvSpPr>
+          <p:cNvPr id="20" name="Rectangle 19"/>
+          <p:cNvSpPr/>
+          <p:nvPr/>
+        </p:nvSpPr>
+        <p:spPr>
+          <a:xfrm>
+            <a:off x="6318504" y="1508760"/>
+            <a:ext cx="1691640" cy="2286000"/>
+          </a:xfrm>
+          <a:prstGeom prst="rect">
+            <a:avLst/>
+          </a:prstGeom>
+          <a:solidFill>
+            <a:srgbClr val="0D3B1A"/>
+          </a:solidFill>
+          <a:ln>
+            <a:noFill/>
+          </a:ln>
+        </p:spPr>
+        <p:style>
+          <a:lnRef idx="1">
+            <a:schemeClr val="accent1"/>
+          </a:lnRef>
+          <a:fillRef idx="3">
+            <a:schemeClr val="accent1"/>
+          </a:fillRef>
+          <a:effectRef idx="2">
+            <a:schemeClr val="accent1"/>
+          </a:effectRef>
+          <a:fontRef idx="minor">
+            <a:schemeClr val="lt1"/>
+          </a:fontRef>
+        </p:style>
+        <p:txBody>
+          <a:bodyPr rtlCol="0" anchor="ctr"/>
+          <a:lstStyle/>
+          <a:p>
+            <a:pPr algn="ctr"/>
+          </a:p>
+        </p:txBody>
+      </p:sp>
+      <p:sp>
+        <p:nvSpPr>
+          <p:cNvPr id="21" name="TextBox 20"/>
+          <p:cNvSpPr txBox="1"/>
+          <p:nvPr/>
+        </p:nvSpPr>
+        <p:spPr>
+          <a:xfrm>
+            <a:off x="6318504" y="1600200"/>
+            <a:ext cx="1691640" cy="594360"/>
+          </a:xfrm>
+          <a:prstGeom prst="rect">
+            <a:avLst/>
+          </a:prstGeom>
+          <a:noFill/>
+        </p:spPr>
+        <p:txBody>
+          <a:bodyPr wrap="square">
+            <a:spAutoFit/>
+          </a:bodyPr>
+          <a:lstStyle/>
+          <a:p>
+            <a:pPr algn="ctr"/>
+            <a:r>
+              <a:rPr sz="2600" b="0" i="0">
+                <a:solidFill>
+                  <a:srgbClr val="FFFFFF"/>
+                </a:solidFill>
+              </a:rPr>
+              <a:t>💬</a:t>
+            </a:r>
+          </a:p>
+        </p:txBody>
+      </p:sp>
+      <p:sp>
+        <p:nvSpPr>
+          <p:cNvPr id="22" name="TextBox 21"/>
+          <p:cNvSpPr txBox="1"/>
+          <p:nvPr/>
+        </p:nvSpPr>
+        <p:spPr>
+          <a:xfrm>
+            <a:off x="6409944" y="2240280"/>
+            <a:ext cx="1508760" cy="411480"/>
+          </a:xfrm>
+          <a:prstGeom prst="rect">
+            <a:avLst/>
+          </a:prstGeom>
+          <a:noFill/>
+        </p:spPr>
+        <p:txBody>
+          <a:bodyPr wrap="square">
+            <a:spAutoFit/>
+          </a:bodyPr>
+          <a:lstStyle/>
+          <a:p>
+            <a:pPr algn="ctr"/>
+            <a:r>
+              <a:rPr sz="1300" b="1" i="0">
+                <a:solidFill>
+                  <a:srgbClr val="FFFFFF"/>
+                </a:solidFill>
+              </a:rPr>
+              <a:t>WhatsApp</a:t>
+            </a:r>
+          </a:p>
+        </p:txBody>
+      </p:sp>
+      <p:sp>
+        <p:nvSpPr>
+          <p:cNvPr id="23" name="TextBox 22"/>
+          <p:cNvSpPr txBox="1"/>
+          <p:nvPr/>
+        </p:nvSpPr>
+        <p:spPr>
+          <a:xfrm>
+            <a:off x="6409944" y="2697480"/>
+            <a:ext cx="1508760" cy="1005840"/>
+          </a:xfrm>
+          <a:prstGeom prst="rect">
+            <a:avLst/>
+          </a:prstGeom>
+          <a:noFill/>
+        </p:spPr>
+        <p:txBody>
+          <a:bodyPr wrap="square">
+            <a:spAutoFit/>
+          </a:bodyPr>
+          <a:lstStyle/>
+          <a:p>
+            <a:pPr algn="ctr"/>
+            <a:r>
+              <a:rPr sz="1100" b="0" i="0">
+                <a:solidFill>
+                  <a:srgbClr val="B0C4DE"/>
+                </a:solidFill>
+              </a:rPr>
+              <a:t>Business API
++ Kontext-Store</a:t>
+            </a:r>
+          </a:p>
+        </p:txBody>
+      </p:sp>
+      <p:sp>
+        <p:nvSpPr>
+          <p:cNvPr id="24" name="TextBox 23"/>
+          <p:cNvSpPr txBox="1"/>
+          <p:nvPr/>
+        </p:nvSpPr>
+        <p:spPr>
+          <a:xfrm>
+            <a:off x="7027164" y="3886200"/>
+            <a:ext cx="365760" cy="365760"/>
+          </a:xfrm>
+          <a:prstGeom prst="rect">
+            <a:avLst/>
+          </a:prstGeom>
+          <a:noFill/>
+        </p:spPr>
+        <p:txBody>
+          <a:bodyPr wrap="square">
+            <a:spAutoFit/>
+          </a:bodyPr>
+          <a:lstStyle/>
+          <a:p>
+            <a:pPr algn="ctr"/>
+            <a:r>
+              <a:rPr sz="1800" b="0" i="0">
+                <a:solidFill>
+                  <a:srgbClr val="E85D04"/>
+                </a:solidFill>
+              </a:rPr>
+              <a:t>↓</a:t>
+            </a:r>
+          </a:p>
+        </p:txBody>
+      </p:sp>
+      <p:sp>
+        <p:nvSpPr>
+          <p:cNvPr id="25" name="Rectangle 24"/>
+          <p:cNvSpPr/>
+          <p:nvPr/>
+        </p:nvSpPr>
+        <p:spPr>
+          <a:xfrm>
+            <a:off x="8211312" y="1508760"/>
+            <a:ext cx="1691640" cy="2286000"/>
+          </a:xfrm>
+          <a:prstGeom prst="rect">
+            <a:avLst/>
+          </a:prstGeom>
+          <a:solidFill>
+            <a:srgbClr val="1A3A6C"/>
+          </a:solidFill>
+          <a:ln>
+            <a:noFill/>
+          </a:ln>
+        </p:spPr>
+        <p:style>
+          <a:lnRef idx="1">
+            <a:schemeClr val="accent1"/>
+          </a:lnRef>
+          <a:fillRef idx="3">
+            <a:schemeClr val="accent1"/>
+          </a:fillRef>
+          <a:effectRef idx="2">
+            <a:schemeClr val="accent1"/>
+          </a:effectRef>
+          <a:fontRef idx="minor">
+            <a:schemeClr val="lt1"/>
+          </a:fontRef>
+        </p:style>
+        <p:txBody>
+          <a:bodyPr rtlCol="0" anchor="ctr"/>
+          <a:lstStyle/>
+          <a:p>
+            <a:pPr algn="ctr"/>
+          </a:p>
+        </p:txBody>
+      </p:sp>
+      <p:sp>
+        <p:nvSpPr>
+          <p:cNvPr id="26" name="TextBox 25"/>
+          <p:cNvSpPr txBox="1"/>
+          <p:nvPr/>
+        </p:nvSpPr>
+        <p:spPr>
+          <a:xfrm>
+            <a:off x="8211312" y="1600200"/>
+            <a:ext cx="1691640" cy="594360"/>
+          </a:xfrm>
+          <a:prstGeom prst="rect">
+            <a:avLst/>
+          </a:prstGeom>
+          <a:noFill/>
+        </p:spPr>
+        <p:txBody>
+          <a:bodyPr wrap="square">
+            <a:spAutoFit/>
+          </a:bodyPr>
+          <a:lstStyle/>
+          <a:p>
+            <a:pPr algn="ctr"/>
+            <a:r>
+              <a:rPr sz="2600" b="0" i="0">
+                <a:solidFill>
+                  <a:srgbClr val="FFFFFF"/>
+                </a:solidFill>
+              </a:rPr>
+              <a:t>📋</a:t>
+            </a:r>
+          </a:p>
+        </p:txBody>
+      </p:sp>
+      <p:sp>
+        <p:nvSpPr>
+          <p:cNvPr id="27" name="TextBox 26"/>
+          <p:cNvSpPr txBox="1"/>
+          <p:nvPr/>
+        </p:nvSpPr>
+        <p:spPr>
+          <a:xfrm>
+            <a:off x="8302752" y="2240280"/>
+            <a:ext cx="1508760" cy="411480"/>
+          </a:xfrm>
+          <a:prstGeom prst="rect">
+            <a:avLst/>
+          </a:prstGeom>
+          <a:noFill/>
+        </p:spPr>
+        <p:txBody>
+          <a:bodyPr wrap="square">
+            <a:spAutoFit/>
+          </a:bodyPr>
+          <a:lstStyle/>
+          <a:p>
+            <a:pPr algn="ctr"/>
+            <a:r>
+              <a:rPr sz="1300" b="1" i="0">
+                <a:solidFill>
+                  <a:srgbClr val="FFFFFF"/>
+                </a:solidFill>
+              </a:rPr>
+              <a:t>Kontaktformular</a:t>
+            </a:r>
+          </a:p>
+        </p:txBody>
+      </p:sp>
+      <p:sp>
+        <p:nvSpPr>
+          <p:cNvPr id="28" name="TextBox 27"/>
+          <p:cNvSpPr txBox="1"/>
+          <p:nvPr/>
+        </p:nvSpPr>
+        <p:spPr>
+          <a:xfrm>
+            <a:off x="8302752" y="2697480"/>
+            <a:ext cx="1508760" cy="1005840"/>
+          </a:xfrm>
+          <a:prstGeom prst="rect">
+            <a:avLst/>
+          </a:prstGeom>
+          <a:noFill/>
+        </p:spPr>
+        <p:txBody>
+          <a:bodyPr wrap="square">
+            <a:spAutoFit/>
+          </a:bodyPr>
+          <a:lstStyle/>
+          <a:p>
+            <a:pPr algn="ctr"/>
+            <a:r>
+              <a:rPr sz="1100" b="0" i="0">
+                <a:solidFill>
+                  <a:srgbClr val="B0C4DE"/>
+                </a:solidFill>
+              </a:rPr>
+              <a:t>n8n-Form
+strukturiert</a:t>
+            </a:r>
+          </a:p>
+        </p:txBody>
+      </p:sp>
+      <p:sp>
+        <p:nvSpPr>
+          <p:cNvPr id="29" name="TextBox 28"/>
+          <p:cNvSpPr txBox="1"/>
+          <p:nvPr/>
+        </p:nvSpPr>
+        <p:spPr>
+          <a:xfrm>
+            <a:off x="8919972" y="3886200"/>
+            <a:ext cx="365760" cy="365760"/>
+          </a:xfrm>
+          <a:prstGeom prst="rect">
+            <a:avLst/>
+          </a:prstGeom>
+          <a:noFill/>
+        </p:spPr>
+        <p:txBody>
+          <a:bodyPr wrap="square">
+            <a:spAutoFit/>
+          </a:bodyPr>
+          <a:lstStyle/>
+          <a:p>
+            <a:pPr algn="ctr"/>
+            <a:r>
+              <a:rPr sz="1800" b="0" i="0">
+                <a:solidFill>
+                  <a:srgbClr val="E85D04"/>
+                </a:solidFill>
+              </a:rPr>
+              <a:t>↓</a:t>
+            </a:r>
+          </a:p>
+        </p:txBody>
+      </p:sp>
+      <p:sp>
+        <p:nvSpPr>
+          <p:cNvPr id="30" name="Rectangle 29"/>
+          <p:cNvSpPr/>
+          <p:nvPr/>
+        </p:nvSpPr>
+        <p:spPr>
+          <a:xfrm>
+            <a:off x="10104120" y="1508760"/>
+            <a:ext cx="1691640" cy="2286000"/>
+          </a:xfrm>
+          <a:prstGeom prst="rect">
+            <a:avLst/>
+          </a:prstGeom>
+          <a:solidFill>
+            <a:srgbClr val="0D2A4A"/>
+          </a:solidFill>
+          <a:ln>
+            <a:noFill/>
+          </a:ln>
+        </p:spPr>
+        <p:style>
+          <a:lnRef idx="1">
+            <a:schemeClr val="accent1"/>
+          </a:lnRef>
+          <a:fillRef idx="3">
+            <a:schemeClr val="accent1"/>
+          </a:fillRef>
+          <a:effectRef idx="2">
+            <a:schemeClr val="accent1"/>
+          </a:effectRef>
+          <a:fontRef idx="minor">
+            <a:schemeClr val="lt1"/>
+          </a:fontRef>
+        </p:style>
+        <p:txBody>
+          <a:bodyPr rtlCol="0" anchor="ctr"/>
+          <a:lstStyle/>
+          <a:p>
+            <a:pPr algn="ctr"/>
+          </a:p>
+        </p:txBody>
+      </p:sp>
+      <p:sp>
+        <p:nvSpPr>
+          <p:cNvPr id="31" name="TextBox 30"/>
+          <p:cNvSpPr txBox="1"/>
+          <p:nvPr/>
+        </p:nvSpPr>
+        <p:spPr>
+          <a:xfrm>
+            <a:off x="10104120" y="1600200"/>
+            <a:ext cx="1691640" cy="594360"/>
+          </a:xfrm>
+          <a:prstGeom prst="rect">
+            <a:avLst/>
+          </a:prstGeom>
+          <a:noFill/>
+        </p:spPr>
+        <p:txBody>
+          <a:bodyPr wrap="square">
+            <a:spAutoFit/>
+          </a:bodyPr>
+          <a:lstStyle/>
+          <a:p>
+            <a:pPr algn="ctr"/>
+            <a:r>
+              <a:rPr sz="2600" b="0" i="0">
+                <a:solidFill>
+                  <a:srgbClr val="FFFFFF"/>
+                </a:solidFill>
+              </a:rPr>
+              <a:t>✈️</a:t>
+            </a:r>
+          </a:p>
+        </p:txBody>
+      </p:sp>
+      <p:sp>
+        <p:nvSpPr>
+          <p:cNvPr id="32" name="TextBox 31"/>
+          <p:cNvSpPr txBox="1"/>
+          <p:nvPr/>
+        </p:nvSpPr>
+        <p:spPr>
+          <a:xfrm>
+            <a:off x="10195560" y="2240280"/>
+            <a:ext cx="1508760" cy="411480"/>
+          </a:xfrm>
+          <a:prstGeom prst="rect">
+            <a:avLst/>
+          </a:prstGeom>
+          <a:noFill/>
+        </p:spPr>
+        <p:txBody>
+          <a:bodyPr wrap="square">
+            <a:spAutoFit/>
+          </a:bodyPr>
+          <a:lstStyle/>
+          <a:p>
+            <a:pPr algn="ctr"/>
+            <a:r>
+              <a:rPr sz="1300" b="1" i="0">
+                <a:solidFill>
+                  <a:srgbClr val="FFFFFF"/>
+                </a:solidFill>
+              </a:rPr>
+              <a:t>Telegram</a:t>
+            </a:r>
+          </a:p>
+        </p:txBody>
+      </p:sp>
+      <p:sp>
+        <p:nvSpPr>
+          <p:cNvPr id="33" name="TextBox 32"/>
+          <p:cNvSpPr txBox="1"/>
+          <p:nvPr/>
+        </p:nvSpPr>
+        <p:spPr>
+          <a:xfrm>
+            <a:off x="10195560" y="2697480"/>
+            <a:ext cx="1508760" cy="1005840"/>
+          </a:xfrm>
+          <a:prstGeom prst="rect">
+            <a:avLst/>
+          </a:prstGeom>
+          <a:noFill/>
+        </p:spPr>
+        <p:txBody>
+          <a:bodyPr wrap="square">
+            <a:spAutoFit/>
+          </a:bodyPr>
+          <a:lstStyle/>
+          <a:p>
+            <a:pPr algn="ctr"/>
+            <a:r>
+              <a:rPr sz="1100" b="0" i="0">
+                <a:solidFill>
+                  <a:srgbClr val="B0C4DE"/>
+                </a:solidFill>
+              </a:rPr>
+              <a:t>Bot-Trigger
++ Kontext-Store</a:t>
+            </a:r>
+          </a:p>
+        </p:txBody>
+      </p:sp>
+      <p:sp>
+        <p:nvSpPr>
+          <p:cNvPr id="34" name="TextBox 33"/>
+          <p:cNvSpPr txBox="1"/>
+          <p:nvPr/>
+        </p:nvSpPr>
+        <p:spPr>
+          <a:xfrm>
+            <a:off x="10812780" y="3886200"/>
+            <a:ext cx="365760" cy="365760"/>
+          </a:xfrm>
+          <a:prstGeom prst="rect">
+            <a:avLst/>
+          </a:prstGeom>
+          <a:noFill/>
+        </p:spPr>
+        <p:txBody>
+          <a:bodyPr wrap="square">
+            <a:spAutoFit/>
+          </a:bodyPr>
+          <a:lstStyle/>
+          <a:p>
+            <a:pPr algn="ctr"/>
+            <a:r>
+              <a:rPr sz="1800" b="0" i="0">
+                <a:solidFill>
+                  <a:srgbClr val="E85D04"/>
+                </a:solidFill>
+              </a:rPr>
+              <a:t>↓</a:t>
+            </a:r>
+          </a:p>
+        </p:txBody>
+      </p:sp>
+      <p:sp>
+        <p:nvSpPr>
+          <p:cNvPr id="35" name="Rectangle 34"/>
+          <p:cNvSpPr/>
+          <p:nvPr/>
+        </p:nvSpPr>
+        <p:spPr>
+          <a:xfrm>
+            <a:off x="3200400" y="4343400"/>
+            <a:ext cx="5303520" cy="731520"/>
+          </a:xfrm>
+          <a:prstGeom prst="rect">
+            <a:avLst/>
+          </a:prstGeom>
+          <a:solidFill>
+            <a:srgbClr val="2B4C7E"/>
+          </a:solidFill>
+          <a:ln>
+            <a:noFill/>
+          </a:ln>
+        </p:spPr>
+        <p:style>
+          <a:lnRef idx="1">
+            <a:schemeClr val="accent1"/>
+          </a:lnRef>
+          <a:fillRef idx="3">
+            <a:schemeClr val="accent1"/>
+          </a:fillRef>
+          <a:effectRef idx="2">
+            <a:schemeClr val="accent1"/>
+          </a:effectRef>
+          <a:fontRef idx="minor">
+            <a:schemeClr val="lt1"/>
+          </a:fontRef>
+        </p:style>
+        <p:txBody>
+          <a:bodyPr rtlCol="0" anchor="ctr"/>
+          <a:lstStyle/>
+          <a:p>
+            <a:pPr algn="ctr"/>
+          </a:p>
+        </p:txBody>
+      </p:sp>
+      <p:sp>
+        <p:nvSpPr>
+          <p:cNvPr id="36" name="TextBox 35"/>
+          <p:cNvSpPr txBox="1"/>
+          <p:nvPr/>
+        </p:nvSpPr>
+        <p:spPr>
+          <a:xfrm>
+            <a:off x="3337560" y="4434840"/>
+            <a:ext cx="5029200" cy="502920"/>
+          </a:xfrm>
+          <a:prstGeom prst="rect">
+            <a:avLst/>
+          </a:prstGeom>
+          <a:noFill/>
+        </p:spPr>
+        <p:txBody>
+          <a:bodyPr wrap="square">
+            <a:spAutoFit/>
+          </a:bodyPr>
+          <a:lstStyle/>
+          <a:p>
+            <a:pPr algn="ctr"/>
+            <a:r>
+              <a:rPr sz="1400" b="1" i="0">
+                <a:solidFill>
+                  <a:srgbClr val="FFFFFF"/>
+                </a:solidFill>
+              </a:rPr>
+              <a:t>Quellen zusammenführen  →  Normalisierter JSON-Input</a:t>
+            </a:r>
+          </a:p>
+        </p:txBody>
+      </p:sp>
+      <p:sp>
+        <p:nvSpPr>
+          <p:cNvPr id="37" name="TextBox 36"/>
+          <p:cNvSpPr txBox="1"/>
+          <p:nvPr/>
+        </p:nvSpPr>
+        <p:spPr>
+          <a:xfrm>
+            <a:off x="5669280" y="5166360"/>
+            <a:ext cx="457200" cy="365760"/>
+          </a:xfrm>
+          <a:prstGeom prst="rect">
+            <a:avLst/>
+          </a:prstGeom>
+          <a:noFill/>
+        </p:spPr>
+        <p:txBody>
+          <a:bodyPr wrap="square">
+            <a:spAutoFit/>
+          </a:bodyPr>
+          <a:lstStyle/>
+          <a:p>
+            <a:pPr algn="ctr"/>
+            <a:r>
+              <a:rPr sz="1800" b="0" i="0">
+                <a:solidFill>
+                  <a:srgbClr val="E85D04"/>
+                </a:solidFill>
+              </a:rPr>
+              <a:t>↓</a:t>
+            </a:r>
+          </a:p>
+        </p:txBody>
+      </p:sp>
+      <p:sp>
+        <p:nvSpPr>
+          <p:cNvPr id="38" name="Rectangle 37"/>
+          <p:cNvSpPr/>
+          <p:nvPr/>
+        </p:nvSpPr>
+        <p:spPr>
+          <a:xfrm>
+            <a:off x="3200400" y="5577840"/>
+            <a:ext cx="5303520" cy="777240"/>
+          </a:xfrm>
+          <a:prstGeom prst="rect">
+            <a:avLst/>
+          </a:prstGeom>
+          <a:solidFill>
+            <a:srgbClr val="1A533A"/>
+          </a:solidFill>
+          <a:ln>
+            <a:noFill/>
+          </a:ln>
+        </p:spPr>
+        <p:style>
+          <a:lnRef idx="1">
+            <a:schemeClr val="accent1"/>
+          </a:lnRef>
+          <a:fillRef idx="3">
+            <a:schemeClr val="accent1"/>
+          </a:fillRef>
+          <a:effectRef idx="2">
+            <a:schemeClr val="accent1"/>
+          </a:effectRef>
+          <a:fontRef idx="minor">
+            <a:schemeClr val="lt1"/>
+          </a:fontRef>
+        </p:style>
+        <p:txBody>
+          <a:bodyPr rtlCol="0" anchor="ctr"/>
+          <a:lstStyle/>
+          <a:p>
+            <a:pPr algn="ctr"/>
+          </a:p>
+        </p:txBody>
+      </p:sp>
+      <p:sp>
+        <p:nvSpPr>
+          <p:cNvPr id="39" name="TextBox 38"/>
+          <p:cNvSpPr txBox="1"/>
+          <p:nvPr/>
+        </p:nvSpPr>
+        <p:spPr>
+          <a:xfrm>
+            <a:off x="3337560" y="5669280"/>
+            <a:ext cx="5029200" cy="502920"/>
+          </a:xfrm>
+          <a:prstGeom prst="rect">
+            <a:avLst/>
+          </a:prstGeom>
+          <a:noFill/>
+        </p:spPr>
+        <p:txBody>
+          <a:bodyPr wrap="square">
+            <a:spAutoFit/>
+          </a:bodyPr>
+          <a:lstStyle/>
+          <a:p>
+            <a:pPr algn="ctr"/>
+            <a:r>
+              <a:rPr sz="1400" b="1" i="0">
+                <a:solidFill>
+                  <a:srgbClr val="90E0B8"/>
+                </a:solidFill>
+              </a:rPr>
+              <a:t>Vollständigkeitsprüfung (Claude AI)  →  Auftrag vollständig?</a:t>
+            </a:r>
+          </a:p>
+        </p:txBody>
+      </p:sp>
+    </p:spTree>
+  </p:cSld>
+  <p:clrMapOvr>
+    <a:masterClrMapping/>
+  </p:clrMapOvr>
+</p:sld>
+</file>
+
+<file path=ppt/slides/slide13.xml><?xml version="1.0" encoding="utf-8"?>
+<p:sld xmlns:a="http://schemas.openxmlformats.org/drawingml/2006/main" xmlns:p="http://schemas.openxmlformats.org/presentationml/2006/main" xmlns:r="http://schemas.openxmlformats.org/officeDocument/2006/relationships">
+  <p:cSld>
+    <p:bg>
+      <p:bgPr>
+        <a:solidFill>
+          <a:srgbClr val="1A2E4A"/>
+        </a:solidFill>
+        <a:effectLst/>
+      </p:bgPr>
+    </p:bg>
+    <p:spTree>
+      <p:nvGrpSpPr>
+        <p:cNvPr id="1" name=""/>
+        <p:cNvGrpSpPr/>
+        <p:nvPr/>
+      </p:nvGrpSpPr>
+      <p:grpSpPr/>
+      <p:sp>
+        <p:nvSpPr>
+          <p:cNvPr id="2" name="Rectangle 1"/>
+          <p:cNvSpPr/>
+          <p:nvPr/>
+        </p:nvSpPr>
+        <p:spPr>
+          <a:xfrm>
+            <a:off x="0" y="0"/>
+            <a:ext cx="411480" cy="6858000"/>
+          </a:xfrm>
+          <a:prstGeom prst="rect">
+            <a:avLst/>
+          </a:prstGeom>
+          <a:solidFill>
+            <a:srgbClr val="E85D04"/>
+          </a:solidFill>
+          <a:ln>
+            <a:noFill/>
+          </a:ln>
+        </p:spPr>
+        <p:style>
+          <a:lnRef idx="1">
+            <a:schemeClr val="accent1"/>
+          </a:lnRef>
+          <a:fillRef idx="3">
+            <a:schemeClr val="accent1"/>
+          </a:fillRef>
+          <a:effectRef idx="2">
+            <a:schemeClr val="accent1"/>
+          </a:effectRef>
+          <a:fontRef idx="minor">
+            <a:schemeClr val="lt1"/>
+          </a:fontRef>
+        </p:style>
+        <p:txBody>
+          <a:bodyPr rtlCol="0" anchor="ctr"/>
+          <a:lstStyle/>
+          <a:p>
+            <a:pPr algn="ctr"/>
+          </a:p>
+        </p:txBody>
+      </p:sp>
+      <p:sp>
+        <p:nvSpPr>
+          <p:cNvPr id="3" name="TextBox 2"/>
+          <p:cNvSpPr txBox="1"/>
+          <p:nvPr/>
+        </p:nvSpPr>
+        <p:spPr>
+          <a:xfrm>
+            <a:off x="914400" y="320040"/>
+            <a:ext cx="10058400" cy="640080"/>
+          </a:xfrm>
+          <a:prstGeom prst="rect">
+            <a:avLst/>
+          </a:prstGeom>
+          <a:noFill/>
+        </p:spPr>
+        <p:txBody>
+          <a:bodyPr wrap="square">
+            <a:spAutoFit/>
+          </a:bodyPr>
+          <a:lstStyle/>
+          <a:p>
+            <a:pPr algn="l"/>
+            <a:r>
+              <a:rPr sz="3000" b="1" i="0">
+                <a:solidFill>
+                  <a:srgbClr val="FFFFFF"/>
+                </a:solidFill>
+              </a:rPr>
+              <a:t>n8n Workflow – Vollständige Architektur</a:t>
+            </a:r>
+          </a:p>
+        </p:txBody>
+      </p:sp>
+      <p:sp>
+        <p:nvSpPr>
+          <p:cNvPr id="4" name="Rectangle 3"/>
+          <p:cNvSpPr/>
+          <p:nvPr/>
+        </p:nvSpPr>
+        <p:spPr>
+          <a:xfrm>
+            <a:off x="914400" y="1097280"/>
+            <a:ext cx="10149840" cy="365760"/>
+          </a:xfrm>
+          <a:prstGeom prst="rect">
+            <a:avLst/>
+          </a:prstGeom>
+          <a:solidFill>
+            <a:srgbClr val="1A533A"/>
+          </a:solidFill>
+          <a:ln>
+            <a:noFill/>
+          </a:ln>
+        </p:spPr>
+        <p:style>
+          <a:lnRef idx="1">
+            <a:schemeClr val="accent1"/>
+          </a:lnRef>
+          <a:fillRef idx="3">
+            <a:schemeClr val="accent1"/>
+          </a:fillRef>
+          <a:effectRef idx="2">
+            <a:schemeClr val="accent1"/>
+          </a:effectRef>
+          <a:fontRef idx="minor">
+            <a:schemeClr val="lt1"/>
+          </a:fontRef>
+        </p:style>
+        <p:txBody>
+          <a:bodyPr rtlCol="0" anchor="ctr"/>
+          <a:lstStyle/>
+          <a:p>
+            <a:pPr algn="ctr"/>
+          </a:p>
+        </p:txBody>
+      </p:sp>
+      <p:sp>
+        <p:nvSpPr>
+          <p:cNvPr id="5" name="TextBox 4"/>
+          <p:cNvSpPr txBox="1"/>
+          <p:nvPr/>
+        </p:nvSpPr>
+        <p:spPr>
+          <a:xfrm>
+            <a:off x="1051560" y="1143000"/>
+            <a:ext cx="1828800" cy="274320"/>
+          </a:xfrm>
+          <a:prstGeom prst="rect">
+            <a:avLst/>
+          </a:prstGeom>
+          <a:noFill/>
+        </p:spPr>
+        <p:txBody>
+          <a:bodyPr wrap="square">
+            <a:spAutoFit/>
+          </a:bodyPr>
+          <a:lstStyle/>
+          <a:p>
+            <a:pPr algn="l"/>
+            <a:r>
+              <a:rPr sz="1100" b="1" i="0">
+                <a:solidFill>
+                  <a:srgbClr val="90E0B8"/>
+                </a:solidFill>
+              </a:rPr>
+              <a:t>VOLLSTÄNDIG</a:t>
+            </a:r>
+          </a:p>
+        </p:txBody>
+      </p:sp>
+      <p:sp>
+        <p:nvSpPr>
+          <p:cNvPr id="6" name="Rectangle 5"/>
+          <p:cNvSpPr/>
+          <p:nvPr/>
+        </p:nvSpPr>
+        <p:spPr>
+          <a:xfrm>
+            <a:off x="914400" y="1554480"/>
+            <a:ext cx="1280160" cy="1371600"/>
+          </a:xfrm>
+          <a:prstGeom prst="rect">
+            <a:avLst/>
+          </a:prstGeom>
+          <a:solidFill>
+            <a:srgbClr val="0D3B2A"/>
+          </a:solidFill>
+          <a:ln>
+            <a:noFill/>
+          </a:ln>
+        </p:spPr>
+        <p:style>
+          <a:lnRef idx="1">
+            <a:schemeClr val="accent1"/>
+          </a:lnRef>
+          <a:fillRef idx="3">
+            <a:schemeClr val="accent1"/>
+          </a:fillRef>
+          <a:effectRef idx="2">
+            <a:schemeClr val="accent1"/>
+          </a:effectRef>
+          <a:fontRef idx="minor">
+            <a:schemeClr val="lt1"/>
+          </a:fontRef>
+        </p:style>
+        <p:txBody>
+          <a:bodyPr rtlCol="0" anchor="ctr"/>
+          <a:lstStyle/>
+          <a:p>
+            <a:pPr algn="ctr"/>
+          </a:p>
+        </p:txBody>
+      </p:sp>
+      <p:sp>
+        <p:nvSpPr>
+          <p:cNvPr id="7" name="TextBox 6"/>
+          <p:cNvSpPr txBox="1"/>
+          <p:nvPr/>
+        </p:nvSpPr>
+        <p:spPr>
+          <a:xfrm>
+            <a:off x="960120" y="1645920"/>
+            <a:ext cx="1188719" cy="1097280"/>
+          </a:xfrm>
+          <a:prstGeom prst="rect">
+            <a:avLst/>
+          </a:prstGeom>
+          <a:noFill/>
+        </p:spPr>
+        <p:txBody>
+          <a:bodyPr wrap="square">
+            <a:spAutoFit/>
+          </a:bodyPr>
+          <a:lstStyle/>
+          <a:p>
+            <a:pPr algn="ctr"/>
+            <a:r>
+              <a:rPr sz="1000" b="0" i="0">
+                <a:solidFill>
+                  <a:srgbClr val="FFFFFF"/>
+                </a:solidFill>
+              </a:rPr>
+              <a:t>Eingangs-
+bestätigung</a:t>
+            </a:r>
+          </a:p>
+        </p:txBody>
+      </p:sp>
+      <p:sp>
+        <p:nvSpPr>
+          <p:cNvPr id="8" name="TextBox 7"/>
+          <p:cNvSpPr txBox="1"/>
+          <p:nvPr/>
+        </p:nvSpPr>
+        <p:spPr>
+          <a:xfrm>
+            <a:off x="2194560" y="2057400"/>
+            <a:ext cx="164592" cy="365760"/>
+          </a:xfrm>
+          <a:prstGeom prst="rect">
+            <a:avLst/>
+          </a:prstGeom>
+          <a:noFill/>
+        </p:spPr>
+        <p:txBody>
+          <a:bodyPr wrap="square">
+            <a:spAutoFit/>
+          </a:bodyPr>
+          <a:lstStyle/>
+          <a:p>
+            <a:pPr algn="ctr"/>
+            <a:r>
+              <a:rPr sz="1200" b="0" i="0">
+                <a:solidFill>
+                  <a:srgbClr val="E85D04"/>
+                </a:solidFill>
+              </a:rPr>
+              <a:t>→</a:t>
+            </a:r>
+          </a:p>
+        </p:txBody>
+      </p:sp>
+      <p:sp>
+        <p:nvSpPr>
+          <p:cNvPr id="9" name="Rectangle 8"/>
+          <p:cNvSpPr/>
+          <p:nvPr/>
+        </p:nvSpPr>
+        <p:spPr>
+          <a:xfrm>
+            <a:off x="2331720" y="1554480"/>
+            <a:ext cx="1280160" cy="1371600"/>
+          </a:xfrm>
+          <a:prstGeom prst="rect">
+            <a:avLst/>
+          </a:prstGeom>
+          <a:solidFill>
+            <a:srgbClr val="0D3B2A"/>
+          </a:solidFill>
+          <a:ln>
+            <a:noFill/>
+          </a:ln>
+        </p:spPr>
+        <p:style>
+          <a:lnRef idx="1">
+            <a:schemeClr val="accent1"/>
+          </a:lnRef>
+          <a:fillRef idx="3">
+            <a:schemeClr val="accent1"/>
+          </a:fillRef>
+          <a:effectRef idx="2">
+            <a:schemeClr val="accent1"/>
+          </a:effectRef>
+          <a:fontRef idx="minor">
+            <a:schemeClr val="lt1"/>
+          </a:fontRef>
+        </p:style>
+        <p:txBody>
+          <a:bodyPr rtlCol="0" anchor="ctr"/>
+          <a:lstStyle/>
+          <a:p>
+            <a:pPr algn="ctr"/>
+          </a:p>
+        </p:txBody>
+      </p:sp>
+      <p:sp>
+        <p:nvSpPr>
+          <p:cNvPr id="10" name="TextBox 9"/>
+          <p:cNvSpPr txBox="1"/>
+          <p:nvPr/>
+        </p:nvSpPr>
+        <p:spPr>
+          <a:xfrm>
+            <a:off x="2377439" y="1645920"/>
+            <a:ext cx="1188719" cy="1097280"/>
+          </a:xfrm>
+          <a:prstGeom prst="rect">
+            <a:avLst/>
+          </a:prstGeom>
+          <a:noFill/>
+        </p:spPr>
+        <p:txBody>
+          <a:bodyPr wrap="square">
+            <a:spAutoFit/>
+          </a:bodyPr>
+          <a:lstStyle/>
+          <a:p>
+            <a:pPr algn="ctr"/>
+            <a:r>
+              <a:rPr sz="1000" b="0" i="0">
+                <a:solidFill>
+                  <a:srgbClr val="FFFFFF"/>
+                </a:solidFill>
+              </a:rPr>
+              <a:t>Kalkulation
+(Claude AI)</a:t>
+            </a:r>
+          </a:p>
+        </p:txBody>
+      </p:sp>
+      <p:sp>
+        <p:nvSpPr>
+          <p:cNvPr id="11" name="TextBox 10"/>
+          <p:cNvSpPr txBox="1"/>
+          <p:nvPr/>
+        </p:nvSpPr>
+        <p:spPr>
+          <a:xfrm>
+            <a:off x="3611879" y="2057400"/>
+            <a:ext cx="164592" cy="365760"/>
+          </a:xfrm>
+          <a:prstGeom prst="rect">
+            <a:avLst/>
+          </a:prstGeom>
+          <a:noFill/>
+        </p:spPr>
+        <p:txBody>
+          <a:bodyPr wrap="square">
+            <a:spAutoFit/>
+          </a:bodyPr>
+          <a:lstStyle/>
+          <a:p>
+            <a:pPr algn="ctr"/>
+            <a:r>
+              <a:rPr sz="1200" b="0" i="0">
+                <a:solidFill>
+                  <a:srgbClr val="E85D04"/>
+                </a:solidFill>
+              </a:rPr>
+              <a:t>→</a:t>
+            </a:r>
+          </a:p>
+        </p:txBody>
+      </p:sp>
+      <p:sp>
+        <p:nvSpPr>
+          <p:cNvPr id="12" name="Rectangle 11"/>
+          <p:cNvSpPr/>
+          <p:nvPr/>
+        </p:nvSpPr>
+        <p:spPr>
+          <a:xfrm>
+            <a:off x="3749039" y="1554480"/>
+            <a:ext cx="1280160" cy="1371600"/>
+          </a:xfrm>
+          <a:prstGeom prst="rect">
+            <a:avLst/>
+          </a:prstGeom>
+          <a:solidFill>
+            <a:srgbClr val="0D3B2A"/>
+          </a:solidFill>
+          <a:ln>
+            <a:noFill/>
+          </a:ln>
+        </p:spPr>
+        <p:style>
+          <a:lnRef idx="1">
+            <a:schemeClr val="accent1"/>
+          </a:lnRef>
+          <a:fillRef idx="3">
+            <a:schemeClr val="accent1"/>
+          </a:fillRef>
+          <a:effectRef idx="2">
+            <a:schemeClr val="accent1"/>
+          </a:effectRef>
+          <a:fontRef idx="minor">
+            <a:schemeClr val="lt1"/>
+          </a:fontRef>
+        </p:style>
+        <p:txBody>
+          <a:bodyPr rtlCol="0" anchor="ctr"/>
+          <a:lstStyle/>
+          <a:p>
+            <a:pPr algn="ctr"/>
+          </a:p>
+        </p:txBody>
+      </p:sp>
+      <p:sp>
+        <p:nvSpPr>
+          <p:cNvPr id="13" name="TextBox 12"/>
+          <p:cNvSpPr txBox="1"/>
+          <p:nvPr/>
+        </p:nvSpPr>
+        <p:spPr>
+          <a:xfrm>
+            <a:off x="3794759" y="1645920"/>
+            <a:ext cx="1188719" cy="1097280"/>
+          </a:xfrm>
+          <a:prstGeom prst="rect">
+            <a:avLst/>
+          </a:prstGeom>
+          <a:noFill/>
+        </p:spPr>
+        <p:txBody>
+          <a:bodyPr wrap="square">
+            <a:spAutoFit/>
+          </a:bodyPr>
+          <a:lstStyle/>
+          <a:p>
+            <a:pPr algn="ctr"/>
+            <a:r>
+              <a:rPr sz="1000" b="0" i="0">
+                <a:solidFill>
+                  <a:srgbClr val="FFFFFF"/>
+                </a:solidFill>
+              </a:rPr>
+              <a:t>Google Docs
+Offerte</a:t>
+            </a:r>
+          </a:p>
+        </p:txBody>
+      </p:sp>
+      <p:sp>
+        <p:nvSpPr>
+          <p:cNvPr id="14" name="TextBox 13"/>
+          <p:cNvSpPr txBox="1"/>
+          <p:nvPr/>
+        </p:nvSpPr>
+        <p:spPr>
+          <a:xfrm>
+            <a:off x="5029200" y="2057400"/>
+            <a:ext cx="164592" cy="365760"/>
+          </a:xfrm>
+          <a:prstGeom prst="rect">
+            <a:avLst/>
+          </a:prstGeom>
+          <a:noFill/>
+        </p:spPr>
+        <p:txBody>
+          <a:bodyPr wrap="square">
+            <a:spAutoFit/>
+          </a:bodyPr>
+          <a:lstStyle/>
+          <a:p>
+            <a:pPr algn="ctr"/>
+            <a:r>
+              <a:rPr sz="1200" b="0" i="0">
+                <a:solidFill>
+                  <a:srgbClr val="E85D04"/>
+                </a:solidFill>
+              </a:rPr>
+              <a:t>→</a:t>
+            </a:r>
+          </a:p>
+        </p:txBody>
+      </p:sp>
+      <p:sp>
+        <p:nvSpPr>
+          <p:cNvPr id="15" name="Rectangle 14"/>
+          <p:cNvSpPr/>
+          <p:nvPr/>
+        </p:nvSpPr>
+        <p:spPr>
+          <a:xfrm>
+            <a:off x="5166359" y="1554480"/>
+            <a:ext cx="1280160" cy="1371600"/>
+          </a:xfrm>
+          <a:prstGeom prst="rect">
+            <a:avLst/>
+          </a:prstGeom>
+          <a:solidFill>
+            <a:srgbClr val="0D3B2A"/>
+          </a:solidFill>
+          <a:ln>
+            <a:noFill/>
+          </a:ln>
+        </p:spPr>
+        <p:style>
+          <a:lnRef idx="1">
+            <a:schemeClr val="accent1"/>
+          </a:lnRef>
+          <a:fillRef idx="3">
+            <a:schemeClr val="accent1"/>
+          </a:fillRef>
+          <a:effectRef idx="2">
+            <a:schemeClr val="accent1"/>
+          </a:effectRef>
+          <a:fontRef idx="minor">
+            <a:schemeClr val="lt1"/>
+          </a:fontRef>
+        </p:style>
+        <p:txBody>
+          <a:bodyPr rtlCol="0" anchor="ctr"/>
+          <a:lstStyle/>
+          <a:p>
+            <a:pPr algn="ctr"/>
+          </a:p>
+        </p:txBody>
+      </p:sp>
+      <p:sp>
+        <p:nvSpPr>
+          <p:cNvPr id="16" name="TextBox 15"/>
+          <p:cNvSpPr txBox="1"/>
+          <p:nvPr/>
+        </p:nvSpPr>
+        <p:spPr>
+          <a:xfrm>
+            <a:off x="5212079" y="1645920"/>
+            <a:ext cx="1188719" cy="1097280"/>
+          </a:xfrm>
+          <a:prstGeom prst="rect">
+            <a:avLst/>
+          </a:prstGeom>
+          <a:noFill/>
+        </p:spPr>
+        <p:txBody>
+          <a:bodyPr wrap="square">
+            <a:spAutoFit/>
+          </a:bodyPr>
+          <a:lstStyle/>
+          <a:p>
+            <a:pPr algn="ctr"/>
+            <a:r>
+              <a:rPr sz="1000" b="0" i="0">
+                <a:solidFill>
+                  <a:srgbClr val="FFFFFF"/>
+                </a:solidFill>
+              </a:rPr>
+              <a:t>Zur Freigabe
+senden</a:t>
+            </a:r>
+          </a:p>
+        </p:txBody>
+      </p:sp>
+      <p:sp>
+        <p:nvSpPr>
+          <p:cNvPr id="17" name="TextBox 16"/>
+          <p:cNvSpPr txBox="1"/>
+          <p:nvPr/>
+        </p:nvSpPr>
+        <p:spPr>
+          <a:xfrm>
+            <a:off x="6446519" y="2057400"/>
+            <a:ext cx="164592" cy="365760"/>
+          </a:xfrm>
+          <a:prstGeom prst="rect">
+            <a:avLst/>
+          </a:prstGeom>
+          <a:noFill/>
+        </p:spPr>
+        <p:txBody>
+          <a:bodyPr wrap="square">
+            <a:spAutoFit/>
+          </a:bodyPr>
+          <a:lstStyle/>
+          <a:p>
+            <a:pPr algn="ctr"/>
+            <a:r>
+              <a:rPr sz="1200" b="0" i="0">
+                <a:solidFill>
+                  <a:srgbClr val="E85D04"/>
+                </a:solidFill>
+              </a:rPr>
+              <a:t>→</a:t>
+            </a:r>
+          </a:p>
+        </p:txBody>
+      </p:sp>
+      <p:sp>
+        <p:nvSpPr>
+          <p:cNvPr id="18" name="Rectangle 17"/>
+          <p:cNvSpPr/>
+          <p:nvPr/>
+        </p:nvSpPr>
+        <p:spPr>
+          <a:xfrm>
+            <a:off x="6583679" y="1554480"/>
+            <a:ext cx="1280160" cy="1371600"/>
+          </a:xfrm>
+          <a:prstGeom prst="rect">
+            <a:avLst/>
+          </a:prstGeom>
+          <a:solidFill>
+            <a:srgbClr val="0D3B2A"/>
+          </a:solidFill>
+          <a:ln>
+            <a:noFill/>
+          </a:ln>
+        </p:spPr>
+        <p:style>
+          <a:lnRef idx="1">
+            <a:schemeClr val="accent1"/>
+          </a:lnRef>
+          <a:fillRef idx="3">
+            <a:schemeClr val="accent1"/>
+          </a:fillRef>
+          <a:effectRef idx="2">
+            <a:schemeClr val="accent1"/>
+          </a:effectRef>
+          <a:fontRef idx="minor">
+            <a:schemeClr val="lt1"/>
+          </a:fontRef>
+        </p:style>
+        <p:txBody>
+          <a:bodyPr rtlCol="0" anchor="ctr"/>
+          <a:lstStyle/>
+          <a:p>
+            <a:pPr algn="ctr"/>
+          </a:p>
+        </p:txBody>
+      </p:sp>
+      <p:sp>
+        <p:nvSpPr>
+          <p:cNvPr id="19" name="TextBox 18"/>
+          <p:cNvSpPr txBox="1"/>
+          <p:nvPr/>
+        </p:nvSpPr>
+        <p:spPr>
+          <a:xfrm>
+            <a:off x="6629399" y="1645920"/>
+            <a:ext cx="1188719" cy="1097280"/>
+          </a:xfrm>
+          <a:prstGeom prst="rect">
+            <a:avLst/>
+          </a:prstGeom>
+          <a:noFill/>
+        </p:spPr>
+        <p:txBody>
+          <a:bodyPr wrap="square">
+            <a:spAutoFit/>
+          </a:bodyPr>
+          <a:lstStyle/>
+          <a:p>
+            <a:pPr algn="ctr"/>
+            <a:r>
+              <a:rPr sz="1000" b="0" i="0">
+                <a:solidFill>
+                  <a:srgbClr val="FFFFFF"/>
+                </a:solidFill>
+              </a:rPr>
+              <a:t>Wait-Node
+(HitL)</a:t>
+            </a:r>
+          </a:p>
+        </p:txBody>
+      </p:sp>
+      <p:sp>
+        <p:nvSpPr>
+          <p:cNvPr id="20" name="TextBox 19"/>
+          <p:cNvSpPr txBox="1"/>
+          <p:nvPr/>
+        </p:nvSpPr>
+        <p:spPr>
+          <a:xfrm>
+            <a:off x="7863840" y="2057400"/>
+            <a:ext cx="164592" cy="365760"/>
+          </a:xfrm>
+          <a:prstGeom prst="rect">
+            <a:avLst/>
+          </a:prstGeom>
+          <a:noFill/>
+        </p:spPr>
+        <p:txBody>
+          <a:bodyPr wrap="square">
+            <a:spAutoFit/>
+          </a:bodyPr>
+          <a:lstStyle/>
+          <a:p>
+            <a:pPr algn="ctr"/>
+            <a:r>
+              <a:rPr sz="1200" b="0" i="0">
+                <a:solidFill>
+                  <a:srgbClr val="E85D04"/>
+                </a:solidFill>
+              </a:rPr>
+              <a:t>→</a:t>
+            </a:r>
+          </a:p>
+        </p:txBody>
+      </p:sp>
+      <p:sp>
+        <p:nvSpPr>
+          <p:cNvPr id="21" name="Rectangle 20"/>
+          <p:cNvSpPr/>
+          <p:nvPr/>
+        </p:nvSpPr>
+        <p:spPr>
+          <a:xfrm>
+            <a:off x="8001000" y="1554480"/>
+            <a:ext cx="1280160" cy="1371600"/>
+          </a:xfrm>
+          <a:prstGeom prst="rect">
+            <a:avLst/>
+          </a:prstGeom>
+          <a:solidFill>
+            <a:srgbClr val="0D3B2A"/>
+          </a:solidFill>
+          <a:ln>
+            <a:noFill/>
+          </a:ln>
+        </p:spPr>
+        <p:style>
+          <a:lnRef idx="1">
+            <a:schemeClr val="accent1"/>
+          </a:lnRef>
+          <a:fillRef idx="3">
+            <a:schemeClr val="accent1"/>
+          </a:fillRef>
+          <a:effectRef idx="2">
+            <a:schemeClr val="accent1"/>
+          </a:effectRef>
+          <a:fontRef idx="minor">
+            <a:schemeClr val="lt1"/>
+          </a:fontRef>
+        </p:style>
+        <p:txBody>
+          <a:bodyPr rtlCol="0" anchor="ctr"/>
+          <a:lstStyle/>
+          <a:p>
+            <a:pPr algn="ctr"/>
+          </a:p>
+        </p:txBody>
+      </p:sp>
+      <p:sp>
+        <p:nvSpPr>
+          <p:cNvPr id="22" name="TextBox 21"/>
+          <p:cNvSpPr txBox="1"/>
+          <p:nvPr/>
+        </p:nvSpPr>
+        <p:spPr>
+          <a:xfrm>
+            <a:off x="8046720" y="1645920"/>
+            <a:ext cx="1188719" cy="1097280"/>
+          </a:xfrm>
+          <a:prstGeom prst="rect">
+            <a:avLst/>
+          </a:prstGeom>
+          <a:noFill/>
+        </p:spPr>
+        <p:txBody>
+          <a:bodyPr wrap="square">
+            <a:spAutoFit/>
+          </a:bodyPr>
+          <a:lstStyle/>
+          <a:p>
+            <a:pPr algn="ctr"/>
+            <a:r>
+              <a:rPr sz="1000" b="0" i="0">
+                <a:solidFill>
+                  <a:srgbClr val="FFFFFF"/>
+                </a:solidFill>
+              </a:rPr>
+              <a:t>Entscheidung
+prüfen (IF)</a:t>
+            </a:r>
+          </a:p>
+        </p:txBody>
+      </p:sp>
+      <p:sp>
+        <p:nvSpPr>
+          <p:cNvPr id="23" name="TextBox 22"/>
+          <p:cNvSpPr txBox="1"/>
+          <p:nvPr/>
+        </p:nvSpPr>
+        <p:spPr>
+          <a:xfrm>
+            <a:off x="9281160" y="2057400"/>
+            <a:ext cx="164592" cy="365760"/>
+          </a:xfrm>
+          <a:prstGeom prst="rect">
+            <a:avLst/>
+          </a:prstGeom>
+          <a:noFill/>
+        </p:spPr>
+        <p:txBody>
+          <a:bodyPr wrap="square">
+            <a:spAutoFit/>
+          </a:bodyPr>
+          <a:lstStyle/>
+          <a:p>
+            <a:pPr algn="ctr"/>
+            <a:r>
+              <a:rPr sz="1200" b="0" i="0">
+                <a:solidFill>
+                  <a:srgbClr val="E85D04"/>
+                </a:solidFill>
+              </a:rPr>
+              <a:t>→</a:t>
+            </a:r>
+          </a:p>
+        </p:txBody>
+      </p:sp>
+      <p:sp>
+        <p:nvSpPr>
+          <p:cNvPr id="24" name="Rectangle 23"/>
+          <p:cNvSpPr/>
+          <p:nvPr/>
+        </p:nvSpPr>
+        <p:spPr>
+          <a:xfrm>
+            <a:off x="9418319" y="1554480"/>
+            <a:ext cx="1280160" cy="1371600"/>
+          </a:xfrm>
+          <a:prstGeom prst="rect">
+            <a:avLst/>
+          </a:prstGeom>
+          <a:solidFill>
+            <a:srgbClr val="0D3B2A"/>
+          </a:solidFill>
+          <a:ln>
+            <a:noFill/>
+          </a:ln>
+        </p:spPr>
+        <p:style>
+          <a:lnRef idx="1">
+            <a:schemeClr val="accent1"/>
+          </a:lnRef>
+          <a:fillRef idx="3">
+            <a:schemeClr val="accent1"/>
+          </a:fillRef>
+          <a:effectRef idx="2">
+            <a:schemeClr val="accent1"/>
+          </a:effectRef>
+          <a:fontRef idx="minor">
+            <a:schemeClr val="lt1"/>
+          </a:fontRef>
+        </p:style>
+        <p:txBody>
+          <a:bodyPr rtlCol="0" anchor="ctr"/>
+          <a:lstStyle/>
+          <a:p>
+            <a:pPr algn="ctr"/>
+          </a:p>
+        </p:txBody>
+      </p:sp>
+      <p:sp>
+        <p:nvSpPr>
+          <p:cNvPr id="25" name="TextBox 24"/>
+          <p:cNvSpPr txBox="1"/>
+          <p:nvPr/>
+        </p:nvSpPr>
+        <p:spPr>
+          <a:xfrm>
+            <a:off x="9464040" y="1645920"/>
+            <a:ext cx="1188719" cy="1097280"/>
+          </a:xfrm>
+          <a:prstGeom prst="rect">
+            <a:avLst/>
+          </a:prstGeom>
+          <a:noFill/>
+        </p:spPr>
+        <p:txBody>
+          <a:bodyPr wrap="square">
+            <a:spAutoFit/>
+          </a:bodyPr>
+          <a:lstStyle/>
+          <a:p>
+            <a:pPr algn="ctr"/>
+            <a:r>
+              <a:rPr sz="1000" b="0" i="0">
+                <a:solidFill>
+                  <a:srgbClr val="FFFFFF"/>
+                </a:solidFill>
+              </a:rPr>
+              <a:t>Genehmigt
+→ Versand</a:t>
+            </a:r>
+          </a:p>
+        </p:txBody>
+      </p:sp>
+      <p:sp>
+        <p:nvSpPr>
+          <p:cNvPr id="26" name="Rectangle 25"/>
+          <p:cNvSpPr/>
+          <p:nvPr/>
+        </p:nvSpPr>
+        <p:spPr>
+          <a:xfrm>
+            <a:off x="914400" y="3108960"/>
+            <a:ext cx="10149840" cy="365760"/>
+          </a:xfrm>
+          <a:prstGeom prst="rect">
+            <a:avLst/>
+          </a:prstGeom>
+          <a:solidFill>
+            <a:srgbClr val="6B3510"/>
+          </a:solidFill>
+          <a:ln>
+            <a:noFill/>
+          </a:ln>
+        </p:spPr>
+        <p:style>
+          <a:lnRef idx="1">
+            <a:schemeClr val="accent1"/>
+          </a:lnRef>
+          <a:fillRef idx="3">
+            <a:schemeClr val="accent1"/>
+          </a:fillRef>
+          <a:effectRef idx="2">
+            <a:schemeClr val="accent1"/>
+          </a:effectRef>
+          <a:fontRef idx="minor">
+            <a:schemeClr val="lt1"/>
+          </a:fontRef>
+        </p:style>
+        <p:txBody>
+          <a:bodyPr rtlCol="0" anchor="ctr"/>
+          <a:lstStyle/>
+          <a:p>
+            <a:pPr algn="ctr"/>
+          </a:p>
+        </p:txBody>
+      </p:sp>
+      <p:sp>
+        <p:nvSpPr>
+          <p:cNvPr id="27" name="TextBox 26"/>
+          <p:cNvSpPr txBox="1"/>
+          <p:nvPr/>
+        </p:nvSpPr>
+        <p:spPr>
+          <a:xfrm>
+            <a:off x="1051560" y="3154680"/>
+            <a:ext cx="2286000" cy="274320"/>
+          </a:xfrm>
+          <a:prstGeom prst="rect">
+            <a:avLst/>
+          </a:prstGeom>
+          <a:noFill/>
+        </p:spPr>
+        <p:txBody>
+          <a:bodyPr wrap="square">
+            <a:spAutoFit/>
+          </a:bodyPr>
+          <a:lstStyle/>
+          <a:p>
+            <a:pPr algn="l"/>
+            <a:r>
+              <a:rPr sz="1100" b="1" i="0">
+                <a:solidFill>
+                  <a:srgbClr val="F4A261"/>
+                </a:solidFill>
+              </a:rPr>
+              <a:t>UNVOLLSTÄNDIG</a:t>
+            </a:r>
+          </a:p>
+        </p:txBody>
+      </p:sp>
+      <p:sp>
+        <p:nvSpPr>
+          <p:cNvPr id="28" name="Rectangle 27"/>
+          <p:cNvSpPr/>
+          <p:nvPr/>
+        </p:nvSpPr>
+        <p:spPr>
+          <a:xfrm>
+            <a:off x="914400" y="3566160"/>
+            <a:ext cx="1554480" cy="1371600"/>
+          </a:xfrm>
+          <a:prstGeom prst="rect">
+            <a:avLst/>
+          </a:prstGeom>
+          <a:solidFill>
+            <a:srgbClr val="4A2208"/>
+          </a:solidFill>
+          <a:ln>
+            <a:noFill/>
+          </a:ln>
+        </p:spPr>
+        <p:style>
+          <a:lnRef idx="1">
+            <a:schemeClr val="accent1"/>
+          </a:lnRef>
+          <a:fillRef idx="3">
+            <a:schemeClr val="accent1"/>
+          </a:fillRef>
+          <a:effectRef idx="2">
+            <a:schemeClr val="accent1"/>
+          </a:effectRef>
+          <a:fontRef idx="minor">
+            <a:schemeClr val="lt1"/>
+          </a:fontRef>
+        </p:style>
+        <p:txBody>
+          <a:bodyPr rtlCol="0" anchor="ctr"/>
+          <a:lstStyle/>
+          <a:p>
+            <a:pPr algn="ctr"/>
+          </a:p>
+        </p:txBody>
+      </p:sp>
+      <p:sp>
+        <p:nvSpPr>
+          <p:cNvPr id="29" name="TextBox 28"/>
+          <p:cNvSpPr txBox="1"/>
+          <p:nvPr/>
+        </p:nvSpPr>
+        <p:spPr>
+          <a:xfrm>
+            <a:off x="960120" y="3657600"/>
+            <a:ext cx="1463039" cy="1097280"/>
+          </a:xfrm>
+          <a:prstGeom prst="rect">
+            <a:avLst/>
+          </a:prstGeom>
+          <a:noFill/>
+        </p:spPr>
+        <p:txBody>
+          <a:bodyPr wrap="square">
+            <a:spAutoFit/>
+          </a:bodyPr>
+          <a:lstStyle/>
+          <a:p>
+            <a:pPr algn="ctr"/>
+            <a:r>
+              <a:rPr sz="1000" b="0" i="0">
+                <a:solidFill>
+                  <a:srgbClr val="F4A261"/>
+                </a:solidFill>
+              </a:rPr>
+              <a:t>Nachfrage-
+Email generieren</a:t>
+            </a:r>
+          </a:p>
+        </p:txBody>
+      </p:sp>
+      <p:sp>
+        <p:nvSpPr>
+          <p:cNvPr id="30" name="TextBox 29"/>
+          <p:cNvSpPr txBox="1"/>
+          <p:nvPr/>
+        </p:nvSpPr>
+        <p:spPr>
+          <a:xfrm>
+            <a:off x="2468879" y="4069080"/>
+            <a:ext cx="502920" cy="365760"/>
+          </a:xfrm>
+          <a:prstGeom prst="rect">
+            <a:avLst/>
+          </a:prstGeom>
+          <a:noFill/>
+        </p:spPr>
+        <p:txBody>
+          <a:bodyPr wrap="square">
+            <a:spAutoFit/>
+          </a:bodyPr>
+          <a:lstStyle/>
+          <a:p>
+            <a:pPr algn="ctr"/>
+            <a:r>
+              <a:rPr sz="1200" b="0" i="0">
+                <a:solidFill>
+                  <a:srgbClr val="E85D04"/>
+                </a:solidFill>
+              </a:rPr>
+              <a:t>→</a:t>
+            </a:r>
+          </a:p>
+        </p:txBody>
+      </p:sp>
+      <p:sp>
+        <p:nvSpPr>
+          <p:cNvPr id="31" name="Rectangle 30"/>
+          <p:cNvSpPr/>
+          <p:nvPr/>
+        </p:nvSpPr>
+        <p:spPr>
+          <a:xfrm>
+            <a:off x="2651760" y="3566160"/>
+            <a:ext cx="1554480" cy="1371600"/>
+          </a:xfrm>
+          <a:prstGeom prst="rect">
+            <a:avLst/>
+          </a:prstGeom>
+          <a:solidFill>
+            <a:srgbClr val="4A2208"/>
+          </a:solidFill>
+          <a:ln>
+            <a:noFill/>
+          </a:ln>
+        </p:spPr>
+        <p:style>
+          <a:lnRef idx="1">
+            <a:schemeClr val="accent1"/>
+          </a:lnRef>
+          <a:fillRef idx="3">
+            <a:schemeClr val="accent1"/>
+          </a:fillRef>
+          <a:effectRef idx="2">
+            <a:schemeClr val="accent1"/>
+          </a:effectRef>
+          <a:fontRef idx="minor">
+            <a:schemeClr val="lt1"/>
+          </a:fontRef>
+        </p:style>
+        <p:txBody>
+          <a:bodyPr rtlCol="0" anchor="ctr"/>
+          <a:lstStyle/>
+          <a:p>
+            <a:pPr algn="ctr"/>
+          </a:p>
+        </p:txBody>
+      </p:sp>
+      <p:sp>
+        <p:nvSpPr>
+          <p:cNvPr id="32" name="TextBox 31"/>
+          <p:cNvSpPr txBox="1"/>
+          <p:nvPr/>
+        </p:nvSpPr>
+        <p:spPr>
+          <a:xfrm>
+            <a:off x="2697479" y="3657600"/>
+            <a:ext cx="1463039" cy="1097280"/>
+          </a:xfrm>
+          <a:prstGeom prst="rect">
+            <a:avLst/>
+          </a:prstGeom>
+          <a:noFill/>
+        </p:spPr>
+        <p:txBody>
+          <a:bodyPr wrap="square">
+            <a:spAutoFit/>
+          </a:bodyPr>
+          <a:lstStyle/>
+          <a:p>
+            <a:pPr algn="ctr"/>
+            <a:r>
+              <a:rPr sz="1000" b="0" i="0">
+                <a:solidFill>
+                  <a:srgbClr val="F4A261"/>
+                </a:solidFill>
+              </a:rPr>
+              <a:t>Auftragskontext
+speichern</a:t>
+            </a:r>
+          </a:p>
+        </p:txBody>
+      </p:sp>
+      <p:sp>
+        <p:nvSpPr>
+          <p:cNvPr id="33" name="TextBox 32"/>
+          <p:cNvSpPr txBox="1"/>
+          <p:nvPr/>
+        </p:nvSpPr>
+        <p:spPr>
+          <a:xfrm>
+            <a:off x="4206240" y="4069080"/>
+            <a:ext cx="502920" cy="365760"/>
+          </a:xfrm>
+          <a:prstGeom prst="rect">
+            <a:avLst/>
+          </a:prstGeom>
+          <a:noFill/>
+        </p:spPr>
+        <p:txBody>
+          <a:bodyPr wrap="square">
+            <a:spAutoFit/>
+          </a:bodyPr>
+          <a:lstStyle/>
+          <a:p>
+            <a:pPr algn="ctr"/>
+            <a:r>
+              <a:rPr sz="1200" b="0" i="0">
+                <a:solidFill>
+                  <a:srgbClr val="E85D04"/>
+                </a:solidFill>
+              </a:rPr>
+              <a:t>→</a:t>
+            </a:r>
+          </a:p>
+        </p:txBody>
+      </p:sp>
+      <p:sp>
+        <p:nvSpPr>
+          <p:cNvPr id="34" name="Rectangle 33"/>
+          <p:cNvSpPr/>
+          <p:nvPr/>
+        </p:nvSpPr>
+        <p:spPr>
+          <a:xfrm>
+            <a:off x="4389120" y="3566160"/>
+            <a:ext cx="1554480" cy="1371600"/>
+          </a:xfrm>
+          <a:prstGeom prst="rect">
+            <a:avLst/>
+          </a:prstGeom>
+          <a:solidFill>
+            <a:srgbClr val="4A2208"/>
+          </a:solidFill>
+          <a:ln>
+            <a:noFill/>
+          </a:ln>
+        </p:spPr>
+        <p:style>
+          <a:lnRef idx="1">
+            <a:schemeClr val="accent1"/>
+          </a:lnRef>
+          <a:fillRef idx="3">
+            <a:schemeClr val="accent1"/>
+          </a:fillRef>
+          <a:effectRef idx="2">
+            <a:schemeClr val="accent1"/>
+          </a:effectRef>
+          <a:fontRef idx="minor">
+            <a:schemeClr val="lt1"/>
+          </a:fontRef>
+        </p:style>
+        <p:txBody>
+          <a:bodyPr rtlCol="0" anchor="ctr"/>
+          <a:lstStyle/>
+          <a:p>
+            <a:pPr algn="ctr"/>
+          </a:p>
+        </p:txBody>
+      </p:sp>
+      <p:sp>
+        <p:nvSpPr>
+          <p:cNvPr id="35" name="TextBox 34"/>
+          <p:cNvSpPr txBox="1"/>
+          <p:nvPr/>
+        </p:nvSpPr>
+        <p:spPr>
+          <a:xfrm>
+            <a:off x="4434840" y="3657600"/>
+            <a:ext cx="1463039" cy="1097280"/>
+          </a:xfrm>
+          <a:prstGeom prst="rect">
+            <a:avLst/>
+          </a:prstGeom>
+          <a:noFill/>
+        </p:spPr>
+        <p:txBody>
+          <a:bodyPr wrap="square">
+            <a:spAutoFit/>
+          </a:bodyPr>
+          <a:lstStyle/>
+          <a:p>
+            <a:pPr algn="ctr"/>
+            <a:r>
+              <a:rPr sz="1000" b="0" i="0">
+                <a:solidFill>
+                  <a:srgbClr val="F4A261"/>
+                </a:solidFill>
+              </a:rPr>
+              <a:t>Nachfrage
+senden</a:t>
+            </a:r>
+          </a:p>
+        </p:txBody>
+      </p:sp>
+      <p:sp>
+        <p:nvSpPr>
+          <p:cNvPr id="36" name="TextBox 35"/>
+          <p:cNvSpPr txBox="1"/>
+          <p:nvPr/>
+        </p:nvSpPr>
+        <p:spPr>
+          <a:xfrm>
+            <a:off x="5943599" y="4069080"/>
+            <a:ext cx="502920" cy="365760"/>
+          </a:xfrm>
+          <a:prstGeom prst="rect">
+            <a:avLst/>
+          </a:prstGeom>
+          <a:noFill/>
+        </p:spPr>
+        <p:txBody>
+          <a:bodyPr wrap="square">
+            <a:spAutoFit/>
+          </a:bodyPr>
+          <a:lstStyle/>
+          <a:p>
+            <a:pPr algn="ctr"/>
+            <a:r>
+              <a:rPr sz="1200" b="0" i="0">
+                <a:solidFill>
+                  <a:srgbClr val="E85D04"/>
+                </a:solidFill>
+              </a:rPr>
+              <a:t>→</a:t>
+            </a:r>
+          </a:p>
+        </p:txBody>
+      </p:sp>
+      <p:sp>
+        <p:nvSpPr>
+          <p:cNvPr id="37" name="Rectangle 36"/>
+          <p:cNvSpPr/>
+          <p:nvPr/>
+        </p:nvSpPr>
+        <p:spPr>
+          <a:xfrm>
+            <a:off x="6126479" y="3566160"/>
+            <a:ext cx="1554480" cy="1371600"/>
+          </a:xfrm>
+          <a:prstGeom prst="rect">
+            <a:avLst/>
+          </a:prstGeom>
+          <a:solidFill>
+            <a:srgbClr val="4A2208"/>
+          </a:solidFill>
+          <a:ln>
+            <a:noFill/>
+          </a:ln>
+        </p:spPr>
+        <p:style>
+          <a:lnRef idx="1">
+            <a:schemeClr val="accent1"/>
+          </a:lnRef>
+          <a:fillRef idx="3">
+            <a:schemeClr val="accent1"/>
+          </a:fillRef>
+          <a:effectRef idx="2">
+            <a:schemeClr val="accent1"/>
+          </a:effectRef>
+          <a:fontRef idx="minor">
+            <a:schemeClr val="lt1"/>
+          </a:fontRef>
+        </p:style>
+        <p:txBody>
+          <a:bodyPr rtlCol="0" anchor="ctr"/>
+          <a:lstStyle/>
+          <a:p>
+            <a:pPr algn="ctr"/>
+          </a:p>
+        </p:txBody>
+      </p:sp>
+      <p:sp>
+        <p:nvSpPr>
+          <p:cNvPr id="38" name="TextBox 37"/>
+          <p:cNvSpPr txBox="1"/>
+          <p:nvPr/>
+        </p:nvSpPr>
+        <p:spPr>
+          <a:xfrm>
+            <a:off x="6172199" y="3657600"/>
+            <a:ext cx="1463039" cy="1097280"/>
+          </a:xfrm>
+          <a:prstGeom prst="rect">
+            <a:avLst/>
+          </a:prstGeom>
+          <a:noFill/>
+        </p:spPr>
+        <p:txBody>
+          <a:bodyPr wrap="square">
+            <a:spAutoFit/>
+          </a:bodyPr>
+          <a:lstStyle/>
+          <a:p>
+            <a:pPr algn="ctr"/>
+            <a:r>
+              <a:rPr sz="1000" b="0" i="0">
+                <a:solidFill>
+                  <a:srgbClr val="F4A261"/>
+                </a:solidFill>
+              </a:rPr>
+              <a:t>Kunde antwortet
+(loop back)</a:t>
+            </a:r>
+          </a:p>
+        </p:txBody>
+      </p:sp>
+      <p:sp>
+        <p:nvSpPr>
+          <p:cNvPr id="39" name="Rectangle 38"/>
+          <p:cNvSpPr/>
+          <p:nvPr/>
+        </p:nvSpPr>
+        <p:spPr>
+          <a:xfrm>
+            <a:off x="914400" y="5120640"/>
+            <a:ext cx="10149840" cy="365760"/>
+          </a:xfrm>
+          <a:prstGeom prst="rect">
+            <a:avLst/>
+          </a:prstGeom>
+          <a:solidFill>
+            <a:srgbClr val="5C1A1A"/>
+          </a:solidFill>
+          <a:ln>
+            <a:noFill/>
+          </a:ln>
+        </p:spPr>
+        <p:style>
+          <a:lnRef idx="1">
+            <a:schemeClr val="accent1"/>
+          </a:lnRef>
+          <a:fillRef idx="3">
+            <a:schemeClr val="accent1"/>
+          </a:fillRef>
+          <a:effectRef idx="2">
+            <a:schemeClr val="accent1"/>
+          </a:effectRef>
+          <a:fontRef idx="minor">
+            <a:schemeClr val="lt1"/>
+          </a:fontRef>
+        </p:style>
+        <p:txBody>
+          <a:bodyPr rtlCol="0" anchor="ctr"/>
+          <a:lstStyle/>
+          <a:p>
+            <a:pPr algn="ctr"/>
+          </a:p>
+        </p:txBody>
+      </p:sp>
+      <p:sp>
+        <p:nvSpPr>
+          <p:cNvPr id="40" name="TextBox 39"/>
+          <p:cNvSpPr txBox="1"/>
+          <p:nvPr/>
+        </p:nvSpPr>
+        <p:spPr>
+          <a:xfrm>
+            <a:off x="1051560" y="5166360"/>
+            <a:ext cx="1371600" cy="274320"/>
+          </a:xfrm>
+          <a:prstGeom prst="rect">
+            <a:avLst/>
+          </a:prstGeom>
+          <a:noFill/>
+        </p:spPr>
+        <p:txBody>
+          <a:bodyPr wrap="square">
+            <a:spAutoFit/>
+          </a:bodyPr>
+          <a:lstStyle/>
+          <a:p>
+            <a:pPr algn="l"/>
+            <a:r>
+              <a:rPr sz="1100" b="1" i="0">
+                <a:solidFill>
+                  <a:srgbClr val="FF9A9A"/>
+                </a:solidFill>
+              </a:rPr>
+              <a:t>FEHLER</a:t>
+            </a:r>
+          </a:p>
+        </p:txBody>
+      </p:sp>
+      <p:sp>
+        <p:nvSpPr>
+          <p:cNvPr id="41" name="Rectangle 40"/>
+          <p:cNvSpPr/>
+          <p:nvPr/>
+        </p:nvSpPr>
+        <p:spPr>
+          <a:xfrm>
+            <a:off x="914400" y="5577840"/>
+            <a:ext cx="1554480" cy="1005840"/>
+          </a:xfrm>
+          <a:prstGeom prst="rect">
+            <a:avLst/>
+          </a:prstGeom>
+          <a:solidFill>
+            <a:srgbClr val="401010"/>
+          </a:solidFill>
+          <a:ln>
+            <a:noFill/>
+          </a:ln>
+        </p:spPr>
+        <p:style>
+          <a:lnRef idx="1">
+            <a:schemeClr val="accent1"/>
+          </a:lnRef>
+          <a:fillRef idx="3">
+            <a:schemeClr val="accent1"/>
+          </a:fillRef>
+          <a:effectRef idx="2">
+            <a:schemeClr val="accent1"/>
+          </a:effectRef>
+          <a:fontRef idx="minor">
+            <a:schemeClr val="lt1"/>
+          </a:fontRef>
+        </p:style>
+        <p:txBody>
+          <a:bodyPr rtlCol="0" anchor="ctr"/>
+          <a:lstStyle/>
+          <a:p>
+            <a:pPr algn="ctr"/>
+          </a:p>
+        </p:txBody>
+      </p:sp>
+      <p:sp>
+        <p:nvSpPr>
+          <p:cNvPr id="42" name="TextBox 41"/>
+          <p:cNvSpPr txBox="1"/>
+          <p:nvPr/>
+        </p:nvSpPr>
+        <p:spPr>
+          <a:xfrm>
+            <a:off x="960120" y="5650992"/>
+            <a:ext cx="1463039" cy="822960"/>
+          </a:xfrm>
+          <a:prstGeom prst="rect">
+            <a:avLst/>
+          </a:prstGeom>
+          <a:noFill/>
+        </p:spPr>
+        <p:txBody>
+          <a:bodyPr wrap="square">
+            <a:spAutoFit/>
+          </a:bodyPr>
+          <a:lstStyle/>
+          <a:p>
+            <a:pPr algn="ctr"/>
+            <a:r>
+              <a:rPr sz="1000" b="0" i="0">
+                <a:solidFill>
+                  <a:srgbClr val="FFCCCC"/>
+                </a:solidFill>
+              </a:rPr>
+              <a:t>Error-Trigger
+(global)</a:t>
+            </a:r>
+          </a:p>
+        </p:txBody>
+      </p:sp>
+      <p:sp>
+        <p:nvSpPr>
+          <p:cNvPr id="43" name="TextBox 42"/>
+          <p:cNvSpPr txBox="1"/>
+          <p:nvPr/>
+        </p:nvSpPr>
+        <p:spPr>
+          <a:xfrm>
+            <a:off x="2468879" y="5943600"/>
+            <a:ext cx="502920" cy="365760"/>
+          </a:xfrm>
+          <a:prstGeom prst="rect">
+            <a:avLst/>
+          </a:prstGeom>
+          <a:noFill/>
+        </p:spPr>
+        <p:txBody>
+          <a:bodyPr wrap="square">
+            <a:spAutoFit/>
+          </a:bodyPr>
+          <a:lstStyle/>
+          <a:p>
+            <a:pPr algn="ctr"/>
+            <a:r>
+              <a:rPr sz="1200" b="0" i="0">
+                <a:solidFill>
+                  <a:srgbClr val="E85D04"/>
+                </a:solidFill>
+              </a:rPr>
+              <a:t>→</a:t>
+            </a:r>
+          </a:p>
+        </p:txBody>
+      </p:sp>
+      <p:sp>
+        <p:nvSpPr>
+          <p:cNvPr id="44" name="Rectangle 43"/>
+          <p:cNvSpPr/>
+          <p:nvPr/>
+        </p:nvSpPr>
+        <p:spPr>
+          <a:xfrm>
+            <a:off x="2651760" y="5577840"/>
+            <a:ext cx="1554480" cy="1005840"/>
+          </a:xfrm>
+          <a:prstGeom prst="rect">
+            <a:avLst/>
+          </a:prstGeom>
+          <a:solidFill>
+            <a:srgbClr val="401010"/>
+          </a:solidFill>
+          <a:ln>
+            <a:noFill/>
+          </a:ln>
+        </p:spPr>
+        <p:style>
+          <a:lnRef idx="1">
+            <a:schemeClr val="accent1"/>
+          </a:lnRef>
+          <a:fillRef idx="3">
+            <a:schemeClr val="accent1"/>
+          </a:fillRef>
+          <a:effectRef idx="2">
+            <a:schemeClr val="accent1"/>
+          </a:effectRef>
+          <a:fontRef idx="minor">
+            <a:schemeClr val="lt1"/>
+          </a:fontRef>
+        </p:style>
+        <p:txBody>
+          <a:bodyPr rtlCol="0" anchor="ctr"/>
+          <a:lstStyle/>
+          <a:p>
+            <a:pPr algn="ctr"/>
+          </a:p>
+        </p:txBody>
+      </p:sp>
+      <p:sp>
+        <p:nvSpPr>
+          <p:cNvPr id="45" name="TextBox 44"/>
+          <p:cNvSpPr txBox="1"/>
+          <p:nvPr/>
+        </p:nvSpPr>
+        <p:spPr>
+          <a:xfrm>
+            <a:off x="2697479" y="5650992"/>
+            <a:ext cx="1463039" cy="822960"/>
+          </a:xfrm>
+          <a:prstGeom prst="rect">
+            <a:avLst/>
+          </a:prstGeom>
+          <a:noFill/>
+        </p:spPr>
+        <p:txBody>
+          <a:bodyPr wrap="square">
+            <a:spAutoFit/>
+          </a:bodyPr>
+          <a:lstStyle/>
+          <a:p>
+            <a:pPr algn="ctr"/>
+            <a:r>
+              <a:rPr sz="1000" b="0" i="0">
+                <a:solidFill>
+                  <a:srgbClr val="FFCCCC"/>
+                </a:solidFill>
+              </a:rPr>
+              <a:t>Fehler
+klassifizieren</a:t>
+            </a:r>
+          </a:p>
+        </p:txBody>
+      </p:sp>
+      <p:sp>
+        <p:nvSpPr>
+          <p:cNvPr id="46" name="TextBox 45"/>
+          <p:cNvSpPr txBox="1"/>
+          <p:nvPr/>
+        </p:nvSpPr>
+        <p:spPr>
+          <a:xfrm>
+            <a:off x="4206240" y="5943600"/>
+            <a:ext cx="502920" cy="365760"/>
+          </a:xfrm>
+          <a:prstGeom prst="rect">
+            <a:avLst/>
+          </a:prstGeom>
+          <a:noFill/>
+        </p:spPr>
+        <p:txBody>
+          <a:bodyPr wrap="square">
+            <a:spAutoFit/>
+          </a:bodyPr>
+          <a:lstStyle/>
+          <a:p>
+            <a:pPr algn="ctr"/>
+            <a:r>
+              <a:rPr sz="1200" b="0" i="0">
+                <a:solidFill>
+                  <a:srgbClr val="E85D04"/>
+                </a:solidFill>
+              </a:rPr>
+              <a:t>→</a:t>
+            </a:r>
+          </a:p>
+        </p:txBody>
+      </p:sp>
+      <p:sp>
+        <p:nvSpPr>
+          <p:cNvPr id="47" name="Rectangle 46"/>
+          <p:cNvSpPr/>
+          <p:nvPr/>
+        </p:nvSpPr>
+        <p:spPr>
+          <a:xfrm>
+            <a:off x="4389120" y="5577840"/>
+            <a:ext cx="1554480" cy="1005840"/>
+          </a:xfrm>
+          <a:prstGeom prst="rect">
+            <a:avLst/>
+          </a:prstGeom>
+          <a:solidFill>
+            <a:srgbClr val="401010"/>
+          </a:solidFill>
+          <a:ln>
+            <a:noFill/>
+          </a:ln>
+        </p:spPr>
+        <p:style>
+          <a:lnRef idx="1">
+            <a:schemeClr val="accent1"/>
+          </a:lnRef>
+          <a:fillRef idx="3">
+            <a:schemeClr val="accent1"/>
+          </a:fillRef>
+          <a:effectRef idx="2">
+            <a:schemeClr val="accent1"/>
+          </a:effectRef>
+          <a:fontRef idx="minor">
+            <a:schemeClr val="lt1"/>
+          </a:fontRef>
+        </p:style>
+        <p:txBody>
+          <a:bodyPr rtlCol="0" anchor="ctr"/>
+          <a:lstStyle/>
+          <a:p>
+            <a:pPr algn="ctr"/>
+          </a:p>
+        </p:txBody>
+      </p:sp>
+      <p:sp>
+        <p:nvSpPr>
+          <p:cNvPr id="48" name="TextBox 47"/>
+          <p:cNvSpPr txBox="1"/>
+          <p:nvPr/>
+        </p:nvSpPr>
+        <p:spPr>
+          <a:xfrm>
+            <a:off x="4434840" y="5650992"/>
+            <a:ext cx="1463039" cy="822960"/>
+          </a:xfrm>
+          <a:prstGeom prst="rect">
+            <a:avLst/>
+          </a:prstGeom>
+          <a:noFill/>
+        </p:spPr>
+        <p:txBody>
+          <a:bodyPr wrap="square">
+            <a:spAutoFit/>
+          </a:bodyPr>
+          <a:lstStyle/>
+          <a:p>
+            <a:pPr algn="ctr"/>
+            <a:r>
+              <a:rPr sz="1000" b="0" i="0">
+                <a:solidFill>
+                  <a:srgbClr val="FFCCCC"/>
+                </a:solidFill>
+              </a:rPr>
+              <a:t>Benachrichtigung
+an Edgar</a:t>
+            </a:r>
+          </a:p>
+        </p:txBody>
+      </p:sp>
+      <p:sp>
+        <p:nvSpPr>
+          <p:cNvPr id="49" name="TextBox 48"/>
+          <p:cNvSpPr txBox="1"/>
+          <p:nvPr/>
+        </p:nvSpPr>
+        <p:spPr>
+          <a:xfrm>
+            <a:off x="5943599" y="5943600"/>
+            <a:ext cx="502920" cy="365760"/>
+          </a:xfrm>
+          <a:prstGeom prst="rect">
+            <a:avLst/>
+          </a:prstGeom>
+          <a:noFill/>
+        </p:spPr>
+        <p:txBody>
+          <a:bodyPr wrap="square">
+            <a:spAutoFit/>
+          </a:bodyPr>
+          <a:lstStyle/>
+          <a:p>
+            <a:pPr algn="ctr"/>
+            <a:r>
+              <a:rPr sz="1200" b="0" i="0">
+                <a:solidFill>
+                  <a:srgbClr val="E85D04"/>
+                </a:solidFill>
+              </a:rPr>
+              <a:t>→</a:t>
+            </a:r>
+          </a:p>
+        </p:txBody>
+      </p:sp>
+      <p:sp>
+        <p:nvSpPr>
+          <p:cNvPr id="50" name="Rectangle 49"/>
+          <p:cNvSpPr/>
+          <p:nvPr/>
+        </p:nvSpPr>
+        <p:spPr>
+          <a:xfrm>
+            <a:off x="6126479" y="5577840"/>
+            <a:ext cx="1554480" cy="1005840"/>
+          </a:xfrm>
+          <a:prstGeom prst="rect">
+            <a:avLst/>
+          </a:prstGeom>
+          <a:solidFill>
+            <a:srgbClr val="401010"/>
+          </a:solidFill>
+          <a:ln>
+            <a:noFill/>
+          </a:ln>
+        </p:spPr>
+        <p:style>
+          <a:lnRef idx="1">
+            <a:schemeClr val="accent1"/>
+          </a:lnRef>
+          <a:fillRef idx="3">
+            <a:schemeClr val="accent1"/>
+          </a:fillRef>
+          <a:effectRef idx="2">
+            <a:schemeClr val="accent1"/>
+          </a:effectRef>
+          <a:fontRef idx="minor">
+            <a:schemeClr val="lt1"/>
+          </a:fontRef>
+        </p:style>
+        <p:txBody>
+          <a:bodyPr rtlCol="0" anchor="ctr"/>
+          <a:lstStyle/>
+          <a:p>
+            <a:pPr algn="ctr"/>
+          </a:p>
+        </p:txBody>
+      </p:sp>
+      <p:sp>
+        <p:nvSpPr>
+          <p:cNvPr id="51" name="TextBox 50"/>
+          <p:cNvSpPr txBox="1"/>
+          <p:nvPr/>
+        </p:nvSpPr>
+        <p:spPr>
+          <a:xfrm>
+            <a:off x="6172199" y="5650992"/>
+            <a:ext cx="1463039" cy="822960"/>
+          </a:xfrm>
+          <a:prstGeom prst="rect">
+            <a:avLst/>
+          </a:prstGeom>
+          <a:noFill/>
+        </p:spPr>
+        <p:txBody>
+          <a:bodyPr wrap="square">
+            <a:spAutoFit/>
+          </a:bodyPr>
+          <a:lstStyle/>
+          <a:p>
+            <a:pPr algn="ctr"/>
+            <a:r>
+              <a:rPr sz="1000" b="0" i="0">
+                <a:solidFill>
+                  <a:srgbClr val="FFCCCC"/>
+                </a:solidFill>
+              </a:rPr>
+              <a:t>Execution-Log
+speichern</a:t>
+            </a:r>
+          </a:p>
+        </p:txBody>
+      </p:sp>
+    </p:spTree>
+  </p:cSld>
+  <p:clrMapOvr>
+    <a:masterClrMapping/>
+  </p:clrMapOvr>
+</p:sld>
+</file>
+
+<file path=ppt/slides/slide14.xml><?xml version="1.0" encoding="utf-8"?>
+<p:sld xmlns:a="http://schemas.openxmlformats.org/drawingml/2006/main" xmlns:p="http://schemas.openxmlformats.org/presentationml/2006/main" xmlns:r="http://schemas.openxmlformats.org/officeDocument/2006/relationships">
+  <p:cSld>
+    <p:bg>
+      <p:bgPr>
+        <a:solidFill>
+          <a:srgbClr val="1A2E4A"/>
+        </a:solidFill>
+        <a:effectLst/>
+      </p:bgPr>
+    </p:bg>
+    <p:spTree>
+      <p:nvGrpSpPr>
+        <p:cNvPr id="1" name=""/>
+        <p:cNvGrpSpPr/>
+        <p:nvPr/>
+      </p:nvGrpSpPr>
+      <p:grpSpPr/>
+      <p:sp>
+        <p:nvSpPr>
+          <p:cNvPr id="2" name="Rectangle 1"/>
+          <p:cNvSpPr/>
+          <p:nvPr/>
+        </p:nvSpPr>
+        <p:spPr>
+          <a:xfrm>
+            <a:off x="0" y="0"/>
+            <a:ext cx="411480" cy="6858000"/>
+          </a:xfrm>
+          <a:prstGeom prst="rect">
+            <a:avLst/>
+          </a:prstGeom>
+          <a:solidFill>
+            <a:srgbClr val="E85D04"/>
+          </a:solidFill>
+          <a:ln>
+            <a:noFill/>
+          </a:ln>
+        </p:spPr>
+        <p:style>
+          <a:lnRef idx="1">
+            <a:schemeClr val="accent1"/>
+          </a:lnRef>
+          <a:fillRef idx="3">
+            <a:schemeClr val="accent1"/>
+          </a:fillRef>
+          <a:effectRef idx="2">
+            <a:schemeClr val="accent1"/>
+          </a:effectRef>
+          <a:fontRef idx="minor">
+            <a:schemeClr val="lt1"/>
+          </a:fontRef>
+        </p:style>
+        <p:txBody>
+          <a:bodyPr rtlCol="0" anchor="ctr"/>
+          <a:lstStyle/>
+          <a:p>
+            <a:pPr algn="ctr"/>
+          </a:p>
+        </p:txBody>
+      </p:sp>
+      <p:sp>
+        <p:nvSpPr>
+          <p:cNvPr id="3" name="TextBox 2"/>
+          <p:cNvSpPr txBox="1"/>
+          <p:nvPr/>
+        </p:nvSpPr>
+        <p:spPr>
+          <a:xfrm>
+            <a:off x="914400" y="320040"/>
+            <a:ext cx="10058400" cy="640080"/>
+          </a:xfrm>
+          <a:prstGeom prst="rect">
+            <a:avLst/>
+          </a:prstGeom>
+          <a:noFill/>
+        </p:spPr>
+        <p:txBody>
+          <a:bodyPr wrap="square">
+            <a:spAutoFit/>
+          </a:bodyPr>
+          <a:lstStyle/>
+          <a:p>
+            <a:pPr algn="l"/>
+            <a:r>
+              <a:rPr sz="3000" b="1" i="0">
+                <a:solidFill>
+                  <a:srgbClr val="FFFFFF"/>
+                </a:solidFill>
+              </a:rPr>
+              <a:t>Human in the Loop – n8n Wait-Node</a:t>
+            </a:r>
+          </a:p>
+        </p:txBody>
+      </p:sp>
+      <p:sp>
+        <p:nvSpPr>
+          <p:cNvPr id="4" name="TextBox 3"/>
+          <p:cNvSpPr txBox="1"/>
+          <p:nvPr/>
+        </p:nvSpPr>
+        <p:spPr>
+          <a:xfrm>
+            <a:off x="914400" y="960120"/>
+            <a:ext cx="10058400" cy="411480"/>
+          </a:xfrm>
+          <a:prstGeom prst="rect">
+            <a:avLst/>
+          </a:prstGeom>
+          <a:noFill/>
+        </p:spPr>
+        <p:txBody>
+          <a:bodyPr wrap="square">
+            <a:spAutoFit/>
+          </a:bodyPr>
+          <a:lstStyle/>
+          <a:p>
+            <a:pPr algn="l"/>
+            <a:r>
+              <a:rPr sz="1500" b="0" i="0">
+                <a:solidFill>
+                  <a:srgbClr val="F4A261"/>
+                </a:solidFill>
+              </a:rPr>
+              <a:t>Workflow pausiert – Edgar entscheidet – Webhook setzt fort</a:t>
+            </a:r>
+          </a:p>
+        </p:txBody>
+      </p:sp>
+      <p:sp>
+        <p:nvSpPr>
+          <p:cNvPr id="5" name="Rectangle 4"/>
+          <p:cNvSpPr/>
+          <p:nvPr/>
+        </p:nvSpPr>
+        <p:spPr>
+          <a:xfrm>
+            <a:off x="822960" y="1508760"/>
+            <a:ext cx="1920240" cy="2743200"/>
+          </a:xfrm>
+          <a:prstGeom prst="rect">
+            <a:avLst/>
+          </a:prstGeom>
+          <a:solidFill>
+            <a:srgbClr val="1A3A6C"/>
+          </a:solidFill>
+          <a:ln>
+            <a:noFill/>
+          </a:ln>
+        </p:spPr>
+        <p:style>
+          <a:lnRef idx="1">
+            <a:schemeClr val="accent1"/>
+          </a:lnRef>
+          <a:fillRef idx="3">
+            <a:schemeClr val="accent1"/>
+          </a:fillRef>
+          <a:effectRef idx="2">
+            <a:schemeClr val="accent1"/>
+          </a:effectRef>
+          <a:fontRef idx="minor">
+            <a:schemeClr val="lt1"/>
+          </a:fontRef>
+        </p:style>
+        <p:txBody>
+          <a:bodyPr rtlCol="0" anchor="ctr"/>
+          <a:lstStyle/>
+          <a:p>
+            <a:pPr algn="ctr"/>
+          </a:p>
+        </p:txBody>
+      </p:sp>
+      <p:sp>
+        <p:nvSpPr>
+          <p:cNvPr id="6" name="TextBox 5"/>
+          <p:cNvSpPr txBox="1"/>
+          <p:nvPr/>
+        </p:nvSpPr>
+        <p:spPr>
+          <a:xfrm>
+            <a:off x="914400" y="1600200"/>
+            <a:ext cx="457200" cy="411480"/>
+          </a:xfrm>
+          <a:prstGeom prst="rect">
+            <a:avLst/>
+          </a:prstGeom>
+          <a:noFill/>
+        </p:spPr>
+        <p:txBody>
+          <a:bodyPr wrap="square">
+            <a:spAutoFit/>
+          </a:bodyPr>
+          <a:lstStyle/>
+          <a:p>
+            <a:pPr algn="l"/>
+            <a:r>
+              <a:rPr sz="1800" b="1" i="0">
+                <a:solidFill>
+                  <a:srgbClr val="E85D04"/>
+                </a:solidFill>
+              </a:rPr>
+              <a:t>1</a:t>
+            </a:r>
+          </a:p>
+        </p:txBody>
+      </p:sp>
+      <p:sp>
+        <p:nvSpPr>
+          <p:cNvPr id="7" name="TextBox 6"/>
+          <p:cNvSpPr txBox="1"/>
+          <p:nvPr/>
+        </p:nvSpPr>
+        <p:spPr>
+          <a:xfrm>
+            <a:off x="914400" y="2057400"/>
+            <a:ext cx="1737360" cy="640080"/>
+          </a:xfrm>
+          <a:prstGeom prst="rect">
+            <a:avLst/>
+          </a:prstGeom>
+          <a:noFill/>
+        </p:spPr>
+        <p:txBody>
+          <a:bodyPr wrap="square">
+            <a:spAutoFit/>
+          </a:bodyPr>
+          <a:lstStyle/>
+          <a:p>
+            <a:pPr algn="l"/>
+            <a:r>
+              <a:rPr sz="1400" b="1" i="0">
+                <a:solidFill>
+                  <a:srgbClr val="FFFFFF"/>
+                </a:solidFill>
+              </a:rPr>
+              <a:t>Offerte
+fertig</a:t>
+            </a:r>
+          </a:p>
+        </p:txBody>
+      </p:sp>
+      <p:sp>
+        <p:nvSpPr>
+          <p:cNvPr id="8" name="TextBox 7"/>
+          <p:cNvSpPr txBox="1"/>
+          <p:nvPr/>
+        </p:nvSpPr>
+        <p:spPr>
+          <a:xfrm>
+            <a:off x="914400" y="2743200"/>
+            <a:ext cx="1737360" cy="1280160"/>
+          </a:xfrm>
+          <a:prstGeom prst="rect">
+            <a:avLst/>
+          </a:prstGeom>
+          <a:noFill/>
+        </p:spPr>
+        <p:txBody>
+          <a:bodyPr wrap="square">
+            <a:spAutoFit/>
+          </a:bodyPr>
+          <a:lstStyle/>
+          <a:p>
+            <a:pPr algn="l"/>
+            <a:r>
+              <a:rPr sz="1200" b="0" i="0">
+                <a:solidFill>
+                  <a:srgbClr val="B0C4DE"/>
+                </a:solidFill>
+              </a:rPr>
+              <a:t>Google Docs
+generiert</a:t>
+            </a:r>
+          </a:p>
+        </p:txBody>
+      </p:sp>
+      <p:sp>
+        <p:nvSpPr>
+          <p:cNvPr id="9" name="TextBox 8"/>
+          <p:cNvSpPr txBox="1"/>
+          <p:nvPr/>
+        </p:nvSpPr>
+        <p:spPr>
+          <a:xfrm>
+            <a:off x="2743200" y="2606040"/>
+            <a:ext cx="228600" cy="457200"/>
+          </a:xfrm>
+          <a:prstGeom prst="rect">
+            <a:avLst/>
+          </a:prstGeom>
+          <a:noFill/>
+        </p:spPr>
+        <p:txBody>
+          <a:bodyPr wrap="square">
+            <a:spAutoFit/>
+          </a:bodyPr>
+          <a:lstStyle/>
+          <a:p>
+            <a:pPr algn="ctr"/>
+            <a:r>
+              <a:rPr sz="1800" b="1" i="0">
+                <a:solidFill>
+                  <a:srgbClr val="E85D04"/>
+                </a:solidFill>
+              </a:rPr>
+              <a:t>→</a:t>
+            </a:r>
+          </a:p>
+        </p:txBody>
+      </p:sp>
+      <p:sp>
+        <p:nvSpPr>
+          <p:cNvPr id="10" name="Rectangle 9"/>
+          <p:cNvSpPr/>
+          <p:nvPr/>
+        </p:nvSpPr>
+        <p:spPr>
+          <a:xfrm>
+            <a:off x="2944368" y="1508760"/>
+            <a:ext cx="1920240" cy="2743200"/>
+          </a:xfrm>
+          <a:prstGeom prst="rect">
+            <a:avLst/>
+          </a:prstGeom>
+          <a:solidFill>
+            <a:srgbClr val="2B4C7E"/>
+          </a:solidFill>
+          <a:ln>
+            <a:noFill/>
+          </a:ln>
+        </p:spPr>
+        <p:style>
+          <a:lnRef idx="1">
+            <a:schemeClr val="accent1"/>
+          </a:lnRef>
+          <a:fillRef idx="3">
+            <a:schemeClr val="accent1"/>
+          </a:fillRef>
+          <a:effectRef idx="2">
+            <a:schemeClr val="accent1"/>
+          </a:effectRef>
+          <a:fontRef idx="minor">
+            <a:schemeClr val="lt1"/>
+          </a:fontRef>
+        </p:style>
+        <p:txBody>
+          <a:bodyPr rtlCol="0" anchor="ctr"/>
+          <a:lstStyle/>
+          <a:p>
+            <a:pPr algn="ctr"/>
+          </a:p>
+        </p:txBody>
+      </p:sp>
+      <p:sp>
+        <p:nvSpPr>
+          <p:cNvPr id="11" name="TextBox 10"/>
+          <p:cNvSpPr txBox="1"/>
+          <p:nvPr/>
+        </p:nvSpPr>
+        <p:spPr>
+          <a:xfrm>
+            <a:off x="3035808" y="1600200"/>
+            <a:ext cx="457200" cy="411480"/>
+          </a:xfrm>
+          <a:prstGeom prst="rect">
+            <a:avLst/>
+          </a:prstGeom>
+          <a:noFill/>
+        </p:spPr>
+        <p:txBody>
+          <a:bodyPr wrap="square">
+            <a:spAutoFit/>
+          </a:bodyPr>
+          <a:lstStyle/>
+          <a:p>
+            <a:pPr algn="l"/>
+            <a:r>
+              <a:rPr sz="1800" b="1" i="0">
+                <a:solidFill>
+                  <a:srgbClr val="E85D04"/>
+                </a:solidFill>
+              </a:rPr>
+              <a:t>2</a:t>
+            </a:r>
+          </a:p>
+        </p:txBody>
+      </p:sp>
+      <p:sp>
+        <p:nvSpPr>
+          <p:cNvPr id="12" name="TextBox 11"/>
+          <p:cNvSpPr txBox="1"/>
+          <p:nvPr/>
+        </p:nvSpPr>
+        <p:spPr>
+          <a:xfrm>
+            <a:off x="3035808" y="2057400"/>
+            <a:ext cx="1737360" cy="640080"/>
+          </a:xfrm>
+          <a:prstGeom prst="rect">
+            <a:avLst/>
+          </a:prstGeom>
+          <a:noFill/>
+        </p:spPr>
+        <p:txBody>
+          <a:bodyPr wrap="square">
+            <a:spAutoFit/>
+          </a:bodyPr>
+          <a:lstStyle/>
+          <a:p>
+            <a:pPr algn="l"/>
+            <a:r>
+              <a:rPr sz="1400" b="1" i="0">
+                <a:solidFill>
+                  <a:srgbClr val="FFFFFF"/>
+                </a:solidFill>
+              </a:rPr>
+              <a:t>E-Mail
+an Edgar</a:t>
+            </a:r>
+          </a:p>
+        </p:txBody>
+      </p:sp>
+      <p:sp>
+        <p:nvSpPr>
+          <p:cNvPr id="13" name="TextBox 12"/>
+          <p:cNvSpPr txBox="1"/>
+          <p:nvPr/>
+        </p:nvSpPr>
+        <p:spPr>
+          <a:xfrm>
+            <a:off x="3035808" y="2743200"/>
+            <a:ext cx="1737360" cy="1280160"/>
+          </a:xfrm>
+          <a:prstGeom prst="rect">
+            <a:avLst/>
+          </a:prstGeom>
+          <a:noFill/>
+        </p:spPr>
+        <p:txBody>
+          <a:bodyPr wrap="square">
+            <a:spAutoFit/>
+          </a:bodyPr>
+          <a:lstStyle/>
+          <a:p>
+            <a:pPr algn="l"/>
+            <a:r>
+              <a:rPr sz="1200" b="0" i="0">
+                <a:solidFill>
+                  <a:srgbClr val="B0C4DE"/>
+                </a:solidFill>
+              </a:rPr>
+              <a:t>Offerte-Link +
+Approve/Reject</a:t>
+            </a:r>
+          </a:p>
+        </p:txBody>
+      </p:sp>
+      <p:sp>
+        <p:nvSpPr>
+          <p:cNvPr id="14" name="TextBox 13"/>
+          <p:cNvSpPr txBox="1"/>
+          <p:nvPr/>
+        </p:nvSpPr>
+        <p:spPr>
+          <a:xfrm>
+            <a:off x="4864608" y="2606040"/>
+            <a:ext cx="228600" cy="457200"/>
+          </a:xfrm>
+          <a:prstGeom prst="rect">
+            <a:avLst/>
+          </a:prstGeom>
+          <a:noFill/>
+        </p:spPr>
+        <p:txBody>
+          <a:bodyPr wrap="square">
+            <a:spAutoFit/>
+          </a:bodyPr>
+          <a:lstStyle/>
+          <a:p>
+            <a:pPr algn="ctr"/>
+            <a:r>
+              <a:rPr sz="1800" b="1" i="0">
+                <a:solidFill>
+                  <a:srgbClr val="E85D04"/>
+                </a:solidFill>
+              </a:rPr>
+              <a:t>→</a:t>
+            </a:r>
+          </a:p>
+        </p:txBody>
+      </p:sp>
+      <p:sp>
+        <p:nvSpPr>
+          <p:cNvPr id="15" name="Rectangle 14"/>
+          <p:cNvSpPr/>
+          <p:nvPr/>
+        </p:nvSpPr>
+        <p:spPr>
+          <a:xfrm>
+            <a:off x="5065776" y="1508760"/>
+            <a:ext cx="1920240" cy="2743200"/>
+          </a:xfrm>
+          <a:prstGeom prst="rect">
+            <a:avLst/>
+          </a:prstGeom>
+          <a:solidFill>
+            <a:srgbClr val="5C206A"/>
+          </a:solidFill>
+          <a:ln>
+            <a:noFill/>
+          </a:ln>
+        </p:spPr>
+        <p:style>
+          <a:lnRef idx="1">
+            <a:schemeClr val="accent1"/>
+          </a:lnRef>
+          <a:fillRef idx="3">
+            <a:schemeClr val="accent1"/>
+          </a:fillRef>
+          <a:effectRef idx="2">
+            <a:schemeClr val="accent1"/>
+          </a:effectRef>
+          <a:fontRef idx="minor">
+            <a:schemeClr val="lt1"/>
+          </a:fontRef>
+        </p:style>
+        <p:txBody>
+          <a:bodyPr rtlCol="0" anchor="ctr"/>
+          <a:lstStyle/>
+          <a:p>
+            <a:pPr algn="ctr"/>
+          </a:p>
+        </p:txBody>
+      </p:sp>
+      <p:sp>
+        <p:nvSpPr>
+          <p:cNvPr id="16" name="TextBox 15"/>
+          <p:cNvSpPr txBox="1"/>
+          <p:nvPr/>
+        </p:nvSpPr>
+        <p:spPr>
+          <a:xfrm>
+            <a:off x="5157216" y="1600200"/>
+            <a:ext cx="457200" cy="411480"/>
+          </a:xfrm>
+          <a:prstGeom prst="rect">
+            <a:avLst/>
+          </a:prstGeom>
+          <a:noFill/>
+        </p:spPr>
+        <p:txBody>
+          <a:bodyPr wrap="square">
+            <a:spAutoFit/>
+          </a:bodyPr>
+          <a:lstStyle/>
+          <a:p>
+            <a:pPr algn="l"/>
+            <a:r>
+              <a:rPr sz="1800" b="1" i="0">
+                <a:solidFill>
+                  <a:srgbClr val="E85D04"/>
+                </a:solidFill>
+              </a:rPr>
+              <a:t>3</a:t>
+            </a:r>
+          </a:p>
+        </p:txBody>
+      </p:sp>
+      <p:sp>
+        <p:nvSpPr>
+          <p:cNvPr id="17" name="TextBox 16"/>
+          <p:cNvSpPr txBox="1"/>
+          <p:nvPr/>
+        </p:nvSpPr>
+        <p:spPr>
+          <a:xfrm>
+            <a:off x="5157216" y="2057400"/>
+            <a:ext cx="1737360" cy="640080"/>
+          </a:xfrm>
+          <a:prstGeom prst="rect">
+            <a:avLst/>
+          </a:prstGeom>
+          <a:noFill/>
+        </p:spPr>
+        <p:txBody>
+          <a:bodyPr wrap="square">
+            <a:spAutoFit/>
+          </a:bodyPr>
+          <a:lstStyle/>
+          <a:p>
+            <a:pPr algn="l"/>
+            <a:r>
+              <a:rPr sz="1400" b="1" i="0">
+                <a:solidFill>
+                  <a:srgbClr val="FFFFFF"/>
+                </a:solidFill>
+              </a:rPr>
+              <a:t>Wait-Node
+pausiert</a:t>
+            </a:r>
+          </a:p>
+        </p:txBody>
+      </p:sp>
+      <p:sp>
+        <p:nvSpPr>
+          <p:cNvPr id="18" name="TextBox 17"/>
+          <p:cNvSpPr txBox="1"/>
+          <p:nvPr/>
+        </p:nvSpPr>
+        <p:spPr>
+          <a:xfrm>
+            <a:off x="5157216" y="2743200"/>
+            <a:ext cx="1737360" cy="1280160"/>
+          </a:xfrm>
+          <a:prstGeom prst="rect">
+            <a:avLst/>
+          </a:prstGeom>
+          <a:noFill/>
+        </p:spPr>
+        <p:txBody>
+          <a:bodyPr wrap="square">
+            <a:spAutoFit/>
+          </a:bodyPr>
+          <a:lstStyle/>
+          <a:p>
+            <a:pPr algn="l"/>
+            <a:r>
+              <a:rPr sz="1200" b="0" i="0">
+                <a:solidFill>
+                  <a:srgbClr val="B0C4DE"/>
+                </a:solidFill>
+              </a:rPr>
+              <a:t>Wartet auf
+Webhook-Klick</a:t>
+            </a:r>
+          </a:p>
+        </p:txBody>
+      </p:sp>
+      <p:sp>
+        <p:nvSpPr>
+          <p:cNvPr id="19" name="TextBox 18"/>
+          <p:cNvSpPr txBox="1"/>
+          <p:nvPr/>
+        </p:nvSpPr>
+        <p:spPr>
+          <a:xfrm>
+            <a:off x="6986016" y="2606040"/>
+            <a:ext cx="228600" cy="457200"/>
+          </a:xfrm>
+          <a:prstGeom prst="rect">
+            <a:avLst/>
+          </a:prstGeom>
+          <a:noFill/>
+        </p:spPr>
+        <p:txBody>
+          <a:bodyPr wrap="square">
+            <a:spAutoFit/>
+          </a:bodyPr>
+          <a:lstStyle/>
+          <a:p>
+            <a:pPr algn="ctr"/>
+            <a:r>
+              <a:rPr sz="1800" b="1" i="0">
+                <a:solidFill>
+                  <a:srgbClr val="E85D04"/>
+                </a:solidFill>
+              </a:rPr>
+              <a:t>→</a:t>
+            </a:r>
+          </a:p>
+        </p:txBody>
+      </p:sp>
+      <p:sp>
+        <p:nvSpPr>
+          <p:cNvPr id="20" name="Rectangle 19"/>
+          <p:cNvSpPr/>
+          <p:nvPr/>
+        </p:nvSpPr>
+        <p:spPr>
+          <a:xfrm>
+            <a:off x="7187184" y="1508760"/>
+            <a:ext cx="1920240" cy="2743200"/>
+          </a:xfrm>
+          <a:prstGeom prst="rect">
+            <a:avLst/>
+          </a:prstGeom>
+          <a:solidFill>
+            <a:srgbClr val="1A533A"/>
+          </a:solidFill>
+          <a:ln>
+            <a:noFill/>
+          </a:ln>
+        </p:spPr>
+        <p:style>
+          <a:lnRef idx="1">
+            <a:schemeClr val="accent1"/>
+          </a:lnRef>
+          <a:fillRef idx="3">
+            <a:schemeClr val="accent1"/>
+          </a:fillRef>
+          <a:effectRef idx="2">
+            <a:schemeClr val="accent1"/>
+          </a:effectRef>
+          <a:fontRef idx="minor">
+            <a:schemeClr val="lt1"/>
+          </a:fontRef>
+        </p:style>
+        <p:txBody>
+          <a:bodyPr rtlCol="0" anchor="ctr"/>
+          <a:lstStyle/>
+          <a:p>
+            <a:pPr algn="ctr"/>
+          </a:p>
+        </p:txBody>
+      </p:sp>
+      <p:sp>
+        <p:nvSpPr>
+          <p:cNvPr id="21" name="TextBox 20"/>
+          <p:cNvSpPr txBox="1"/>
+          <p:nvPr/>
+        </p:nvSpPr>
+        <p:spPr>
+          <a:xfrm>
+            <a:off x="7278624" y="1600200"/>
+            <a:ext cx="457200" cy="411480"/>
+          </a:xfrm>
+          <a:prstGeom prst="rect">
+            <a:avLst/>
+          </a:prstGeom>
+          <a:noFill/>
+        </p:spPr>
+        <p:txBody>
+          <a:bodyPr wrap="square">
+            <a:spAutoFit/>
+          </a:bodyPr>
+          <a:lstStyle/>
+          <a:p>
+            <a:pPr algn="l"/>
+            <a:r>
+              <a:rPr sz="1800" b="1" i="0">
+                <a:solidFill>
+                  <a:srgbClr val="E85D04"/>
+                </a:solidFill>
+              </a:rPr>
+              <a:t>4</a:t>
+            </a:r>
+          </a:p>
+        </p:txBody>
+      </p:sp>
+      <p:sp>
+        <p:nvSpPr>
+          <p:cNvPr id="22" name="TextBox 21"/>
+          <p:cNvSpPr txBox="1"/>
+          <p:nvPr/>
+        </p:nvSpPr>
+        <p:spPr>
+          <a:xfrm>
+            <a:off x="7278624" y="2057400"/>
+            <a:ext cx="1737360" cy="640080"/>
+          </a:xfrm>
+          <a:prstGeom prst="rect">
+            <a:avLst/>
+          </a:prstGeom>
+          <a:noFill/>
+        </p:spPr>
+        <p:txBody>
+          <a:bodyPr wrap="square">
+            <a:spAutoFit/>
+          </a:bodyPr>
+          <a:lstStyle/>
+          <a:p>
+            <a:pPr algn="l"/>
+            <a:r>
+              <a:rPr sz="1400" b="1" i="0">
+                <a:solidFill>
+                  <a:srgbClr val="FFFFFF"/>
+                </a:solidFill>
+              </a:rPr>
+              <a:t>Edgar
+klickt Link</a:t>
+            </a:r>
+          </a:p>
+        </p:txBody>
+      </p:sp>
+      <p:sp>
+        <p:nvSpPr>
+          <p:cNvPr id="23" name="TextBox 22"/>
+          <p:cNvSpPr txBox="1"/>
+          <p:nvPr/>
+        </p:nvSpPr>
+        <p:spPr>
+          <a:xfrm>
+            <a:off x="7278624" y="2743200"/>
+            <a:ext cx="1737360" cy="1280160"/>
+          </a:xfrm>
+          <a:prstGeom prst="rect">
+            <a:avLst/>
+          </a:prstGeom>
+          <a:noFill/>
+        </p:spPr>
+        <p:txBody>
+          <a:bodyPr wrap="square">
+            <a:spAutoFit/>
+          </a:bodyPr>
+          <a:lstStyle/>
+          <a:p>
+            <a:pPr algn="l"/>
+            <a:r>
+              <a:rPr sz="1200" b="0" i="0">
+                <a:solidFill>
+                  <a:srgbClr val="B0C4DE"/>
+                </a:solidFill>
+              </a:rPr>
+              <a:t>?approved=true
+oder false</a:t>
+            </a:r>
+          </a:p>
+        </p:txBody>
+      </p:sp>
+      <p:sp>
+        <p:nvSpPr>
+          <p:cNvPr id="24" name="TextBox 23"/>
+          <p:cNvSpPr txBox="1"/>
+          <p:nvPr/>
+        </p:nvSpPr>
+        <p:spPr>
+          <a:xfrm>
+            <a:off x="9107424" y="2606040"/>
+            <a:ext cx="228600" cy="457200"/>
+          </a:xfrm>
+          <a:prstGeom prst="rect">
+            <a:avLst/>
+          </a:prstGeom>
+          <a:noFill/>
+        </p:spPr>
+        <p:txBody>
+          <a:bodyPr wrap="square">
+            <a:spAutoFit/>
+          </a:bodyPr>
+          <a:lstStyle/>
+          <a:p>
+            <a:pPr algn="ctr"/>
+            <a:r>
+              <a:rPr sz="1800" b="1" i="0">
+                <a:solidFill>
+                  <a:srgbClr val="E85D04"/>
+                </a:solidFill>
+              </a:rPr>
+              <a:t>→</a:t>
+            </a:r>
+          </a:p>
+        </p:txBody>
+      </p:sp>
+      <p:sp>
+        <p:nvSpPr>
+          <p:cNvPr id="25" name="Rectangle 24"/>
+          <p:cNvSpPr/>
+          <p:nvPr/>
+        </p:nvSpPr>
+        <p:spPr>
+          <a:xfrm>
+            <a:off x="9308592" y="1508760"/>
+            <a:ext cx="1920240" cy="2743200"/>
+          </a:xfrm>
+          <a:prstGeom prst="rect">
+            <a:avLst/>
+          </a:prstGeom>
+          <a:solidFill>
+            <a:srgbClr val="1A533A"/>
+          </a:solidFill>
+          <a:ln>
+            <a:noFill/>
+          </a:ln>
+        </p:spPr>
+        <p:style>
+          <a:lnRef idx="1">
+            <a:schemeClr val="accent1"/>
+          </a:lnRef>
+          <a:fillRef idx="3">
+            <a:schemeClr val="accent1"/>
+          </a:fillRef>
+          <a:effectRef idx="2">
+            <a:schemeClr val="accent1"/>
+          </a:effectRef>
+          <a:fontRef idx="minor">
+            <a:schemeClr val="lt1"/>
+          </a:fontRef>
+        </p:style>
+        <p:txBody>
+          <a:bodyPr rtlCol="0" anchor="ctr"/>
+          <a:lstStyle/>
+          <a:p>
+            <a:pPr algn="ctr"/>
+          </a:p>
+        </p:txBody>
+      </p:sp>
+      <p:sp>
+        <p:nvSpPr>
+          <p:cNvPr id="26" name="TextBox 25"/>
+          <p:cNvSpPr txBox="1"/>
+          <p:nvPr/>
+        </p:nvSpPr>
+        <p:spPr>
+          <a:xfrm>
+            <a:off x="9400032" y="1600200"/>
+            <a:ext cx="457200" cy="411480"/>
+          </a:xfrm>
+          <a:prstGeom prst="rect">
+            <a:avLst/>
+          </a:prstGeom>
+          <a:noFill/>
+        </p:spPr>
+        <p:txBody>
+          <a:bodyPr wrap="square">
+            <a:spAutoFit/>
+          </a:bodyPr>
+          <a:lstStyle/>
+          <a:p>
+            <a:pPr algn="l"/>
+            <a:r>
+              <a:rPr sz="1800" b="1" i="0">
+                <a:solidFill>
+                  <a:srgbClr val="E85D04"/>
+                </a:solidFill>
+              </a:rPr>
+              <a:t>5</a:t>
+            </a:r>
+          </a:p>
+        </p:txBody>
+      </p:sp>
+      <p:sp>
+        <p:nvSpPr>
+          <p:cNvPr id="27" name="TextBox 26"/>
+          <p:cNvSpPr txBox="1"/>
+          <p:nvPr/>
+        </p:nvSpPr>
+        <p:spPr>
+          <a:xfrm>
+            <a:off x="9400032" y="2057400"/>
+            <a:ext cx="1737360" cy="640080"/>
+          </a:xfrm>
+          <a:prstGeom prst="rect">
+            <a:avLst/>
+          </a:prstGeom>
+          <a:noFill/>
+        </p:spPr>
+        <p:txBody>
+          <a:bodyPr wrap="square">
+            <a:spAutoFit/>
+          </a:bodyPr>
+          <a:lstStyle/>
+          <a:p>
+            <a:pPr algn="l"/>
+            <a:r>
+              <a:rPr sz="1400" b="1" i="0">
+                <a:solidFill>
+                  <a:srgbClr val="FFFFFF"/>
+                </a:solidFill>
+              </a:rPr>
+              <a:t>IF-Node
+entscheidet</a:t>
+            </a:r>
+          </a:p>
+        </p:txBody>
+      </p:sp>
+      <p:sp>
+        <p:nvSpPr>
+          <p:cNvPr id="28" name="TextBox 27"/>
+          <p:cNvSpPr txBox="1"/>
+          <p:nvPr/>
+        </p:nvSpPr>
+        <p:spPr>
+          <a:xfrm>
+            <a:off x="9400032" y="2743200"/>
+            <a:ext cx="1737360" cy="1280160"/>
+          </a:xfrm>
+          <a:prstGeom prst="rect">
+            <a:avLst/>
+          </a:prstGeom>
+          <a:noFill/>
+        </p:spPr>
+        <p:txBody>
+          <a:bodyPr wrap="square">
+            <a:spAutoFit/>
+          </a:bodyPr>
+          <a:lstStyle/>
+          <a:p>
+            <a:pPr algn="l"/>
+            <a:r>
+              <a:rPr sz="1200" b="0" i="0">
+                <a:solidFill>
+                  <a:srgbClr val="B0C4DE"/>
+                </a:solidFill>
+              </a:rPr>
+              <a:t>true → Versand
+false → Absage</a:t>
+            </a:r>
+          </a:p>
+        </p:txBody>
+      </p:sp>
+      <p:sp>
+        <p:nvSpPr>
+          <p:cNvPr id="29" name="Rectangle 28"/>
+          <p:cNvSpPr/>
+          <p:nvPr/>
+        </p:nvSpPr>
+        <p:spPr>
+          <a:xfrm>
+            <a:off x="914400" y="4434840"/>
+            <a:ext cx="10149840" cy="1097280"/>
+          </a:xfrm>
+          <a:prstGeom prst="rect">
+            <a:avLst/>
+          </a:prstGeom>
+          <a:solidFill>
+            <a:srgbClr val="0D1F33"/>
+          </a:solidFill>
+          <a:ln>
+            <a:noFill/>
+          </a:ln>
+        </p:spPr>
+        <p:style>
+          <a:lnRef idx="1">
+            <a:schemeClr val="accent1"/>
+          </a:lnRef>
+          <a:fillRef idx="3">
+            <a:schemeClr val="accent1"/>
+          </a:fillRef>
+          <a:effectRef idx="2">
+            <a:schemeClr val="accent1"/>
+          </a:effectRef>
+          <a:fontRef idx="minor">
+            <a:schemeClr val="lt1"/>
+          </a:fontRef>
+        </p:style>
+        <p:txBody>
+          <a:bodyPr rtlCol="0" anchor="ctr"/>
+          <a:lstStyle/>
+          <a:p>
+            <a:pPr algn="ctr"/>
+          </a:p>
+        </p:txBody>
+      </p:sp>
+      <p:sp>
+        <p:nvSpPr>
+          <p:cNvPr id="30" name="TextBox 29"/>
+          <p:cNvSpPr txBox="1"/>
+          <p:nvPr/>
+        </p:nvSpPr>
+        <p:spPr>
+          <a:xfrm>
+            <a:off x="1097280" y="4526280"/>
+            <a:ext cx="1828800" cy="320040"/>
+          </a:xfrm>
+          <a:prstGeom prst="rect">
+            <a:avLst/>
+          </a:prstGeom>
+          <a:noFill/>
+        </p:spPr>
+        <p:txBody>
+          <a:bodyPr wrap="square">
+            <a:spAutoFit/>
+          </a:bodyPr>
+          <a:lstStyle/>
+          <a:p>
+            <a:pPr algn="l"/>
+            <a:r>
+              <a:rPr sz="1200" b="1" i="0">
+                <a:solidFill>
+                  <a:srgbClr val="E85D04"/>
+                </a:solidFill>
+              </a:rPr>
+              <a:t>Approve-Link:</a:t>
+            </a:r>
+          </a:p>
+        </p:txBody>
+      </p:sp>
+      <p:sp>
+        <p:nvSpPr>
+          <p:cNvPr id="31" name="TextBox 30"/>
+          <p:cNvSpPr txBox="1"/>
+          <p:nvPr/>
+        </p:nvSpPr>
+        <p:spPr>
+          <a:xfrm>
+            <a:off x="3017520" y="4526280"/>
+            <a:ext cx="7772400" cy="320040"/>
+          </a:xfrm>
+          <a:prstGeom prst="rect">
+            <a:avLst/>
+          </a:prstGeom>
+          <a:noFill/>
+        </p:spPr>
+        <p:txBody>
+          <a:bodyPr wrap="square">
+            <a:spAutoFit/>
+          </a:bodyPr>
+          <a:lstStyle/>
+          <a:p>
+            <a:pPr algn="l"/>
+            <a:r>
+              <a:rPr sz="1200" b="0" i="0">
+                <a:solidFill>
+                  <a:srgbClr val="90E0B8"/>
+                </a:solidFill>
+              </a:rPr>
+              <a:t>{{ $execution.resumeUrl }}?approved=true</a:t>
+            </a:r>
+          </a:p>
+        </p:txBody>
+      </p:sp>
+      <p:sp>
+        <p:nvSpPr>
+          <p:cNvPr id="32" name="TextBox 31"/>
+          <p:cNvSpPr txBox="1"/>
+          <p:nvPr/>
+        </p:nvSpPr>
+        <p:spPr>
+          <a:xfrm>
+            <a:off x="1097280" y="4983480"/>
+            <a:ext cx="1828800" cy="320040"/>
+          </a:xfrm>
+          <a:prstGeom prst="rect">
+            <a:avLst/>
+          </a:prstGeom>
+          <a:noFill/>
+        </p:spPr>
+        <p:txBody>
+          <a:bodyPr wrap="square">
+            <a:spAutoFit/>
+          </a:bodyPr>
+          <a:lstStyle/>
+          <a:p>
+            <a:pPr algn="l"/>
+            <a:r>
+              <a:rPr sz="1200" b="1" i="0">
+                <a:solidFill>
+                  <a:srgbClr val="FF7A5A"/>
+                </a:solidFill>
+              </a:rPr>
+              <a:t>Reject-Link:</a:t>
+            </a:r>
+          </a:p>
+        </p:txBody>
+      </p:sp>
+      <p:sp>
+        <p:nvSpPr>
+          <p:cNvPr id="33" name="TextBox 32"/>
+          <p:cNvSpPr txBox="1"/>
+          <p:nvPr/>
+        </p:nvSpPr>
+        <p:spPr>
+          <a:xfrm>
+            <a:off x="3017520" y="4983480"/>
+            <a:ext cx="7772400" cy="320040"/>
+          </a:xfrm>
+          <a:prstGeom prst="rect">
+            <a:avLst/>
+          </a:prstGeom>
+          <a:noFill/>
+        </p:spPr>
+        <p:txBody>
+          <a:bodyPr wrap="square">
+            <a:spAutoFit/>
+          </a:bodyPr>
+          <a:lstStyle/>
+          <a:p>
+            <a:pPr algn="l"/>
+            <a:r>
+              <a:rPr sz="1200" b="0" i="0">
+                <a:solidFill>
+                  <a:srgbClr val="FFBBAA"/>
+                </a:solidFill>
+              </a:rPr>
+              <a:t>{{ $execution.resumeUrl }}?approved=false</a:t>
+            </a:r>
+          </a:p>
+        </p:txBody>
+      </p:sp>
+      <p:sp>
+        <p:nvSpPr>
+          <p:cNvPr id="34" name="Rectangle 33"/>
+          <p:cNvSpPr/>
+          <p:nvPr/>
+        </p:nvSpPr>
+        <p:spPr>
+          <a:xfrm>
+            <a:off x="914400" y="5669280"/>
+            <a:ext cx="10149840" cy="914400"/>
+          </a:xfrm>
+          <a:prstGeom prst="rect">
+            <a:avLst/>
+          </a:prstGeom>
+          <a:solidFill>
+            <a:srgbClr val="1A2A45"/>
+          </a:solidFill>
+          <a:ln>
+            <a:noFill/>
+          </a:ln>
+        </p:spPr>
+        <p:style>
+          <a:lnRef idx="1">
+            <a:schemeClr val="accent1"/>
+          </a:lnRef>
+          <a:fillRef idx="3">
+            <a:schemeClr val="accent1"/>
+          </a:fillRef>
+          <a:effectRef idx="2">
+            <a:schemeClr val="accent1"/>
+          </a:effectRef>
+          <a:fontRef idx="minor">
+            <a:schemeClr val="lt1"/>
+          </a:fontRef>
+        </p:style>
+        <p:txBody>
+          <a:bodyPr rtlCol="0" anchor="ctr"/>
+          <a:lstStyle/>
+          <a:p>
+            <a:pPr algn="ctr"/>
+          </a:p>
+        </p:txBody>
+      </p:sp>
+      <p:sp>
+        <p:nvSpPr>
+          <p:cNvPr id="35" name="TextBox 34"/>
+          <p:cNvSpPr txBox="1"/>
+          <p:nvPr/>
+        </p:nvSpPr>
+        <p:spPr>
+          <a:xfrm>
+            <a:off x="1097280" y="5760720"/>
+            <a:ext cx="2286000" cy="320040"/>
+          </a:xfrm>
+          <a:prstGeom prst="rect">
+            <a:avLst/>
+          </a:prstGeom>
+          <a:noFill/>
+        </p:spPr>
+        <p:txBody>
+          <a:bodyPr wrap="square">
+            <a:spAutoFit/>
+          </a:bodyPr>
+          <a:lstStyle/>
+          <a:p>
+            <a:pPr algn="l"/>
+            <a:r>
+              <a:rPr sz="1200" b="1" i="0">
+                <a:solidFill>
+                  <a:srgbClr val="F4A261"/>
+                </a:solidFill>
+              </a:rPr>
+              <a:t>⏰  Timeout-Logik:</a:t>
+            </a:r>
+          </a:p>
+        </p:txBody>
+      </p:sp>
+      <p:sp>
+        <p:nvSpPr>
+          <p:cNvPr id="36" name="TextBox 35"/>
+          <p:cNvSpPr txBox="1"/>
+          <p:nvPr/>
+        </p:nvSpPr>
+        <p:spPr>
+          <a:xfrm>
+            <a:off x="3474720" y="5760720"/>
+            <a:ext cx="7315200" cy="320040"/>
+          </a:xfrm>
+          <a:prstGeom prst="rect">
+            <a:avLst/>
+          </a:prstGeom>
+          <a:noFill/>
+        </p:spPr>
+        <p:txBody>
+          <a:bodyPr wrap="square">
+            <a:spAutoFit/>
+          </a:bodyPr>
+          <a:lstStyle/>
+          <a:p>
+            <a:pPr algn="l"/>
+            <a:r>
+              <a:rPr sz="1200" b="0" i="0">
+                <a:solidFill>
+                  <a:srgbClr val="F4A261"/>
+                </a:solidFill>
+              </a:rPr>
+              <a:t>72h kein Klick → Reminder-Mail an Edgar  →  48h  →  Auftrag automatisch archiviert</a:t>
+            </a:r>
+          </a:p>
+        </p:txBody>
+      </p:sp>
+      <p:sp>
+        <p:nvSpPr>
+          <p:cNvPr id="37" name="TextBox 36"/>
+          <p:cNvSpPr txBox="1"/>
+          <p:nvPr/>
+        </p:nvSpPr>
+        <p:spPr>
+          <a:xfrm>
+            <a:off x="1097280" y="6144768"/>
+            <a:ext cx="9784080" cy="320040"/>
+          </a:xfrm>
+          <a:prstGeom prst="rect">
+            <a:avLst/>
+          </a:prstGeom>
+          <a:noFill/>
+        </p:spPr>
+        <p:txBody>
+          <a:bodyPr wrap="square">
+            <a:spAutoFit/>
+          </a:bodyPr>
+          <a:lstStyle/>
+          <a:p>
+            <a:pPr algn="l"/>
+            <a:r>
+              <a:rPr sz="1100" b="0" i="1">
+                <a:solidFill>
+                  <a:srgbClr val="55657A"/>
+                </a:solidFill>
+              </a:rPr>
+              <a:t>Execution-ID in URL = Sicherheitstoken – kein unauthorized Trigger möglich</a:t>
+            </a:r>
+          </a:p>
+        </p:txBody>
+      </p:sp>
+    </p:spTree>
+  </p:cSld>
+  <p:clrMapOvr>
+    <a:masterClrMapping/>
+  </p:clrMapOvr>
+</p:sld>
+</file>
+
+<file path=ppt/slides/slide15.xml><?xml version="1.0" encoding="utf-8"?>
+<p:sld xmlns:a="http://schemas.openxmlformats.org/drawingml/2006/main" xmlns:p="http://schemas.openxmlformats.org/presentationml/2006/main" xmlns:r="http://schemas.openxmlformats.org/officeDocument/2006/relationships">
+  <p:cSld>
+    <p:bg>
+      <p:bgPr>
+        <a:solidFill>
+          <a:srgbClr val="1A2E4A"/>
+        </a:solidFill>
+        <a:effectLst/>
+      </p:bgPr>
+    </p:bg>
+    <p:spTree>
+      <p:nvGrpSpPr>
+        <p:cNvPr id="1" name=""/>
+        <p:cNvGrpSpPr/>
+        <p:nvPr/>
+      </p:nvGrpSpPr>
+      <p:grpSpPr/>
+      <p:sp>
+        <p:nvSpPr>
+          <p:cNvPr id="2" name="Rectangle 1"/>
+          <p:cNvSpPr/>
+          <p:nvPr/>
+        </p:nvSpPr>
+        <p:spPr>
+          <a:xfrm>
+            <a:off x="0" y="0"/>
+            <a:ext cx="411480" cy="6858000"/>
+          </a:xfrm>
+          <a:prstGeom prst="rect">
+            <a:avLst/>
+          </a:prstGeom>
+          <a:solidFill>
+            <a:srgbClr val="E85D04"/>
+          </a:solidFill>
+          <a:ln>
+            <a:noFill/>
+          </a:ln>
+        </p:spPr>
+        <p:style>
+          <a:lnRef idx="1">
+            <a:schemeClr val="accent1"/>
+          </a:lnRef>
+          <a:fillRef idx="3">
+            <a:schemeClr val="accent1"/>
+          </a:fillRef>
+          <a:effectRef idx="2">
+            <a:schemeClr val="accent1"/>
+          </a:effectRef>
+          <a:fontRef idx="minor">
+            <a:schemeClr val="lt1"/>
+          </a:fontRef>
+        </p:style>
+        <p:txBody>
+          <a:bodyPr rtlCol="0" anchor="ctr"/>
+          <a:lstStyle/>
+          <a:p>
+            <a:pPr algn="ctr"/>
+          </a:p>
+        </p:txBody>
+      </p:sp>
+      <p:sp>
+        <p:nvSpPr>
+          <p:cNvPr id="3" name="TextBox 2"/>
+          <p:cNvSpPr txBox="1"/>
+          <p:nvPr/>
+        </p:nvSpPr>
+        <p:spPr>
+          <a:xfrm>
+            <a:off x="914400" y="320040"/>
+            <a:ext cx="10058400" cy="640080"/>
+          </a:xfrm>
+          <a:prstGeom prst="rect">
+            <a:avLst/>
+          </a:prstGeom>
+          <a:noFill/>
+        </p:spPr>
+        <p:txBody>
+          <a:bodyPr wrap="square">
+            <a:spAutoFit/>
+          </a:bodyPr>
+          <a:lstStyle/>
+          <a:p>
+            <a:pPr algn="l"/>
+            <a:r>
+              <a:rPr sz="3000" b="1" i="0">
+                <a:solidFill>
+                  <a:srgbClr val="FFFFFF"/>
+                </a:solidFill>
+              </a:rPr>
+              <a:t>Fehlerbehandlung &amp; Robustheit</a:t>
+            </a:r>
+          </a:p>
+        </p:txBody>
+      </p:sp>
+      <p:sp>
+        <p:nvSpPr>
+          <p:cNvPr id="4" name="TextBox 3"/>
+          <p:cNvSpPr txBox="1"/>
+          <p:nvPr/>
+        </p:nvSpPr>
+        <p:spPr>
+          <a:xfrm>
+            <a:off x="914400" y="960120"/>
+            <a:ext cx="10058400" cy="411480"/>
+          </a:xfrm>
+          <a:prstGeom prst="rect">
+            <a:avLst/>
+          </a:prstGeom>
+          <a:noFill/>
+        </p:spPr>
+        <p:txBody>
+          <a:bodyPr wrap="square">
+            <a:spAutoFit/>
+          </a:bodyPr>
+          <a:lstStyle/>
+          <a:p>
+            <a:pPr algn="l"/>
+            <a:r>
+              <a:rPr sz="1500" b="0" i="0">
+                <a:solidFill>
+                  <a:srgbClr val="F4A261"/>
+                </a:solidFill>
+              </a:rPr>
+              <a:t>3-Ebenen-Konzept für produktionssicheren Betrieb</a:t>
+            </a:r>
+          </a:p>
+        </p:txBody>
+      </p:sp>
+      <p:sp>
+        <p:nvSpPr>
+          <p:cNvPr id="5" name="Rectangle 4"/>
+          <p:cNvSpPr/>
+          <p:nvPr/>
+        </p:nvSpPr>
+        <p:spPr>
+          <a:xfrm>
+            <a:off x="914400" y="1508760"/>
+            <a:ext cx="3291840" cy="4663440"/>
+          </a:xfrm>
+          <a:prstGeom prst="rect">
+            <a:avLst/>
+          </a:prstGeom>
+          <a:solidFill>
+            <a:srgbClr val="1A3A6C"/>
+          </a:solidFill>
+          <a:ln>
+            <a:noFill/>
+          </a:ln>
+        </p:spPr>
+        <p:style>
+          <a:lnRef idx="1">
+            <a:schemeClr val="accent1"/>
+          </a:lnRef>
+          <a:fillRef idx="3">
+            <a:schemeClr val="accent1"/>
+          </a:fillRef>
+          <a:effectRef idx="2">
+            <a:schemeClr val="accent1"/>
+          </a:effectRef>
+          <a:fontRef idx="minor">
+            <a:schemeClr val="lt1"/>
+          </a:fontRef>
+        </p:style>
+        <p:txBody>
+          <a:bodyPr rtlCol="0" anchor="ctr"/>
+          <a:lstStyle/>
+          <a:p>
+            <a:pPr algn="ctr"/>
+          </a:p>
+        </p:txBody>
+      </p:sp>
+      <p:sp>
+        <p:nvSpPr>
+          <p:cNvPr id="6" name="TextBox 5"/>
+          <p:cNvSpPr txBox="1"/>
+          <p:nvPr/>
+        </p:nvSpPr>
+        <p:spPr>
+          <a:xfrm>
+            <a:off x="1051560" y="1600200"/>
+            <a:ext cx="3017520" cy="457200"/>
+          </a:xfrm>
+          <a:prstGeom prst="rect">
+            <a:avLst/>
+          </a:prstGeom>
+          <a:noFill/>
+        </p:spPr>
+        <p:txBody>
+          <a:bodyPr wrap="square">
+            <a:spAutoFit/>
+          </a:bodyPr>
+          <a:lstStyle/>
+          <a:p>
+            <a:pPr algn="l"/>
+            <a:r>
+              <a:rPr sz="1300" b="1" i="0">
+                <a:solidFill>
+                  <a:srgbClr val="FFFFFF"/>
+                </a:solidFill>
+              </a:rPr>
+              <a:t>Ebene 1 – Node-Level</a:t>
+            </a:r>
+          </a:p>
+        </p:txBody>
+      </p:sp>
+      <p:sp>
+        <p:nvSpPr>
+          <p:cNvPr id="7" name="TextBox 6"/>
+          <p:cNvSpPr txBox="1"/>
+          <p:nvPr/>
+        </p:nvSpPr>
+        <p:spPr>
+          <a:xfrm>
+            <a:off x="1051560" y="2194560"/>
+            <a:ext cx="3017520" cy="685800"/>
+          </a:xfrm>
+          <a:prstGeom prst="rect">
+            <a:avLst/>
+          </a:prstGeom>
+          <a:noFill/>
+        </p:spPr>
+        <p:txBody>
+          <a:bodyPr wrap="square">
+            <a:spAutoFit/>
+          </a:bodyPr>
+          <a:lstStyle/>
+          <a:p>
+            <a:pPr algn="l"/>
+            <a:r>
+              <a:rPr sz="1100" b="0" i="0">
+                <a:solidFill>
+                  <a:srgbClr val="CCDDFF"/>
+                </a:solidFill>
+              </a:rPr>
+              <a:t>→  Continue on Fail = ON bei allen kritischen Nodes</a:t>
+            </a:r>
+          </a:p>
+        </p:txBody>
+      </p:sp>
+      <p:sp>
+        <p:nvSpPr>
+          <p:cNvPr id="8" name="TextBox 7"/>
+          <p:cNvSpPr txBox="1"/>
+          <p:nvPr/>
+        </p:nvSpPr>
+        <p:spPr>
+          <a:xfrm>
+            <a:off x="1051560" y="2971800"/>
+            <a:ext cx="3017520" cy="685800"/>
+          </a:xfrm>
+          <a:prstGeom prst="rect">
+            <a:avLst/>
+          </a:prstGeom>
+          <a:noFill/>
+        </p:spPr>
+        <p:txBody>
+          <a:bodyPr wrap="square">
+            <a:spAutoFit/>
+          </a:bodyPr>
+          <a:lstStyle/>
+          <a:p>
+            <a:pPr algn="l"/>
+            <a:r>
+              <a:rPr sz="1100" b="0" i="0">
+                <a:solidFill>
+                  <a:srgbClr val="CCDDFF"/>
+                </a:solidFill>
+              </a:rPr>
+              <a:t>→  AI-Steps: JSON-Validierung nach jedem Output</a:t>
+            </a:r>
+          </a:p>
+        </p:txBody>
+      </p:sp>
+      <p:sp>
+        <p:nvSpPr>
+          <p:cNvPr id="9" name="TextBox 8"/>
+          <p:cNvSpPr txBox="1"/>
+          <p:nvPr/>
+        </p:nvSpPr>
+        <p:spPr>
+          <a:xfrm>
+            <a:off x="1051560" y="3749039"/>
+            <a:ext cx="3017520" cy="685800"/>
+          </a:xfrm>
+          <a:prstGeom prst="rect">
+            <a:avLst/>
+          </a:prstGeom>
+          <a:noFill/>
+        </p:spPr>
+        <p:txBody>
+          <a:bodyPr wrap="square">
+            <a:spAutoFit/>
+          </a:bodyPr>
+          <a:lstStyle/>
+          <a:p>
+            <a:pPr algn="l"/>
+            <a:r>
+              <a:rPr sz="1100" b="0" i="0">
+                <a:solidFill>
+                  <a:srgbClr val="CCDDFF"/>
+                </a:solidFill>
+              </a:rPr>
+              <a:t>→  Gmail/Google Docs: Retry bis 3× bei Fehler</a:t>
+            </a:r>
+          </a:p>
+        </p:txBody>
+      </p:sp>
+      <p:sp>
+        <p:nvSpPr>
+          <p:cNvPr id="10" name="TextBox 9"/>
+          <p:cNvSpPr txBox="1"/>
+          <p:nvPr/>
+        </p:nvSpPr>
+        <p:spPr>
+          <a:xfrm>
+            <a:off x="1051560" y="4526279"/>
+            <a:ext cx="3017520" cy="685800"/>
+          </a:xfrm>
+          <a:prstGeom prst="rect">
+            <a:avLst/>
+          </a:prstGeom>
+          <a:noFill/>
+        </p:spPr>
+        <p:txBody>
+          <a:bodyPr wrap="square">
+            <a:spAutoFit/>
+          </a:bodyPr>
+          <a:lstStyle/>
+          <a:p>
+            <a:pPr algn="l"/>
+            <a:r>
+              <a:rPr sz="1100" b="0" i="0">
+                <a:solidFill>
+                  <a:srgbClr val="CCDDFF"/>
+                </a:solidFill>
+              </a:rPr>
+              <a:t>→  IF-Node: {{ $json.auftrag_nr }} vorhanden?</a:t>
+            </a:r>
+          </a:p>
+        </p:txBody>
+      </p:sp>
+      <p:sp>
+        <p:nvSpPr>
+          <p:cNvPr id="11" name="Rectangle 10"/>
+          <p:cNvSpPr/>
+          <p:nvPr/>
+        </p:nvSpPr>
+        <p:spPr>
+          <a:xfrm>
+            <a:off x="4434840" y="1508760"/>
+            <a:ext cx="3291840" cy="4663440"/>
+          </a:xfrm>
+          <a:prstGeom prst="rect">
+            <a:avLst/>
+          </a:prstGeom>
+          <a:solidFill>
+            <a:srgbClr val="3A1A6C"/>
+          </a:solidFill>
+          <a:ln>
+            <a:noFill/>
+          </a:ln>
+        </p:spPr>
+        <p:style>
+          <a:lnRef idx="1">
+            <a:schemeClr val="accent1"/>
+          </a:lnRef>
+          <a:fillRef idx="3">
+            <a:schemeClr val="accent1"/>
+          </a:fillRef>
+          <a:effectRef idx="2">
+            <a:schemeClr val="accent1"/>
+          </a:effectRef>
+          <a:fontRef idx="minor">
+            <a:schemeClr val="lt1"/>
+          </a:fontRef>
+        </p:style>
+        <p:txBody>
+          <a:bodyPr rtlCol="0" anchor="ctr"/>
+          <a:lstStyle/>
+          <a:p>
+            <a:pPr algn="ctr"/>
+          </a:p>
+        </p:txBody>
+      </p:sp>
+      <p:sp>
+        <p:nvSpPr>
+          <p:cNvPr id="12" name="TextBox 11"/>
+          <p:cNvSpPr txBox="1"/>
+          <p:nvPr/>
+        </p:nvSpPr>
+        <p:spPr>
+          <a:xfrm>
+            <a:off x="4572000" y="1600200"/>
+            <a:ext cx="3017520" cy="457200"/>
+          </a:xfrm>
+          <a:prstGeom prst="rect">
+            <a:avLst/>
+          </a:prstGeom>
+          <a:noFill/>
+        </p:spPr>
+        <p:txBody>
+          <a:bodyPr wrap="square">
+            <a:spAutoFit/>
+          </a:bodyPr>
+          <a:lstStyle/>
+          <a:p>
+            <a:pPr algn="l"/>
+            <a:r>
+              <a:rPr sz="1300" b="1" i="0">
+                <a:solidFill>
+                  <a:srgbClr val="FFFFFF"/>
+                </a:solidFill>
+              </a:rPr>
+              <a:t>Ebene 2 – Wait-Node Timeout</a:t>
+            </a:r>
+          </a:p>
+        </p:txBody>
+      </p:sp>
+      <p:sp>
+        <p:nvSpPr>
+          <p:cNvPr id="13" name="TextBox 12"/>
+          <p:cNvSpPr txBox="1"/>
+          <p:nvPr/>
+        </p:nvSpPr>
+        <p:spPr>
+          <a:xfrm>
+            <a:off x="4572000" y="2194560"/>
+            <a:ext cx="3017520" cy="685800"/>
+          </a:xfrm>
+          <a:prstGeom prst="rect">
+            <a:avLst/>
+          </a:prstGeom>
+          <a:noFill/>
+        </p:spPr>
+        <p:txBody>
+          <a:bodyPr wrap="square">
+            <a:spAutoFit/>
+          </a:bodyPr>
+          <a:lstStyle/>
+          <a:p>
+            <a:pPr algn="l"/>
+            <a:r>
+              <a:rPr sz="1100" b="0" i="0">
+                <a:solidFill>
+                  <a:srgbClr val="CCDDFF"/>
+                </a:solidFill>
+              </a:rPr>
+              <a:t>→  Maximale Wartezeit: 72 Stunden</a:t>
+            </a:r>
+          </a:p>
+        </p:txBody>
+      </p:sp>
+      <p:sp>
+        <p:nvSpPr>
+          <p:cNvPr id="14" name="TextBox 13"/>
+          <p:cNvSpPr txBox="1"/>
+          <p:nvPr/>
+        </p:nvSpPr>
+        <p:spPr>
+          <a:xfrm>
+            <a:off x="4572000" y="2971800"/>
+            <a:ext cx="3017520" cy="685800"/>
+          </a:xfrm>
+          <a:prstGeom prst="rect">
+            <a:avLst/>
+          </a:prstGeom>
+          <a:noFill/>
+        </p:spPr>
+        <p:txBody>
+          <a:bodyPr wrap="square">
+            <a:spAutoFit/>
+          </a:bodyPr>
+          <a:lstStyle/>
+          <a:p>
+            <a:pPr algn="l"/>
+            <a:r>
+              <a:rPr sz="1100" b="0" i="0">
+                <a:solidFill>
+                  <a:srgbClr val="CCDDFF"/>
+                </a:solidFill>
+              </a:rPr>
+              <a:t>→  Nach Ablauf: Reminder-Mail an Edgar</a:t>
+            </a:r>
+          </a:p>
+        </p:txBody>
+      </p:sp>
+      <p:sp>
+        <p:nvSpPr>
+          <p:cNvPr id="15" name="TextBox 14"/>
+          <p:cNvSpPr txBox="1"/>
+          <p:nvPr/>
+        </p:nvSpPr>
+        <p:spPr>
+          <a:xfrm>
+            <a:off x="4572000" y="3749039"/>
+            <a:ext cx="3017520" cy="685800"/>
+          </a:xfrm>
+          <a:prstGeom prst="rect">
+            <a:avLst/>
+          </a:prstGeom>
+          <a:noFill/>
+        </p:spPr>
+        <p:txBody>
+          <a:bodyPr wrap="square">
+            <a:spAutoFit/>
+          </a:bodyPr>
+          <a:lstStyle/>
+          <a:p>
+            <a:pPr algn="l"/>
+            <a:r>
+              <a:rPr sz="1100" b="0" i="0">
+                <a:solidFill>
+                  <a:srgbClr val="CCDDFF"/>
+                </a:solidFill>
+              </a:rPr>
+              <a:t>→  Nach 48h ohne Reaktion: Auto-Archivierung</a:t>
+            </a:r>
+          </a:p>
+        </p:txBody>
+      </p:sp>
+      <p:sp>
+        <p:nvSpPr>
+          <p:cNvPr id="16" name="TextBox 15"/>
+          <p:cNvSpPr txBox="1"/>
+          <p:nvPr/>
+        </p:nvSpPr>
+        <p:spPr>
+          <a:xfrm>
+            <a:off x="4572000" y="4526279"/>
+            <a:ext cx="3017520" cy="685800"/>
+          </a:xfrm>
+          <a:prstGeom prst="rect">
+            <a:avLst/>
+          </a:prstGeom>
+          <a:noFill/>
+        </p:spPr>
+        <p:txBody>
+          <a:bodyPr wrap="square">
+            <a:spAutoFit/>
+          </a:bodyPr>
+          <a:lstStyle/>
+          <a:p>
+            <a:pPr algn="l"/>
+            <a:r>
+              <a:rPr sz="1100" b="0" i="0">
+                <a:solidFill>
+                  <a:srgbClr val="CCDDFF"/>
+                </a:solidFill>
+              </a:rPr>
+              <a:t>→  Kunde erhält Status-Update</a:t>
+            </a:r>
+          </a:p>
+        </p:txBody>
+      </p:sp>
+      <p:sp>
+        <p:nvSpPr>
+          <p:cNvPr id="17" name="Rectangle 16"/>
+          <p:cNvSpPr/>
+          <p:nvPr/>
+        </p:nvSpPr>
+        <p:spPr>
+          <a:xfrm>
+            <a:off x="7955279" y="1508760"/>
+            <a:ext cx="3291840" cy="4663440"/>
+          </a:xfrm>
+          <a:prstGeom prst="rect">
+            <a:avLst/>
+          </a:prstGeom>
+          <a:solidFill>
+            <a:srgbClr val="5C1A1A"/>
+          </a:solidFill>
+          <a:ln>
+            <a:noFill/>
+          </a:ln>
+        </p:spPr>
+        <p:style>
+          <a:lnRef idx="1">
+            <a:schemeClr val="accent1"/>
+          </a:lnRef>
+          <a:fillRef idx="3">
+            <a:schemeClr val="accent1"/>
+          </a:fillRef>
+          <a:effectRef idx="2">
+            <a:schemeClr val="accent1"/>
+          </a:effectRef>
+          <a:fontRef idx="minor">
+            <a:schemeClr val="lt1"/>
+          </a:fontRef>
+        </p:style>
+        <p:txBody>
+          <a:bodyPr rtlCol="0" anchor="ctr"/>
+          <a:lstStyle/>
+          <a:p>
+            <a:pPr algn="ctr"/>
+          </a:p>
+        </p:txBody>
+      </p:sp>
+      <p:sp>
+        <p:nvSpPr>
+          <p:cNvPr id="18" name="TextBox 17"/>
+          <p:cNvSpPr txBox="1"/>
+          <p:nvPr/>
+        </p:nvSpPr>
+        <p:spPr>
+          <a:xfrm>
+            <a:off x="8092440" y="1600200"/>
+            <a:ext cx="3017520" cy="457200"/>
+          </a:xfrm>
+          <a:prstGeom prst="rect">
+            <a:avLst/>
+          </a:prstGeom>
+          <a:noFill/>
+        </p:spPr>
+        <p:txBody>
+          <a:bodyPr wrap="square">
+            <a:spAutoFit/>
+          </a:bodyPr>
+          <a:lstStyle/>
+          <a:p>
+            <a:pPr algn="l"/>
+            <a:r>
+              <a:rPr sz="1300" b="1" i="0">
+                <a:solidFill>
+                  <a:srgbClr val="FFFFFF"/>
+                </a:solidFill>
+              </a:rPr>
+              <a:t>Ebene 3 – Globaler Error-Workflow</a:t>
+            </a:r>
+          </a:p>
+        </p:txBody>
+      </p:sp>
+      <p:sp>
+        <p:nvSpPr>
+          <p:cNvPr id="19" name="TextBox 18"/>
+          <p:cNvSpPr txBox="1"/>
+          <p:nvPr/>
+        </p:nvSpPr>
+        <p:spPr>
+          <a:xfrm>
+            <a:off x="8092440" y="2194560"/>
+            <a:ext cx="3017520" cy="685800"/>
+          </a:xfrm>
+          <a:prstGeom prst="rect">
+            <a:avLst/>
+          </a:prstGeom>
+          <a:noFill/>
+        </p:spPr>
+        <p:txBody>
+          <a:bodyPr wrap="square">
+            <a:spAutoFit/>
+          </a:bodyPr>
+          <a:lstStyle/>
+          <a:p>
+            <a:pPr algn="l"/>
+            <a:r>
+              <a:rPr sz="1100" b="0" i="0">
+                <a:solidFill>
+                  <a:srgbClr val="CCDDFF"/>
+                </a:solidFill>
+              </a:rPr>
+              <a:t>→  Separater Error-Workflow (n8n Settings)</a:t>
+            </a:r>
+          </a:p>
+        </p:txBody>
+      </p:sp>
+      <p:sp>
+        <p:nvSpPr>
+          <p:cNvPr id="20" name="TextBox 19"/>
+          <p:cNvSpPr txBox="1"/>
+          <p:nvPr/>
+        </p:nvSpPr>
+        <p:spPr>
+          <a:xfrm>
+            <a:off x="8092440" y="2971800"/>
+            <a:ext cx="3017520" cy="685800"/>
+          </a:xfrm>
+          <a:prstGeom prst="rect">
+            <a:avLst/>
+          </a:prstGeom>
+          <a:noFill/>
+        </p:spPr>
+        <p:txBody>
+          <a:bodyPr wrap="square">
+            <a:spAutoFit/>
+          </a:bodyPr>
+          <a:lstStyle/>
+          <a:p>
+            <a:pPr algn="l"/>
+            <a:r>
+              <a:rPr sz="1100" b="0" i="0">
+                <a:solidFill>
+                  <a:srgbClr val="CCDDFF"/>
+                </a:solidFill>
+              </a:rPr>
+              <a:t>→  Fängt ALLE unbehandelten Fehler aller Workflows</a:t>
+            </a:r>
+          </a:p>
+        </p:txBody>
+      </p:sp>
+      <p:sp>
+        <p:nvSpPr>
+          <p:cNvPr id="21" name="TextBox 20"/>
+          <p:cNvSpPr txBox="1"/>
+          <p:nvPr/>
+        </p:nvSpPr>
+        <p:spPr>
+          <a:xfrm>
+            <a:off x="8092440" y="3749039"/>
+            <a:ext cx="3017520" cy="685800"/>
+          </a:xfrm>
+          <a:prstGeom prst="rect">
+            <a:avLst/>
+          </a:prstGeom>
+          <a:noFill/>
+        </p:spPr>
+        <p:txBody>
+          <a:bodyPr wrap="square">
+            <a:spAutoFit/>
+          </a:bodyPr>
+          <a:lstStyle/>
+          <a:p>
+            <a:pPr algn="l"/>
+            <a:r>
+              <a:rPr sz="1100" b="0" i="0">
+                <a:solidFill>
+                  <a:srgbClr val="CCDDFF"/>
+                </a:solidFill>
+              </a:rPr>
+              <a:t>→  Mail an Edgar: Workflow + Node + Fehlermeldung</a:t>
+            </a:r>
+          </a:p>
+        </p:txBody>
+      </p:sp>
+      <p:sp>
+        <p:nvSpPr>
+          <p:cNvPr id="22" name="TextBox 21"/>
+          <p:cNvSpPr txBox="1"/>
+          <p:nvPr/>
+        </p:nvSpPr>
+        <p:spPr>
+          <a:xfrm>
+            <a:off x="8092440" y="4526279"/>
+            <a:ext cx="3017520" cy="685800"/>
+          </a:xfrm>
+          <a:prstGeom prst="rect">
+            <a:avLst/>
+          </a:prstGeom>
+          <a:noFill/>
+        </p:spPr>
+        <p:txBody>
+          <a:bodyPr wrap="square">
+            <a:spAutoFit/>
+          </a:bodyPr>
+          <a:lstStyle/>
+          <a:p>
+            <a:pPr algn="l"/>
+            <a:r>
+              <a:rPr sz="1100" b="0" i="0">
+                <a:solidFill>
+                  <a:srgbClr val="CCDDFF"/>
+                </a:solidFill>
+              </a:rPr>
+              <a:t>→  Link zur Execution für direktes Debugging</a:t>
+            </a:r>
+          </a:p>
+        </p:txBody>
+      </p:sp>
+      <p:sp>
+        <p:nvSpPr>
+          <p:cNvPr id="23" name="Rectangle 22"/>
+          <p:cNvSpPr/>
+          <p:nvPr/>
+        </p:nvSpPr>
+        <p:spPr>
+          <a:xfrm>
+            <a:off x="914400" y="6400800"/>
+            <a:ext cx="10149840" cy="320040"/>
+          </a:xfrm>
+          <a:prstGeom prst="rect">
+            <a:avLst/>
+          </a:prstGeom>
+          <a:solidFill>
+            <a:srgbClr val="0D1F33"/>
+          </a:solidFill>
+          <a:ln>
+            <a:noFill/>
+          </a:ln>
+        </p:spPr>
+        <p:style>
+          <a:lnRef idx="1">
+            <a:schemeClr val="accent1"/>
+          </a:lnRef>
+          <a:fillRef idx="3">
+            <a:schemeClr val="accent1"/>
+          </a:fillRef>
+          <a:effectRef idx="2">
+            <a:schemeClr val="accent1"/>
+          </a:effectRef>
+          <a:fontRef idx="minor">
+            <a:schemeClr val="lt1"/>
+          </a:fontRef>
+        </p:style>
+        <p:txBody>
+          <a:bodyPr rtlCol="0" anchor="ctr"/>
+          <a:lstStyle/>
+          <a:p>
+            <a:pPr algn="ctr"/>
+          </a:p>
+        </p:txBody>
+      </p:sp>
+      <p:sp>
+        <p:nvSpPr>
+          <p:cNvPr id="24" name="TextBox 23"/>
+          <p:cNvSpPr txBox="1"/>
+          <p:nvPr/>
+        </p:nvSpPr>
+        <p:spPr>
+          <a:xfrm>
+            <a:off x="1097280" y="6446520"/>
+            <a:ext cx="9784080" cy="228600"/>
+          </a:xfrm>
+          <a:prstGeom prst="rect">
+            <a:avLst/>
+          </a:prstGeom>
+          <a:noFill/>
+        </p:spPr>
+        <p:txBody>
+          <a:bodyPr wrap="square">
+            <a:spAutoFit/>
+          </a:bodyPr>
+          <a:lstStyle/>
+          <a:p>
+            <a:pPr algn="ctr"/>
+            <a:r>
+              <a:rPr sz="1100" b="0" i="0">
+                <a:solidFill>
+                  <a:srgbClr val="55657A"/>
+                </a:solidFill>
+              </a:rPr>
+              <a:t>Kritische Punkte: Anthropic Timeout · Gmail Auth · Google Docs API-Limit · Ungültiger JSON-Output der AI</a:t>
+            </a:r>
+          </a:p>
+        </p:txBody>
+      </p:sp>
+    </p:spTree>
+  </p:cSld>
+  <p:clrMapOvr>
+    <a:masterClrMapping/>
+  </p:clrMapOvr>
+</p:sld>
+</file>
+
+<file path=ppt/slides/slide16.xml><?xml version="1.0" encoding="utf-8"?>
+<p:sld xmlns:a="http://schemas.openxmlformats.org/drawingml/2006/main" xmlns:p="http://schemas.openxmlformats.org/presentationml/2006/main" xmlns:r="http://schemas.openxmlformats.org/officeDocument/2006/relationships">
+  <p:cSld>
+    <p:bg>
+      <p:bgPr>
+        <a:solidFill>
+          <a:srgbClr val="1A2E4A"/>
+        </a:solidFill>
+        <a:effectLst/>
+      </p:bgPr>
+    </p:bg>
+    <p:spTree>
+      <p:nvGrpSpPr>
+        <p:cNvPr id="1" name=""/>
+        <p:cNvGrpSpPr/>
+        <p:nvPr/>
+      </p:nvGrpSpPr>
+      <p:grpSpPr/>
+      <p:sp>
+        <p:nvSpPr>
+          <p:cNvPr id="2" name="Rectangle 1"/>
+          <p:cNvSpPr/>
+          <p:nvPr/>
+        </p:nvSpPr>
+        <p:spPr>
+          <a:xfrm>
+            <a:off x="0" y="0"/>
+            <a:ext cx="411480" cy="6858000"/>
+          </a:xfrm>
+          <a:prstGeom prst="rect">
+            <a:avLst/>
+          </a:prstGeom>
+          <a:solidFill>
+            <a:srgbClr val="E85D04"/>
+          </a:solidFill>
+          <a:ln>
+            <a:noFill/>
+          </a:ln>
+        </p:spPr>
+        <p:style>
+          <a:lnRef idx="1">
+            <a:schemeClr val="accent1"/>
+          </a:lnRef>
+          <a:fillRef idx="3">
+            <a:schemeClr val="accent1"/>
+          </a:fillRef>
+          <a:effectRef idx="2">
+            <a:schemeClr val="accent1"/>
+          </a:effectRef>
+          <a:fontRef idx="minor">
+            <a:schemeClr val="lt1"/>
+          </a:fontRef>
+        </p:style>
+        <p:txBody>
+          <a:bodyPr rtlCol="0" anchor="ctr"/>
+          <a:lstStyle/>
+          <a:p>
+            <a:pPr algn="ctr"/>
+          </a:p>
+        </p:txBody>
+      </p:sp>
+      <p:sp>
+        <p:nvSpPr>
+          <p:cNvPr id="3" name="TextBox 2"/>
+          <p:cNvSpPr txBox="1"/>
+          <p:nvPr/>
+        </p:nvSpPr>
+        <p:spPr>
+          <a:xfrm>
+            <a:off x="914400" y="320040"/>
+            <a:ext cx="10058400" cy="640080"/>
+          </a:xfrm>
+          <a:prstGeom prst="rect">
+            <a:avLst/>
+          </a:prstGeom>
+          <a:noFill/>
+        </p:spPr>
+        <p:txBody>
+          <a:bodyPr wrap="square">
+            <a:spAutoFit/>
+          </a:bodyPr>
+          <a:lstStyle/>
+          <a:p>
+            <a:pPr algn="l"/>
+            <a:r>
+              <a:rPr sz="3000" b="1" i="0">
+                <a:solidFill>
+                  <a:srgbClr val="FFFFFF"/>
+                </a:solidFill>
+              </a:rPr>
+              <a:t>Aktueller Stand &amp; Roadmap</a:t>
+            </a:r>
+          </a:p>
+        </p:txBody>
+      </p:sp>
+      <p:sp>
+        <p:nvSpPr>
+          <p:cNvPr id="4" name="TextBox 3"/>
+          <p:cNvSpPr txBox="1"/>
+          <p:nvPr/>
+        </p:nvSpPr>
+        <p:spPr>
+          <a:xfrm>
+            <a:off x="914400" y="960120"/>
+            <a:ext cx="10058400" cy="411480"/>
+          </a:xfrm>
+          <a:prstGeom prst="rect">
+            <a:avLst/>
+          </a:prstGeom>
+          <a:noFill/>
+        </p:spPr>
+        <p:txBody>
+          <a:bodyPr wrap="square">
+            <a:spAutoFit/>
+          </a:bodyPr>
+          <a:lstStyle/>
+          <a:p>
+            <a:pPr algn="l"/>
+            <a:r>
+              <a:rPr sz="1500" b="0" i="0">
+                <a:solidFill>
+                  <a:srgbClr val="F4A261"/>
+                </a:solidFill>
+              </a:rPr>
+              <a:t>Juni 2026 – Phase 2 (n8n) in Entwicklung</a:t>
+            </a:r>
+          </a:p>
+        </p:txBody>
+      </p:sp>
+      <p:sp>
+        <p:nvSpPr>
+          <p:cNvPr id="5" name="Rectangle 4"/>
+          <p:cNvSpPr/>
+          <p:nvPr/>
+        </p:nvSpPr>
+        <p:spPr>
+          <a:xfrm>
+            <a:off x="914400" y="1508760"/>
+            <a:ext cx="4846320" cy="5029200"/>
+          </a:xfrm>
+          <a:prstGeom prst="rect">
+            <a:avLst/>
+          </a:prstGeom>
+          <a:solidFill>
+            <a:srgbClr val="122238"/>
+          </a:solidFill>
+          <a:ln>
+            <a:noFill/>
+          </a:ln>
+        </p:spPr>
+        <p:style>
+          <a:lnRef idx="1">
+            <a:schemeClr val="accent1"/>
+          </a:lnRef>
+          <a:fillRef idx="3">
+            <a:schemeClr val="accent1"/>
+          </a:fillRef>
+          <a:effectRef idx="2">
+            <a:schemeClr val="accent1"/>
+          </a:effectRef>
+          <a:fontRef idx="minor">
+            <a:schemeClr val="lt1"/>
+          </a:fontRef>
+        </p:style>
+        <p:txBody>
+          <a:bodyPr rtlCol="0" anchor="ctr"/>
+          <a:lstStyle/>
+          <a:p>
+            <a:pPr algn="ctr"/>
+          </a:p>
+        </p:txBody>
+      </p:sp>
+      <p:sp>
+        <p:nvSpPr>
+          <p:cNvPr id="6" name="TextBox 5"/>
+          <p:cNvSpPr txBox="1"/>
+          <p:nvPr/>
+        </p:nvSpPr>
+        <p:spPr>
+          <a:xfrm>
+            <a:off x="1097280" y="1600200"/>
+            <a:ext cx="4480560" cy="411480"/>
+          </a:xfrm>
+          <a:prstGeom prst="rect">
+            <a:avLst/>
+          </a:prstGeom>
+          <a:noFill/>
+        </p:spPr>
+        <p:txBody>
+          <a:bodyPr wrap="square">
+            <a:spAutoFit/>
+          </a:bodyPr>
+          <a:lstStyle/>
+          <a:p>
+            <a:pPr algn="l"/>
+            <a:r>
+              <a:rPr sz="1600" b="1" i="0">
+                <a:solidFill>
+                  <a:srgbClr val="52B788"/>
+                </a:solidFill>
+              </a:rPr>
+              <a:t>Implementiert</a:t>
+            </a:r>
+          </a:p>
+        </p:txBody>
+      </p:sp>
+      <p:sp>
+        <p:nvSpPr>
+          <p:cNvPr id="7" name="TextBox 6"/>
+          <p:cNvSpPr txBox="1"/>
+          <p:nvPr/>
+        </p:nvSpPr>
+        <p:spPr>
+          <a:xfrm>
+            <a:off x="1097280" y="2103120"/>
+            <a:ext cx="4480560" cy="457200"/>
+          </a:xfrm>
+          <a:prstGeom prst="rect">
+            <a:avLst/>
+          </a:prstGeom>
+          <a:noFill/>
+        </p:spPr>
+        <p:txBody>
+          <a:bodyPr wrap="square">
+            <a:spAutoFit/>
+          </a:bodyPr>
+          <a:lstStyle/>
+          <a:p>
+            <a:pPr algn="l"/>
+            <a:r>
+              <a:rPr sz="1200" b="0" i="0">
+                <a:solidFill>
+                  <a:srgbClr val="A8D8BE"/>
+                </a:solidFill>
+              </a:rPr>
+              <a:t>✅  6 Eingangskanäle (Mail, Web, WA, TG, Tel, Form)</a:t>
+            </a:r>
+          </a:p>
+        </p:txBody>
+      </p:sp>
+      <p:sp>
+        <p:nvSpPr>
+          <p:cNvPr id="8" name="TextBox 7"/>
+          <p:cNvSpPr txBox="1"/>
+          <p:nvPr/>
+        </p:nvSpPr>
+        <p:spPr>
+          <a:xfrm>
+            <a:off x="1097280" y="2633472"/>
+            <a:ext cx="4480560" cy="457200"/>
+          </a:xfrm>
+          <a:prstGeom prst="rect">
+            <a:avLst/>
+          </a:prstGeom>
+          <a:noFill/>
+        </p:spPr>
+        <p:txBody>
+          <a:bodyPr wrap="square">
+            <a:spAutoFit/>
+          </a:bodyPr>
+          <a:lstStyle/>
+          <a:p>
+            <a:pPr algn="l"/>
+            <a:r>
+              <a:rPr sz="1200" b="0" i="0">
+                <a:solidFill>
+                  <a:srgbClr val="A8D8BE"/>
+                </a:solidFill>
+              </a:rPr>
+              <a:t>✅  Vollständigkeitsprüfung mit Schema</a:t>
+            </a:r>
+          </a:p>
+        </p:txBody>
+      </p:sp>
+      <p:sp>
+        <p:nvSpPr>
+          <p:cNvPr id="9" name="TextBox 8"/>
+          <p:cNvSpPr txBox="1"/>
+          <p:nvPr/>
+        </p:nvSpPr>
+        <p:spPr>
+          <a:xfrm>
+            <a:off x="1097280" y="3163824"/>
+            <a:ext cx="4480560" cy="457200"/>
+          </a:xfrm>
+          <a:prstGeom prst="rect">
+            <a:avLst/>
+          </a:prstGeom>
+          <a:noFill/>
+        </p:spPr>
+        <p:txBody>
+          <a:bodyPr wrap="square">
+            <a:spAutoFit/>
+          </a:bodyPr>
+          <a:lstStyle/>
+          <a:p>
+            <a:pPr algn="l"/>
+            <a:r>
+              <a:rPr sz="1200" b="0" i="0">
+                <a:solidFill>
+                  <a:srgbClr val="A8D8BE"/>
+                </a:solidFill>
+              </a:rPr>
+              <a:t>✅  Preiskalkulation (deterministisch)</a:t>
+            </a:r>
+          </a:p>
+        </p:txBody>
+      </p:sp>
+      <p:sp>
+        <p:nvSpPr>
+          <p:cNvPr id="10" name="TextBox 9"/>
+          <p:cNvSpPr txBox="1"/>
+          <p:nvPr/>
+        </p:nvSpPr>
+        <p:spPr>
+          <a:xfrm>
+            <a:off x="1097280" y="3694175"/>
+            <a:ext cx="4480560" cy="457200"/>
+          </a:xfrm>
+          <a:prstGeom prst="rect">
+            <a:avLst/>
+          </a:prstGeom>
+          <a:noFill/>
+        </p:spPr>
+        <p:txBody>
+          <a:bodyPr wrap="square">
+            <a:spAutoFit/>
+          </a:bodyPr>
+          <a:lstStyle/>
+          <a:p>
+            <a:pPr algn="l"/>
+            <a:r>
+              <a:rPr sz="1200" b="0" i="0">
+                <a:solidFill>
+                  <a:srgbClr val="A8D8BE"/>
+                </a:solidFill>
+              </a:rPr>
+              <a:t>✅  Offerte via Google Docs</a:t>
+            </a:r>
+          </a:p>
+        </p:txBody>
+      </p:sp>
+      <p:sp>
+        <p:nvSpPr>
+          <p:cNvPr id="11" name="TextBox 10"/>
+          <p:cNvSpPr txBox="1"/>
+          <p:nvPr/>
+        </p:nvSpPr>
+        <p:spPr>
+          <a:xfrm>
+            <a:off x="1097280" y="4224527"/>
+            <a:ext cx="4480560" cy="457200"/>
+          </a:xfrm>
+          <a:prstGeom prst="rect">
+            <a:avLst/>
+          </a:prstGeom>
+          <a:noFill/>
+        </p:spPr>
+        <p:txBody>
+          <a:bodyPr wrap="square">
+            <a:spAutoFit/>
+          </a:bodyPr>
+          <a:lstStyle/>
+          <a:p>
+            <a:pPr algn="l"/>
+            <a:r>
+              <a:rPr sz="1200" b="0" i="0">
+                <a:solidFill>
+                  <a:srgbClr val="A8D8BE"/>
+                </a:solidFill>
+              </a:rPr>
+              <a:t>✅  HitL mit Wait-Node + Webhook-Links</a:t>
+            </a:r>
+          </a:p>
+        </p:txBody>
+      </p:sp>
+      <p:sp>
+        <p:nvSpPr>
+          <p:cNvPr id="12" name="TextBox 11"/>
+          <p:cNvSpPr txBox="1"/>
+          <p:nvPr/>
+        </p:nvSpPr>
+        <p:spPr>
+          <a:xfrm>
+            <a:off x="1097280" y="4754879"/>
+            <a:ext cx="4480560" cy="457200"/>
+          </a:xfrm>
+          <a:prstGeom prst="rect">
+            <a:avLst/>
+          </a:prstGeom>
+          <a:noFill/>
+        </p:spPr>
+        <p:txBody>
+          <a:bodyPr wrap="square">
+            <a:spAutoFit/>
+          </a:bodyPr>
+          <a:lstStyle/>
+          <a:p>
+            <a:pPr algn="l"/>
+            <a:r>
+              <a:rPr sz="1200" b="0" i="0">
+                <a:solidFill>
+                  <a:srgbClr val="A8D8BE"/>
+                </a:solidFill>
+              </a:rPr>
+              <a:t>✅  Auftragskontext-Speicher (Loop-Handling)</a:t>
+            </a:r>
+          </a:p>
+        </p:txBody>
+      </p:sp>
+      <p:sp>
+        <p:nvSpPr>
+          <p:cNvPr id="13" name="TextBox 12"/>
+          <p:cNvSpPr txBox="1"/>
+          <p:nvPr/>
+        </p:nvSpPr>
+        <p:spPr>
+          <a:xfrm>
+            <a:off x="1097280" y="5285231"/>
+            <a:ext cx="4480560" cy="457200"/>
+          </a:xfrm>
+          <a:prstGeom prst="rect">
+            <a:avLst/>
+          </a:prstGeom>
+          <a:noFill/>
+        </p:spPr>
+        <p:txBody>
+          <a:bodyPr wrap="square">
+            <a:spAutoFit/>
+          </a:bodyPr>
+          <a:lstStyle/>
+          <a:p>
+            <a:pPr algn="l"/>
+            <a:r>
+              <a:rPr sz="1200" b="0" i="0">
+                <a:solidFill>
+                  <a:srgbClr val="A8D8BE"/>
+                </a:solidFill>
+              </a:rPr>
+              <a:t>✅  Abschlussmail &amp; Interne Benachrichtigung</a:t>
+            </a:r>
+          </a:p>
+        </p:txBody>
+      </p:sp>
+      <p:sp>
+        <p:nvSpPr>
+          <p:cNvPr id="14" name="TextBox 13"/>
+          <p:cNvSpPr txBox="1"/>
+          <p:nvPr/>
+        </p:nvSpPr>
+        <p:spPr>
+          <a:xfrm>
+            <a:off x="1097280" y="5815583"/>
+            <a:ext cx="4480560" cy="457200"/>
+          </a:xfrm>
+          <a:prstGeom prst="rect">
+            <a:avLst/>
+          </a:prstGeom>
+          <a:noFill/>
+        </p:spPr>
+        <p:txBody>
+          <a:bodyPr wrap="square">
+            <a:spAutoFit/>
+          </a:bodyPr>
+          <a:lstStyle/>
+          <a:p>
+            <a:pPr algn="l"/>
+            <a:r>
+              <a:rPr sz="1200" b="0" i="0">
+                <a:solidFill>
+                  <a:srgbClr val="A8D8BE"/>
+                </a:solidFill>
+              </a:rPr>
+              <a:t>✅  Ablehungs-Pfad konzeptioniert</a:t>
+            </a:r>
+          </a:p>
+        </p:txBody>
+      </p:sp>
+      <p:sp>
+        <p:nvSpPr>
+          <p:cNvPr id="15" name="Rectangle 14"/>
+          <p:cNvSpPr/>
+          <p:nvPr/>
+        </p:nvSpPr>
+        <p:spPr>
+          <a:xfrm>
+            <a:off x="6263640" y="1508760"/>
+            <a:ext cx="4846320" cy="5029200"/>
+          </a:xfrm>
+          <a:prstGeom prst="rect">
+            <a:avLst/>
+          </a:prstGeom>
+          <a:solidFill>
+            <a:srgbClr val="122238"/>
+          </a:solidFill>
+          <a:ln>
+            <a:noFill/>
+          </a:ln>
+        </p:spPr>
+        <p:style>
+          <a:lnRef idx="1">
+            <a:schemeClr val="accent1"/>
+          </a:lnRef>
+          <a:fillRef idx="3">
+            <a:schemeClr val="accent1"/>
+          </a:fillRef>
+          <a:effectRef idx="2">
+            <a:schemeClr val="accent1"/>
+          </a:effectRef>
+          <a:fontRef idx="minor">
+            <a:schemeClr val="lt1"/>
+          </a:fontRef>
+        </p:style>
+        <p:txBody>
+          <a:bodyPr rtlCol="0" anchor="ctr"/>
+          <a:lstStyle/>
+          <a:p>
+            <a:pPr algn="ctr"/>
+          </a:p>
+        </p:txBody>
+      </p:sp>
+      <p:sp>
+        <p:nvSpPr>
+          <p:cNvPr id="16" name="TextBox 15"/>
+          <p:cNvSpPr txBox="1"/>
+          <p:nvPr/>
+        </p:nvSpPr>
+        <p:spPr>
+          <a:xfrm>
+            <a:off x="6446520" y="1600200"/>
+            <a:ext cx="4480560" cy="411480"/>
+          </a:xfrm>
+          <a:prstGeom prst="rect">
+            <a:avLst/>
+          </a:prstGeom>
+          <a:noFill/>
+        </p:spPr>
+        <p:txBody>
+          <a:bodyPr wrap="square">
+            <a:spAutoFit/>
+          </a:bodyPr>
+          <a:lstStyle/>
+          <a:p>
+            <a:pPr algn="l"/>
+            <a:r>
+              <a:rPr sz="1600" b="1" i="0">
+                <a:solidFill>
+                  <a:srgbClr val="E85D04"/>
+                </a:solidFill>
+              </a:rPr>
+              <a:t>Roadmap</a:t>
+            </a:r>
+          </a:p>
+        </p:txBody>
+      </p:sp>
+      <p:sp>
+        <p:nvSpPr>
+          <p:cNvPr id="17" name="TextBox 16"/>
+          <p:cNvSpPr txBox="1"/>
+          <p:nvPr/>
+        </p:nvSpPr>
+        <p:spPr>
+          <a:xfrm>
+            <a:off x="6446520" y="2103120"/>
+            <a:ext cx="4480560" cy="347472"/>
+          </a:xfrm>
+          <a:prstGeom prst="rect">
+            <a:avLst/>
+          </a:prstGeom>
+          <a:noFill/>
+        </p:spPr>
+        <p:txBody>
+          <a:bodyPr wrap="square">
+            <a:spAutoFit/>
+          </a:bodyPr>
+          <a:lstStyle/>
+          <a:p>
+            <a:pPr algn="l"/>
+            <a:r>
+              <a:rPr sz="1200" b="1" i="0">
+                <a:solidFill>
+                  <a:srgbClr val="FFCC00"/>
+                </a:solidFill>
+              </a:rPr>
+              <a:t>⚡ Kurzfristig</a:t>
+            </a:r>
+          </a:p>
+        </p:txBody>
+      </p:sp>
+      <p:sp>
+        <p:nvSpPr>
+          <p:cNvPr id="18" name="TextBox 17"/>
+          <p:cNvSpPr txBox="1"/>
+          <p:nvPr/>
+        </p:nvSpPr>
+        <p:spPr>
+          <a:xfrm>
+            <a:off x="6446520" y="2487168"/>
+            <a:ext cx="4480560" cy="347472"/>
+          </a:xfrm>
+          <a:prstGeom prst="rect">
+            <a:avLst/>
+          </a:prstGeom>
+          <a:noFill/>
+        </p:spPr>
+        <p:txBody>
+          <a:bodyPr wrap="square">
+            <a:spAutoFit/>
+          </a:bodyPr>
+          <a:lstStyle/>
+          <a:p>
+            <a:pPr algn="l"/>
+            <a:r>
+              <a:rPr sz="1100" b="0" i="0">
+                <a:solidFill>
+                  <a:srgbClr val="B0C4DE"/>
+                </a:solidFill>
+              </a:rPr>
+              <a:t>  →  Fehlerbehandlung (Error-Workflow)</a:t>
+            </a:r>
+          </a:p>
+        </p:txBody>
+      </p:sp>
+      <p:sp>
+        <p:nvSpPr>
+          <p:cNvPr id="19" name="TextBox 18"/>
+          <p:cNvSpPr txBox="1"/>
+          <p:nvPr/>
+        </p:nvSpPr>
+        <p:spPr>
+          <a:xfrm>
+            <a:off x="6446520" y="2834639"/>
+            <a:ext cx="4480560" cy="347472"/>
+          </a:xfrm>
+          <a:prstGeom prst="rect">
+            <a:avLst/>
+          </a:prstGeom>
+          <a:noFill/>
+        </p:spPr>
+        <p:txBody>
+          <a:bodyPr wrap="square">
+            <a:spAutoFit/>
+          </a:bodyPr>
+          <a:lstStyle/>
+          <a:p>
+            <a:pPr algn="l"/>
+            <a:r>
+              <a:rPr sz="1100" b="0" i="0">
+                <a:solidFill>
+                  <a:srgbClr val="B0C4DE"/>
+                </a:solidFill>
+              </a:rPr>
+              <a:t>  →  Druckdaten-Anhänge (Drive)</a:t>
+            </a:r>
+          </a:p>
+        </p:txBody>
+      </p:sp>
+      <p:sp>
+        <p:nvSpPr>
+          <p:cNvPr id="20" name="TextBox 19"/>
+          <p:cNvSpPr txBox="1"/>
+          <p:nvPr/>
+        </p:nvSpPr>
+        <p:spPr>
+          <a:xfrm>
+            <a:off x="6446520" y="3182111"/>
+            <a:ext cx="4480560" cy="347472"/>
+          </a:xfrm>
+          <a:prstGeom prst="rect">
+            <a:avLst/>
+          </a:prstGeom>
+          <a:noFill/>
+        </p:spPr>
+        <p:txBody>
+          <a:bodyPr wrap="square">
+            <a:spAutoFit/>
+          </a:bodyPr>
+          <a:lstStyle/>
+          <a:p>
+            <a:pPr algn="l"/>
+            <a:r>
+              <a:rPr sz="1100" b="0" i="0">
+                <a:solidFill>
+                  <a:srgbClr val="B0C4DE"/>
+                </a:solidFill>
+              </a:rPr>
+              <a:t>  →  End-to-End-Test Gmail + Webhook</a:t>
+            </a:r>
+          </a:p>
+        </p:txBody>
+      </p:sp>
+      <p:sp>
+        <p:nvSpPr>
+          <p:cNvPr id="21" name="TextBox 20"/>
+          <p:cNvSpPr txBox="1"/>
+          <p:nvPr/>
+        </p:nvSpPr>
+        <p:spPr>
+          <a:xfrm>
+            <a:off x="6446520" y="3666744"/>
+            <a:ext cx="4480560" cy="347472"/>
+          </a:xfrm>
+          <a:prstGeom prst="rect">
+            <a:avLst/>
+          </a:prstGeom>
+          <a:noFill/>
+        </p:spPr>
+        <p:txBody>
+          <a:bodyPr wrap="square">
+            <a:spAutoFit/>
+          </a:bodyPr>
+          <a:lstStyle/>
+          <a:p>
+            <a:pPr algn="l"/>
+            <a:r>
+              <a:rPr sz="1200" b="1" i="0">
+                <a:solidFill>
+                  <a:srgbClr val="F4A261"/>
+                </a:solidFill>
+              </a:rPr>
+              <a:t>📅 Mittelfristig</a:t>
+            </a:r>
+          </a:p>
+        </p:txBody>
+      </p:sp>
+      <p:sp>
+        <p:nvSpPr>
+          <p:cNvPr id="22" name="TextBox 21"/>
+          <p:cNvSpPr txBox="1"/>
+          <p:nvPr/>
+        </p:nvSpPr>
+        <p:spPr>
+          <a:xfrm>
+            <a:off x="6446520" y="4050791"/>
+            <a:ext cx="4480560" cy="347472"/>
+          </a:xfrm>
+          <a:prstGeom prst="rect">
+            <a:avLst/>
+          </a:prstGeom>
+          <a:noFill/>
+        </p:spPr>
+        <p:txBody>
+          <a:bodyPr wrap="square">
+            <a:spAutoFit/>
+          </a:bodyPr>
+          <a:lstStyle/>
+          <a:p>
+            <a:pPr algn="l"/>
+            <a:r>
+              <a:rPr sz="1100" b="0" i="0">
+                <a:solidFill>
+                  <a:srgbClr val="B0C4DE"/>
+                </a:solidFill>
+              </a:rPr>
+              <a:t>  →  Rechnung / CH-Quittung generieren</a:t>
+            </a:r>
+          </a:p>
+        </p:txBody>
+      </p:sp>
+      <p:sp>
+        <p:nvSpPr>
+          <p:cNvPr id="23" name="TextBox 22"/>
+          <p:cNvSpPr txBox="1"/>
+          <p:nvPr/>
+        </p:nvSpPr>
+        <p:spPr>
+          <a:xfrm>
+            <a:off x="6446520" y="4398264"/>
+            <a:ext cx="4480560" cy="347472"/>
+          </a:xfrm>
+          <a:prstGeom prst="rect">
+            <a:avLst/>
+          </a:prstGeom>
+          <a:noFill/>
+        </p:spPr>
+        <p:txBody>
+          <a:bodyPr wrap="square">
+            <a:spAutoFit/>
+          </a:bodyPr>
+          <a:lstStyle/>
+          <a:p>
+            <a:pPr algn="l"/>
+            <a:r>
+              <a:rPr sz="1100" b="0" i="0">
+                <a:solidFill>
+                  <a:srgbClr val="B0C4DE"/>
+                </a:solidFill>
+              </a:rPr>
+              <a:t>  →  Auftragsdatenbank (Sheets/Supabase)</a:t>
+            </a:r>
+          </a:p>
+        </p:txBody>
+      </p:sp>
+      <p:sp>
+        <p:nvSpPr>
+          <p:cNvPr id="24" name="TextBox 23"/>
+          <p:cNvSpPr txBox="1"/>
+          <p:nvPr/>
+        </p:nvSpPr>
+        <p:spPr>
+          <a:xfrm>
+            <a:off x="6446520" y="4745736"/>
+            <a:ext cx="4480560" cy="347472"/>
+          </a:xfrm>
+          <a:prstGeom prst="rect">
+            <a:avLst/>
+          </a:prstGeom>
+          <a:noFill/>
+        </p:spPr>
+        <p:txBody>
+          <a:bodyPr wrap="square">
+            <a:spAutoFit/>
+          </a:bodyPr>
+          <a:lstStyle/>
+          <a:p>
+            <a:pPr algn="l"/>
+            <a:r>
+              <a:rPr sz="1100" b="0" i="0">
+                <a:solidFill>
+                  <a:srgbClr val="B0C4DE"/>
+                </a:solidFill>
+              </a:rPr>
+              <a:t>  →  Twilio/WhatsApp Credentials</a:t>
+            </a:r>
+          </a:p>
+        </p:txBody>
+      </p:sp>
+      <p:sp>
+        <p:nvSpPr>
+          <p:cNvPr id="25" name="TextBox 24"/>
+          <p:cNvSpPr txBox="1"/>
+          <p:nvPr/>
+        </p:nvSpPr>
+        <p:spPr>
+          <a:xfrm>
+            <a:off x="6446520" y="5230368"/>
+            <a:ext cx="4480560" cy="347472"/>
+          </a:xfrm>
+          <a:prstGeom prst="rect">
+            <a:avLst/>
+          </a:prstGeom>
+          <a:noFill/>
+        </p:spPr>
+        <p:txBody>
+          <a:bodyPr wrap="square">
+            <a:spAutoFit/>
+          </a:bodyPr>
+          <a:lstStyle/>
+          <a:p>
+            <a:pPr algn="l"/>
+            <a:r>
+              <a:rPr sz="1200" b="1" i="0">
+                <a:solidFill>
+                  <a:srgbClr val="90E0B8"/>
+                </a:solidFill>
+              </a:rPr>
+              <a:t>🚀 Langfristig</a:t>
+            </a:r>
+          </a:p>
+        </p:txBody>
+      </p:sp>
+      <p:sp>
+        <p:nvSpPr>
+          <p:cNvPr id="26" name="TextBox 25"/>
+          <p:cNvSpPr txBox="1"/>
+          <p:nvPr/>
+        </p:nvSpPr>
+        <p:spPr>
+          <a:xfrm>
+            <a:off x="6446520" y="5614416"/>
+            <a:ext cx="4480560" cy="347472"/>
+          </a:xfrm>
+          <a:prstGeom prst="rect">
+            <a:avLst/>
+          </a:prstGeom>
+          <a:noFill/>
+        </p:spPr>
+        <p:txBody>
+          <a:bodyPr wrap="square">
+            <a:spAutoFit/>
+          </a:bodyPr>
+          <a:lstStyle/>
+          <a:p>
+            <a:pPr algn="l"/>
+            <a:r>
+              <a:rPr sz="1100" b="0" i="0">
+                <a:solidFill>
+                  <a:srgbClr val="B0C4DE"/>
+                </a:solidFill>
+              </a:rPr>
+              <a:t>  →  Telefontranskription (Deepgram)</a:t>
+            </a:r>
+          </a:p>
+        </p:txBody>
+      </p:sp>
+      <p:sp>
+        <p:nvSpPr>
+          <p:cNvPr id="27" name="TextBox 26"/>
+          <p:cNvSpPr txBox="1"/>
+          <p:nvPr/>
+        </p:nvSpPr>
+        <p:spPr>
+          <a:xfrm>
+            <a:off x="6446520" y="5961888"/>
+            <a:ext cx="4480560" cy="347472"/>
+          </a:xfrm>
+          <a:prstGeom prst="rect">
+            <a:avLst/>
+          </a:prstGeom>
+          <a:noFill/>
+        </p:spPr>
+        <p:txBody>
+          <a:bodyPr wrap="square">
+            <a:spAutoFit/>
+          </a:bodyPr>
+          <a:lstStyle/>
+          <a:p>
+            <a:pPr algn="l"/>
+            <a:r>
+              <a:rPr sz="1100" b="0" i="0">
+                <a:solidFill>
+                  <a:srgbClr val="B0C4DE"/>
+                </a:solidFill>
+              </a:rPr>
+              <a:t>  →  Kundenstatus-Portal</a:t>
+            </a:r>
+          </a:p>
+        </p:txBody>
+      </p:sp>
+      <p:sp>
+        <p:nvSpPr>
+          <p:cNvPr id="28" name="TextBox 27"/>
+          <p:cNvSpPr txBox="1"/>
+          <p:nvPr/>
+        </p:nvSpPr>
+        <p:spPr>
+          <a:xfrm>
+            <a:off x="6446520" y="6309359"/>
+            <a:ext cx="4480560" cy="347472"/>
+          </a:xfrm>
+          <a:prstGeom prst="rect">
+            <a:avLst/>
+          </a:prstGeom>
+          <a:noFill/>
+        </p:spPr>
+        <p:txBody>
+          <a:bodyPr wrap="square">
+            <a:spAutoFit/>
+          </a:bodyPr>
+          <a:lstStyle/>
+          <a:p>
+            <a:pPr algn="l"/>
+            <a:r>
+              <a:rPr sz="1100" b="0" i="0">
+                <a:solidFill>
+                  <a:srgbClr val="B0C4DE"/>
+                </a:solidFill>
+              </a:rPr>
+              <a:t>  →  Produktivbetrieb Schellenberg AG</a:t>
+            </a:r>
+          </a:p>
+        </p:txBody>
+      </p:sp>
+      <p:sp>
+        <p:nvSpPr>
+          <p:cNvPr id="29" name="Rectangle 28"/>
+          <p:cNvSpPr/>
+          <p:nvPr/>
+        </p:nvSpPr>
+        <p:spPr>
+          <a:xfrm>
+            <a:off x="914400" y="6492240"/>
+            <a:ext cx="10149840" cy="182880"/>
+          </a:xfrm>
+          <a:prstGeom prst="rect">
+            <a:avLst/>
+          </a:prstGeom>
+          <a:solidFill>
+            <a:srgbClr val="E85D04"/>
+          </a:solidFill>
+          <a:ln>
+            <a:noFill/>
+          </a:ln>
+        </p:spPr>
+        <p:style>
+          <a:lnRef idx="1">
+            <a:schemeClr val="accent1"/>
+          </a:lnRef>
+          <a:fillRef idx="3">
+            <a:schemeClr val="accent1"/>
+          </a:fillRef>
+          <a:effectRef idx="2">
+            <a:schemeClr val="accent1"/>
+          </a:effectRef>
+          <a:fontRef idx="minor">
+            <a:schemeClr val="lt1"/>
+          </a:fontRef>
+        </p:style>
+        <p:txBody>
+          <a:bodyPr rtlCol="0" anchor="ctr"/>
+          <a:lstStyle/>
+          <a:p>
+            <a:pPr algn="ctr"/>
+          </a:p>
+        </p:txBody>
+      </p:sp>
+      <p:sp>
+        <p:nvSpPr>
+          <p:cNvPr id="30" name="TextBox 29"/>
           <p:cNvSpPr txBox="1"/>
           <p:nvPr/>
         </p:nvSpPr>
